--- a/fake_news_detector_presentation.pptx
+++ b/fake_news_detector_presentation.pptx
@@ -5,7 +5,7 @@
     <p:sldMasterId id="2147483659" r:id="rId1"/>
   </p:sldMasterIdLst>
   <p:notesMasterIdLst>
-    <p:notesMasterId r:id="rId31"/>
+    <p:notesMasterId r:id="rId26"/>
   </p:notesMasterIdLst>
   <p:sldIdLst>
     <p:sldId id="256" r:id="rId2"/>
@@ -18,42 +18,37 @@
     <p:sldId id="269" r:id="rId9"/>
     <p:sldId id="270" r:id="rId10"/>
     <p:sldId id="260" r:id="rId11"/>
-    <p:sldId id="271" r:id="rId12"/>
-    <p:sldId id="274" r:id="rId13"/>
-    <p:sldId id="275" r:id="rId14"/>
-    <p:sldId id="273" r:id="rId15"/>
-    <p:sldId id="276" r:id="rId16"/>
-    <p:sldId id="277" r:id="rId17"/>
-    <p:sldId id="272" r:id="rId18"/>
-    <p:sldId id="278" r:id="rId19"/>
-    <p:sldId id="279" r:id="rId20"/>
-    <p:sldId id="261" r:id="rId21"/>
-    <p:sldId id="281" r:id="rId22"/>
-    <p:sldId id="280" r:id="rId23"/>
-    <p:sldId id="262" r:id="rId24"/>
-    <p:sldId id="282" r:id="rId25"/>
-    <p:sldId id="284" r:id="rId26"/>
-    <p:sldId id="263" r:id="rId27"/>
-    <p:sldId id="283" r:id="rId28"/>
-    <p:sldId id="264" r:id="rId29"/>
-    <p:sldId id="265" r:id="rId30"/>
+    <p:sldId id="274" r:id="rId12"/>
+    <p:sldId id="273" r:id="rId13"/>
+    <p:sldId id="272" r:id="rId14"/>
+    <p:sldId id="278" r:id="rId15"/>
+    <p:sldId id="261" r:id="rId16"/>
+    <p:sldId id="281" r:id="rId17"/>
+    <p:sldId id="280" r:id="rId18"/>
+    <p:sldId id="262" r:id="rId19"/>
+    <p:sldId id="282" r:id="rId20"/>
+    <p:sldId id="284" r:id="rId21"/>
+    <p:sldId id="263" r:id="rId22"/>
+    <p:sldId id="283" r:id="rId23"/>
+    <p:sldId id="264" r:id="rId24"/>
+    <p:sldId id="265" r:id="rId25"/>
   </p:sldIdLst>
   <p:sldSz cx="9144000" cy="5143500" type="screen16x9"/>
   <p:notesSz cx="6858000" cy="9144000"/>
   <p:embeddedFontLst>
     <p:embeddedFont>
       <p:font typeface="Open Sans" panose="020B0606030504020204" pitchFamily="34" charset="0"/>
-      <p:regular r:id="rId32"/>
-      <p:bold r:id="rId33"/>
-      <p:italic r:id="rId34"/>
-      <p:boldItalic r:id="rId35"/>
+      <p:regular r:id="rId27"/>
+      <p:bold r:id="rId28"/>
+      <p:italic r:id="rId29"/>
+      <p:boldItalic r:id="rId30"/>
     </p:embeddedFont>
     <p:embeddedFont>
       <p:font typeface="Roboto Serif" panose="020B0604020202020204" charset="0"/>
-      <p:regular r:id="rId36"/>
-      <p:bold r:id="rId37"/>
-      <p:italic r:id="rId38"/>
-      <p:boldItalic r:id="rId39"/>
+      <p:regular r:id="rId31"/>
+      <p:bold r:id="rId32"/>
+      <p:italic r:id="rId33"/>
+      <p:boldItalic r:id="rId34"/>
     </p:embeddedFont>
   </p:embeddedFontLst>
   <p:defaultTextStyle>
@@ -307,7 +302,7 @@
 <file path=ppt/revisionInfo.xml><?xml version="1.0" encoding="utf-8"?>
 <p1510:revInfo xmlns:a="http://schemas.openxmlformats.org/drawingml/2006/main" xmlns:r="http://schemas.openxmlformats.org/officeDocument/2006/relationships" xmlns:p1510="http://schemas.microsoft.com/office/powerpoint/2015/10/main">
   <p1510:revLst>
-    <p1510:client id="{FCAA58A9-FFDF-3BE6-B888-49A682F74449}" v="10" dt="2026-05-13T11:51:55.644"/>
+    <p1510:client id="{BEB7EDDE-4270-F340-3BC1-8A7A7F104CB4}" v="8" dt="2026-06-02T08:45:34.470"/>
   </p1510:revLst>
 </p1510:revInfo>
 </file>
@@ -1065,7 +1060,7 @@
     </p:spTree>
     <p:extLst>
       <p:ext uri="{BB962C8B-B14F-4D97-AF65-F5344CB8AC3E}">
-        <p14:creationId xmlns:p14="http://schemas.microsoft.com/office/powerpoint/2010/main" val="773512357"/>
+        <p14:creationId xmlns:p14="http://schemas.microsoft.com/office/powerpoint/2010/main" val="2168224745"/>
       </p:ext>
     </p:extLst>
   </p:cSld>
@@ -1174,7 +1169,7 @@
     </p:spTree>
     <p:extLst>
       <p:ext uri="{BB962C8B-B14F-4D97-AF65-F5344CB8AC3E}">
-        <p14:creationId xmlns:p14="http://schemas.microsoft.com/office/powerpoint/2010/main" val="2168224745"/>
+        <p14:creationId xmlns:p14="http://schemas.microsoft.com/office/powerpoint/2010/main" val="3593328877"/>
       </p:ext>
     </p:extLst>
   </p:cSld>
@@ -1283,7 +1278,7 @@
     </p:spTree>
     <p:extLst>
       <p:ext uri="{BB962C8B-B14F-4D97-AF65-F5344CB8AC3E}">
-        <p14:creationId xmlns:p14="http://schemas.microsoft.com/office/powerpoint/2010/main" val="568368206"/>
+        <p14:creationId xmlns:p14="http://schemas.microsoft.com/office/powerpoint/2010/main" val="1028470531"/>
       </p:ext>
     </p:extLst>
   </p:cSld>
@@ -1392,7 +1387,7 @@
     </p:spTree>
     <p:extLst>
       <p:ext uri="{BB962C8B-B14F-4D97-AF65-F5344CB8AC3E}">
-        <p14:creationId xmlns:p14="http://schemas.microsoft.com/office/powerpoint/2010/main" val="3593328877"/>
+        <p14:creationId xmlns:p14="http://schemas.microsoft.com/office/powerpoint/2010/main" val="2668840387"/>
       </p:ext>
     </p:extLst>
   </p:cSld>
@@ -1501,7 +1496,7 @@
     </p:spTree>
     <p:extLst>
       <p:ext uri="{BB962C8B-B14F-4D97-AF65-F5344CB8AC3E}">
-        <p14:creationId xmlns:p14="http://schemas.microsoft.com/office/powerpoint/2010/main" val="1849646371"/>
+        <p14:creationId xmlns:p14="http://schemas.microsoft.com/office/powerpoint/2010/main" val="1199650789"/>
       </p:ext>
     </p:extLst>
   </p:cSld>
@@ -1610,7 +1605,7 @@
     </p:spTree>
     <p:extLst>
       <p:ext uri="{BB962C8B-B14F-4D97-AF65-F5344CB8AC3E}">
-        <p14:creationId xmlns:p14="http://schemas.microsoft.com/office/powerpoint/2010/main" val="1969646372"/>
+        <p14:creationId xmlns:p14="http://schemas.microsoft.com/office/powerpoint/2010/main" val="2440978451"/>
       </p:ext>
     </p:extLst>
   </p:cSld>
@@ -1719,7 +1714,7 @@
     </p:spTree>
     <p:extLst>
       <p:ext uri="{BB962C8B-B14F-4D97-AF65-F5344CB8AC3E}">
-        <p14:creationId xmlns:p14="http://schemas.microsoft.com/office/powerpoint/2010/main" val="1028470531"/>
+        <p14:creationId xmlns:p14="http://schemas.microsoft.com/office/powerpoint/2010/main" val="985462890"/>
       </p:ext>
     </p:extLst>
   </p:cSld>
@@ -1828,7 +1823,7 @@
     </p:spTree>
     <p:extLst>
       <p:ext uri="{BB962C8B-B14F-4D97-AF65-F5344CB8AC3E}">
-        <p14:creationId xmlns:p14="http://schemas.microsoft.com/office/powerpoint/2010/main" val="2668840387"/>
+        <p14:creationId xmlns:p14="http://schemas.microsoft.com/office/powerpoint/2010/main" val="2197115292"/>
       </p:ext>
     </p:extLst>
   </p:cSld>
@@ -1937,7 +1932,7 @@
     </p:spTree>
     <p:extLst>
       <p:ext uri="{BB962C8B-B14F-4D97-AF65-F5344CB8AC3E}">
-        <p14:creationId xmlns:p14="http://schemas.microsoft.com/office/powerpoint/2010/main" val="2819195331"/>
+        <p14:creationId xmlns:p14="http://schemas.microsoft.com/office/powerpoint/2010/main" val="166945698"/>
       </p:ext>
     </p:extLst>
   </p:cSld>
@@ -2052,551 +2047,6 @@
 </file>
 
 <file path=ppt/notesSlides/notesSlide20.xml><?xml version="1.0" encoding="utf-8"?>
-<p:notes xmlns:a="http://schemas.openxmlformats.org/drawingml/2006/main" xmlns:r="http://schemas.openxmlformats.org/officeDocument/2006/relationships" xmlns:p="http://schemas.openxmlformats.org/presentationml/2006/main" showMasterSp="0" showMasterPhAnim="0">
-  <p:cSld>
-    <p:spTree>
-      <p:nvGrpSpPr>
-        <p:cNvPr id="1" name="Shape 62"/>
-        <p:cNvGrpSpPr/>
-        <p:nvPr/>
-      </p:nvGrpSpPr>
-      <p:grpSpPr>
-        <a:xfrm>
-          <a:off x="0" y="0"/>
-          <a:ext cx="0" cy="0"/>
-          <a:chOff x="0" y="0"/>
-          <a:chExt cx="0" cy="0"/>
-        </a:xfrm>
-      </p:grpSpPr>
-      <p:sp>
-        <p:nvSpPr>
-          <p:cNvPr id="63" name="Google Shape;63;g3421488a45a_0_775:notes"/>
-          <p:cNvSpPr>
-            <a:spLocks noGrp="1" noRot="1" noChangeAspect="1"/>
-          </p:cNvSpPr>
-          <p:nvPr>
-            <p:ph type="sldImg" idx="2"/>
-          </p:nvPr>
-        </p:nvSpPr>
-        <p:spPr>
-          <a:xfrm>
-            <a:off x="381000" y="685800"/>
-            <a:ext cx="6096000" cy="3429000"/>
-          </a:xfrm>
-          <a:custGeom>
-            <a:avLst/>
-            <a:gdLst/>
-            <a:ahLst/>
-            <a:cxnLst/>
-            <a:rect l="l" t="t" r="r" b="b"/>
-            <a:pathLst>
-              <a:path w="120000" h="120000" extrusionOk="0">
-                <a:moveTo>
-                  <a:pt x="0" y="0"/>
-                </a:moveTo>
-                <a:lnTo>
-                  <a:pt x="120000" y="0"/>
-                </a:lnTo>
-                <a:lnTo>
-                  <a:pt x="120000" y="120000"/>
-                </a:lnTo>
-                <a:lnTo>
-                  <a:pt x="0" y="120000"/>
-                </a:lnTo>
-                <a:close/>
-              </a:path>
-            </a:pathLst>
-          </a:custGeom>
-        </p:spPr>
-      </p:sp>
-      <p:sp>
-        <p:nvSpPr>
-          <p:cNvPr id="64" name="Google Shape;64;g3421488a45a_0_775:notes"/>
-          <p:cNvSpPr txBox="1">
-            <a:spLocks noGrp="1"/>
-          </p:cNvSpPr>
-          <p:nvPr>
-            <p:ph type="body" idx="1"/>
-          </p:nvPr>
-        </p:nvSpPr>
-        <p:spPr>
-          <a:xfrm>
-            <a:off x="685800" y="4343400"/>
-            <a:ext cx="5486400" cy="4114800"/>
-          </a:xfrm>
-          <a:prstGeom prst="rect">
-            <a:avLst/>
-          </a:prstGeom>
-        </p:spPr>
-        <p:txBody>
-          <a:bodyPr spcFirstLastPara="1" wrap="square" lIns="91425" tIns="91425" rIns="91425" bIns="91425" anchor="t" anchorCtr="0">
-            <a:noAutofit/>
-          </a:bodyPr>
-          <a:lstStyle/>
-          <a:p>
-            <a:pPr marL="0" lvl="0" indent="0" algn="l" rtl="0">
-              <a:spcBef>
-                <a:spcPts val="0"/>
-              </a:spcBef>
-              <a:spcAft>
-                <a:spcPts val="0"/>
-              </a:spcAft>
-              <a:buNone/>
-            </a:pPr>
-            <a:endParaRPr/>
-          </a:p>
-        </p:txBody>
-      </p:sp>
-    </p:spTree>
-    <p:extLst>
-      <p:ext uri="{BB962C8B-B14F-4D97-AF65-F5344CB8AC3E}">
-        <p14:creationId xmlns:p14="http://schemas.microsoft.com/office/powerpoint/2010/main" val="1199650789"/>
-      </p:ext>
-    </p:extLst>
-  </p:cSld>
-  <p:clrMapOvr>
-    <a:masterClrMapping/>
-  </p:clrMapOvr>
-</p:notes>
-</file>
-
-<file path=ppt/notesSlides/notesSlide21.xml><?xml version="1.0" encoding="utf-8"?>
-<p:notes xmlns:a="http://schemas.openxmlformats.org/drawingml/2006/main" xmlns:r="http://schemas.openxmlformats.org/officeDocument/2006/relationships" xmlns:p="http://schemas.openxmlformats.org/presentationml/2006/main" showMasterSp="0" showMasterPhAnim="0">
-  <p:cSld>
-    <p:spTree>
-      <p:nvGrpSpPr>
-        <p:cNvPr id="1" name="Shape 62"/>
-        <p:cNvGrpSpPr/>
-        <p:nvPr/>
-      </p:nvGrpSpPr>
-      <p:grpSpPr>
-        <a:xfrm>
-          <a:off x="0" y="0"/>
-          <a:ext cx="0" cy="0"/>
-          <a:chOff x="0" y="0"/>
-          <a:chExt cx="0" cy="0"/>
-        </a:xfrm>
-      </p:grpSpPr>
-      <p:sp>
-        <p:nvSpPr>
-          <p:cNvPr id="63" name="Google Shape;63;g3421488a45a_0_775:notes"/>
-          <p:cNvSpPr>
-            <a:spLocks noGrp="1" noRot="1" noChangeAspect="1"/>
-          </p:cNvSpPr>
-          <p:nvPr>
-            <p:ph type="sldImg" idx="2"/>
-          </p:nvPr>
-        </p:nvSpPr>
-        <p:spPr>
-          <a:xfrm>
-            <a:off x="381000" y="685800"/>
-            <a:ext cx="6096000" cy="3429000"/>
-          </a:xfrm>
-          <a:custGeom>
-            <a:avLst/>
-            <a:gdLst/>
-            <a:ahLst/>
-            <a:cxnLst/>
-            <a:rect l="l" t="t" r="r" b="b"/>
-            <a:pathLst>
-              <a:path w="120000" h="120000" extrusionOk="0">
-                <a:moveTo>
-                  <a:pt x="0" y="0"/>
-                </a:moveTo>
-                <a:lnTo>
-                  <a:pt x="120000" y="0"/>
-                </a:lnTo>
-                <a:lnTo>
-                  <a:pt x="120000" y="120000"/>
-                </a:lnTo>
-                <a:lnTo>
-                  <a:pt x="0" y="120000"/>
-                </a:lnTo>
-                <a:close/>
-              </a:path>
-            </a:pathLst>
-          </a:custGeom>
-        </p:spPr>
-      </p:sp>
-      <p:sp>
-        <p:nvSpPr>
-          <p:cNvPr id="64" name="Google Shape;64;g3421488a45a_0_775:notes"/>
-          <p:cNvSpPr txBox="1">
-            <a:spLocks noGrp="1"/>
-          </p:cNvSpPr>
-          <p:nvPr>
-            <p:ph type="body" idx="1"/>
-          </p:nvPr>
-        </p:nvSpPr>
-        <p:spPr>
-          <a:xfrm>
-            <a:off x="685800" y="4343400"/>
-            <a:ext cx="5486400" cy="4114800"/>
-          </a:xfrm>
-          <a:prstGeom prst="rect">
-            <a:avLst/>
-          </a:prstGeom>
-        </p:spPr>
-        <p:txBody>
-          <a:bodyPr spcFirstLastPara="1" wrap="square" lIns="91425" tIns="91425" rIns="91425" bIns="91425" anchor="t" anchorCtr="0">
-            <a:noAutofit/>
-          </a:bodyPr>
-          <a:lstStyle/>
-          <a:p>
-            <a:pPr marL="0" lvl="0" indent="0" algn="l" rtl="0">
-              <a:spcBef>
-                <a:spcPts val="0"/>
-              </a:spcBef>
-              <a:spcAft>
-                <a:spcPts val="0"/>
-              </a:spcAft>
-              <a:buNone/>
-            </a:pPr>
-            <a:endParaRPr/>
-          </a:p>
-        </p:txBody>
-      </p:sp>
-    </p:spTree>
-    <p:extLst>
-      <p:ext uri="{BB962C8B-B14F-4D97-AF65-F5344CB8AC3E}">
-        <p14:creationId xmlns:p14="http://schemas.microsoft.com/office/powerpoint/2010/main" val="2440978451"/>
-      </p:ext>
-    </p:extLst>
-  </p:cSld>
-  <p:clrMapOvr>
-    <a:masterClrMapping/>
-  </p:clrMapOvr>
-</p:notes>
-</file>
-
-<file path=ppt/notesSlides/notesSlide22.xml><?xml version="1.0" encoding="utf-8"?>
-<p:notes xmlns:a="http://schemas.openxmlformats.org/drawingml/2006/main" xmlns:r="http://schemas.openxmlformats.org/officeDocument/2006/relationships" xmlns:p="http://schemas.openxmlformats.org/presentationml/2006/main" showMasterSp="0" showMasterPhAnim="0">
-  <p:cSld>
-    <p:spTree>
-      <p:nvGrpSpPr>
-        <p:cNvPr id="1" name="Shape 62"/>
-        <p:cNvGrpSpPr/>
-        <p:nvPr/>
-      </p:nvGrpSpPr>
-      <p:grpSpPr>
-        <a:xfrm>
-          <a:off x="0" y="0"/>
-          <a:ext cx="0" cy="0"/>
-          <a:chOff x="0" y="0"/>
-          <a:chExt cx="0" cy="0"/>
-        </a:xfrm>
-      </p:grpSpPr>
-      <p:sp>
-        <p:nvSpPr>
-          <p:cNvPr id="63" name="Google Shape;63;g3421488a45a_0_775:notes"/>
-          <p:cNvSpPr>
-            <a:spLocks noGrp="1" noRot="1" noChangeAspect="1"/>
-          </p:cNvSpPr>
-          <p:nvPr>
-            <p:ph type="sldImg" idx="2"/>
-          </p:nvPr>
-        </p:nvSpPr>
-        <p:spPr>
-          <a:xfrm>
-            <a:off x="381000" y="685800"/>
-            <a:ext cx="6096000" cy="3429000"/>
-          </a:xfrm>
-          <a:custGeom>
-            <a:avLst/>
-            <a:gdLst/>
-            <a:ahLst/>
-            <a:cxnLst/>
-            <a:rect l="l" t="t" r="r" b="b"/>
-            <a:pathLst>
-              <a:path w="120000" h="120000" extrusionOk="0">
-                <a:moveTo>
-                  <a:pt x="0" y="0"/>
-                </a:moveTo>
-                <a:lnTo>
-                  <a:pt x="120000" y="0"/>
-                </a:lnTo>
-                <a:lnTo>
-                  <a:pt x="120000" y="120000"/>
-                </a:lnTo>
-                <a:lnTo>
-                  <a:pt x="0" y="120000"/>
-                </a:lnTo>
-                <a:close/>
-              </a:path>
-            </a:pathLst>
-          </a:custGeom>
-        </p:spPr>
-      </p:sp>
-      <p:sp>
-        <p:nvSpPr>
-          <p:cNvPr id="64" name="Google Shape;64;g3421488a45a_0_775:notes"/>
-          <p:cNvSpPr txBox="1">
-            <a:spLocks noGrp="1"/>
-          </p:cNvSpPr>
-          <p:nvPr>
-            <p:ph type="body" idx="1"/>
-          </p:nvPr>
-        </p:nvSpPr>
-        <p:spPr>
-          <a:xfrm>
-            <a:off x="685800" y="4343400"/>
-            <a:ext cx="5486400" cy="4114800"/>
-          </a:xfrm>
-          <a:prstGeom prst="rect">
-            <a:avLst/>
-          </a:prstGeom>
-        </p:spPr>
-        <p:txBody>
-          <a:bodyPr spcFirstLastPara="1" wrap="square" lIns="91425" tIns="91425" rIns="91425" bIns="91425" anchor="t" anchorCtr="0">
-            <a:noAutofit/>
-          </a:bodyPr>
-          <a:lstStyle/>
-          <a:p>
-            <a:pPr marL="0" lvl="0" indent="0" algn="l" rtl="0">
-              <a:spcBef>
-                <a:spcPts val="0"/>
-              </a:spcBef>
-              <a:spcAft>
-                <a:spcPts val="0"/>
-              </a:spcAft>
-              <a:buNone/>
-            </a:pPr>
-            <a:endParaRPr/>
-          </a:p>
-        </p:txBody>
-      </p:sp>
-    </p:spTree>
-    <p:extLst>
-      <p:ext uri="{BB962C8B-B14F-4D97-AF65-F5344CB8AC3E}">
-        <p14:creationId xmlns:p14="http://schemas.microsoft.com/office/powerpoint/2010/main" val="985462890"/>
-      </p:ext>
-    </p:extLst>
-  </p:cSld>
-  <p:clrMapOvr>
-    <a:masterClrMapping/>
-  </p:clrMapOvr>
-</p:notes>
-</file>
-
-<file path=ppt/notesSlides/notesSlide23.xml><?xml version="1.0" encoding="utf-8"?>
-<p:notes xmlns:a="http://schemas.openxmlformats.org/drawingml/2006/main" xmlns:r="http://schemas.openxmlformats.org/officeDocument/2006/relationships" xmlns:p="http://schemas.openxmlformats.org/presentationml/2006/main" showMasterSp="0" showMasterPhAnim="0">
-  <p:cSld>
-    <p:spTree>
-      <p:nvGrpSpPr>
-        <p:cNvPr id="1" name="Shape 62"/>
-        <p:cNvGrpSpPr/>
-        <p:nvPr/>
-      </p:nvGrpSpPr>
-      <p:grpSpPr>
-        <a:xfrm>
-          <a:off x="0" y="0"/>
-          <a:ext cx="0" cy="0"/>
-          <a:chOff x="0" y="0"/>
-          <a:chExt cx="0" cy="0"/>
-        </a:xfrm>
-      </p:grpSpPr>
-      <p:sp>
-        <p:nvSpPr>
-          <p:cNvPr id="63" name="Google Shape;63;g3421488a45a_0_775:notes"/>
-          <p:cNvSpPr>
-            <a:spLocks noGrp="1" noRot="1" noChangeAspect="1"/>
-          </p:cNvSpPr>
-          <p:nvPr>
-            <p:ph type="sldImg" idx="2"/>
-          </p:nvPr>
-        </p:nvSpPr>
-        <p:spPr>
-          <a:xfrm>
-            <a:off x="381000" y="685800"/>
-            <a:ext cx="6096000" cy="3429000"/>
-          </a:xfrm>
-          <a:custGeom>
-            <a:avLst/>
-            <a:gdLst/>
-            <a:ahLst/>
-            <a:cxnLst/>
-            <a:rect l="l" t="t" r="r" b="b"/>
-            <a:pathLst>
-              <a:path w="120000" h="120000" extrusionOk="0">
-                <a:moveTo>
-                  <a:pt x="0" y="0"/>
-                </a:moveTo>
-                <a:lnTo>
-                  <a:pt x="120000" y="0"/>
-                </a:lnTo>
-                <a:lnTo>
-                  <a:pt x="120000" y="120000"/>
-                </a:lnTo>
-                <a:lnTo>
-                  <a:pt x="0" y="120000"/>
-                </a:lnTo>
-                <a:close/>
-              </a:path>
-            </a:pathLst>
-          </a:custGeom>
-        </p:spPr>
-      </p:sp>
-      <p:sp>
-        <p:nvSpPr>
-          <p:cNvPr id="64" name="Google Shape;64;g3421488a45a_0_775:notes"/>
-          <p:cNvSpPr txBox="1">
-            <a:spLocks noGrp="1"/>
-          </p:cNvSpPr>
-          <p:nvPr>
-            <p:ph type="body" idx="1"/>
-          </p:nvPr>
-        </p:nvSpPr>
-        <p:spPr>
-          <a:xfrm>
-            <a:off x="685800" y="4343400"/>
-            <a:ext cx="5486400" cy="4114800"/>
-          </a:xfrm>
-          <a:prstGeom prst="rect">
-            <a:avLst/>
-          </a:prstGeom>
-        </p:spPr>
-        <p:txBody>
-          <a:bodyPr spcFirstLastPara="1" wrap="square" lIns="91425" tIns="91425" rIns="91425" bIns="91425" anchor="t" anchorCtr="0">
-            <a:noAutofit/>
-          </a:bodyPr>
-          <a:lstStyle/>
-          <a:p>
-            <a:pPr marL="0" lvl="0" indent="0" algn="l" rtl="0">
-              <a:spcBef>
-                <a:spcPts val="0"/>
-              </a:spcBef>
-              <a:spcAft>
-                <a:spcPts val="0"/>
-              </a:spcAft>
-              <a:buNone/>
-            </a:pPr>
-            <a:endParaRPr/>
-          </a:p>
-        </p:txBody>
-      </p:sp>
-    </p:spTree>
-    <p:extLst>
-      <p:ext uri="{BB962C8B-B14F-4D97-AF65-F5344CB8AC3E}">
-        <p14:creationId xmlns:p14="http://schemas.microsoft.com/office/powerpoint/2010/main" val="2197115292"/>
-      </p:ext>
-    </p:extLst>
-  </p:cSld>
-  <p:clrMapOvr>
-    <a:masterClrMapping/>
-  </p:clrMapOvr>
-</p:notes>
-</file>
-
-<file path=ppt/notesSlides/notesSlide24.xml><?xml version="1.0" encoding="utf-8"?>
-<p:notes xmlns:a="http://schemas.openxmlformats.org/drawingml/2006/main" xmlns:r="http://schemas.openxmlformats.org/officeDocument/2006/relationships" xmlns:p="http://schemas.openxmlformats.org/presentationml/2006/main" showMasterSp="0" showMasterPhAnim="0">
-  <p:cSld>
-    <p:spTree>
-      <p:nvGrpSpPr>
-        <p:cNvPr id="1" name="Shape 62"/>
-        <p:cNvGrpSpPr/>
-        <p:nvPr/>
-      </p:nvGrpSpPr>
-      <p:grpSpPr>
-        <a:xfrm>
-          <a:off x="0" y="0"/>
-          <a:ext cx="0" cy="0"/>
-          <a:chOff x="0" y="0"/>
-          <a:chExt cx="0" cy="0"/>
-        </a:xfrm>
-      </p:grpSpPr>
-      <p:sp>
-        <p:nvSpPr>
-          <p:cNvPr id="63" name="Google Shape;63;g3421488a45a_0_775:notes"/>
-          <p:cNvSpPr>
-            <a:spLocks noGrp="1" noRot="1" noChangeAspect="1"/>
-          </p:cNvSpPr>
-          <p:nvPr>
-            <p:ph type="sldImg" idx="2"/>
-          </p:nvPr>
-        </p:nvSpPr>
-        <p:spPr>
-          <a:xfrm>
-            <a:off x="381000" y="685800"/>
-            <a:ext cx="6096000" cy="3429000"/>
-          </a:xfrm>
-          <a:custGeom>
-            <a:avLst/>
-            <a:gdLst/>
-            <a:ahLst/>
-            <a:cxnLst/>
-            <a:rect l="l" t="t" r="r" b="b"/>
-            <a:pathLst>
-              <a:path w="120000" h="120000" extrusionOk="0">
-                <a:moveTo>
-                  <a:pt x="0" y="0"/>
-                </a:moveTo>
-                <a:lnTo>
-                  <a:pt x="120000" y="0"/>
-                </a:lnTo>
-                <a:lnTo>
-                  <a:pt x="120000" y="120000"/>
-                </a:lnTo>
-                <a:lnTo>
-                  <a:pt x="0" y="120000"/>
-                </a:lnTo>
-                <a:close/>
-              </a:path>
-            </a:pathLst>
-          </a:custGeom>
-        </p:spPr>
-      </p:sp>
-      <p:sp>
-        <p:nvSpPr>
-          <p:cNvPr id="64" name="Google Shape;64;g3421488a45a_0_775:notes"/>
-          <p:cNvSpPr txBox="1">
-            <a:spLocks noGrp="1"/>
-          </p:cNvSpPr>
-          <p:nvPr>
-            <p:ph type="body" idx="1"/>
-          </p:nvPr>
-        </p:nvSpPr>
-        <p:spPr>
-          <a:xfrm>
-            <a:off x="685800" y="4343400"/>
-            <a:ext cx="5486400" cy="4114800"/>
-          </a:xfrm>
-          <a:prstGeom prst="rect">
-            <a:avLst/>
-          </a:prstGeom>
-        </p:spPr>
-        <p:txBody>
-          <a:bodyPr spcFirstLastPara="1" wrap="square" lIns="91425" tIns="91425" rIns="91425" bIns="91425" anchor="t" anchorCtr="0">
-            <a:noAutofit/>
-          </a:bodyPr>
-          <a:lstStyle/>
-          <a:p>
-            <a:pPr marL="0" lvl="0" indent="0" algn="l" rtl="0">
-              <a:spcBef>
-                <a:spcPts val="0"/>
-              </a:spcBef>
-              <a:spcAft>
-                <a:spcPts val="0"/>
-              </a:spcAft>
-              <a:buNone/>
-            </a:pPr>
-            <a:endParaRPr/>
-          </a:p>
-        </p:txBody>
-      </p:sp>
-    </p:spTree>
-    <p:extLst>
-      <p:ext uri="{BB962C8B-B14F-4D97-AF65-F5344CB8AC3E}">
-        <p14:creationId xmlns:p14="http://schemas.microsoft.com/office/powerpoint/2010/main" val="166945698"/>
-      </p:ext>
-    </p:extLst>
-  </p:cSld>
-  <p:clrMapOvr>
-    <a:masterClrMapping/>
-  </p:clrMapOvr>
-</p:notes>
-</file>
-
-<file path=ppt/notesSlides/notesSlide25.xml><?xml version="1.0" encoding="utf-8"?>
 <p:notes xmlns:a="http://schemas.openxmlformats.org/drawingml/2006/main" xmlns:r="http://schemas.openxmlformats.org/officeDocument/2006/relationships" xmlns:p="http://schemas.openxmlformats.org/presentationml/2006/main" showMasterSp="0" showMasterPhAnim="0">
   <p:cSld>
     <p:spTree>
@@ -2723,7 +2173,7 @@
 </p:notes>
 </file>
 
-<file path=ppt/notesSlides/notesSlide26.xml><?xml version="1.0" encoding="utf-8"?>
+<file path=ppt/notesSlides/notesSlide21.xml><?xml version="1.0" encoding="utf-8"?>
 <p:notes xmlns:a="http://schemas.openxmlformats.org/drawingml/2006/main" xmlns:r="http://schemas.openxmlformats.org/officeDocument/2006/relationships" xmlns:p="http://schemas.openxmlformats.org/presentationml/2006/main" showMasterSp="0" showMasterPhAnim="0">
   <p:cSld>
     <p:spTree>
@@ -2832,7 +2282,7 @@
 </p:notes>
 </file>
 
-<file path=ppt/notesSlides/notesSlide27.xml><?xml version="1.0" encoding="utf-8"?>
+<file path=ppt/notesSlides/notesSlide22.xml><?xml version="1.0" encoding="utf-8"?>
 <p:notes xmlns:a="http://schemas.openxmlformats.org/drawingml/2006/main" xmlns:r="http://schemas.openxmlformats.org/officeDocument/2006/relationships" xmlns:p="http://schemas.openxmlformats.org/presentationml/2006/main" showMasterSp="0" showMasterPhAnim="0">
   <p:cSld>
     <p:spTree>
@@ -2941,7 +2391,7 @@
 </p:notes>
 </file>
 
-<file path=ppt/notesSlides/notesSlide28.xml><?xml version="1.0" encoding="utf-8"?>
+<file path=ppt/notesSlides/notesSlide23.xml><?xml version="1.0" encoding="utf-8"?>
 <p:notes xmlns:a="http://schemas.openxmlformats.org/drawingml/2006/main" xmlns:r="http://schemas.openxmlformats.org/officeDocument/2006/relationships" xmlns:p="http://schemas.openxmlformats.org/presentationml/2006/main" showMasterSp="0" showMasterPhAnim="0">
   <p:cSld>
     <p:spTree>
@@ -3050,7 +2500,7 @@
 </p:notes>
 </file>
 
-<file path=ppt/notesSlides/notesSlide29.xml><?xml version="1.0" encoding="utf-8"?>
+<file path=ppt/notesSlides/notesSlide24.xml><?xml version="1.0" encoding="utf-8"?>
 <p:notes xmlns:a="http://schemas.openxmlformats.org/drawingml/2006/main" xmlns:r="http://schemas.openxmlformats.org/officeDocument/2006/relationships" xmlns:p="http://schemas.openxmlformats.org/presentationml/2006/main" showMasterSp="0" showMasterPhAnim="0">
   <p:cSld>
     <p:spTree>
@@ -8745,7 +8195,7 @@
               </a:rPr>
             </a:br>
             <a:r>
-              <a:rPr lang="it-IT" sz="1800" b="1" dirty="0">
+              <a:rPr lang="it-IT" sz="1800" b="1">
                 <a:latin typeface="Roboto Serif"/>
                 <a:ea typeface="Roboto Serif"/>
                 <a:cs typeface="Roboto Serif"/>
@@ -8762,15 +8212,15 @@
               </a:rPr>
             </a:br>
             <a:r>
-              <a:rPr lang="it-IT" sz="1800" b="1" dirty="0">
+              <a:rPr lang="it-IT" sz="1800" b="1">
                 <a:latin typeface="Roboto Serif"/>
                 <a:ea typeface="Roboto Serif"/>
                 <a:cs typeface="Roboto Serif"/>
                 <a:sym typeface="Roboto Serif"/>
               </a:rPr>
-              <a:t>A.A. 2025-2026</a:t>
-            </a:r>
-            <a:endParaRPr sz="3600" b="1" dirty="0">
+              <a:t>A.Y. 2025-2026</a:t>
+            </a:r>
+            <a:endParaRPr sz="3600" b="1">
               <a:latin typeface="Roboto Serif"/>
               <a:ea typeface="Roboto Serif"/>
               <a:cs typeface="Roboto Serif"/>
@@ -9551,16 +9001,88 @@
         </p:spPr>
         <p:txBody>
           <a:bodyPr spcFirstLastPara="1" wrap="square" lIns="91425" tIns="91425" rIns="91425" bIns="91425" anchor="t" anchorCtr="0">
-            <a:normAutofit/>
+            <a:noAutofit/>
           </a:bodyPr>
           <a:lstStyle/>
           <a:p>
-            <a:endParaRPr lang="en-US" dirty="0">
-              <a:effectLst/>
-              <a:latin typeface="Open Sans" panose="020B0606030504020204" pitchFamily="34" charset="0"/>
-              <a:ea typeface="Open Sans" panose="020B0606030504020204" pitchFamily="34" charset="0"/>
-              <a:cs typeface="Open Sans" panose="020B0606030504020204" pitchFamily="34" charset="0"/>
-            </a:endParaRPr>
+            <a:r>
+              <a:rPr lang="en-US" sz="1700" b="1" dirty="0">
+                <a:effectLst/>
+                <a:latin typeface="Open Sans" panose="020B0606030504020204" pitchFamily="34" charset="0"/>
+                <a:ea typeface="Open Sans" panose="020B0606030504020204" pitchFamily="34" charset="0"/>
+                <a:cs typeface="Open Sans" panose="020B0606030504020204" pitchFamily="34" charset="0"/>
+              </a:rPr>
+              <a:t>Lexical Casing</a:t>
+            </a:r>
+            <a:r>
+              <a:rPr lang="en-US" sz="1700" dirty="0">
+                <a:effectLst/>
+                <a:latin typeface="Open Sans" panose="020B0606030504020204" pitchFamily="34" charset="0"/>
+                <a:ea typeface="Open Sans" panose="020B0606030504020204" pitchFamily="34" charset="0"/>
+                <a:cs typeface="Open Sans" panose="020B0606030504020204" pitchFamily="34" charset="0"/>
+              </a:rPr>
+              <a:t>: We calculated the percentage of uppercase words. High frequencies of capitalized text are a common proxy for sensationalism.</a:t>
+            </a:r>
+          </a:p>
+          <a:p>
+            <a:r>
+              <a:rPr lang="en-US" sz="1700" b="1" dirty="0">
+                <a:effectLst/>
+                <a:latin typeface="Open Sans" panose="020B0606030504020204" pitchFamily="34" charset="0"/>
+                <a:ea typeface="Open Sans" panose="020B0606030504020204" pitchFamily="34" charset="0"/>
+                <a:cs typeface="Open Sans" panose="020B0606030504020204" pitchFamily="34" charset="0"/>
+              </a:rPr>
+              <a:t>Article Volumetry</a:t>
+            </a:r>
+            <a:r>
+              <a:rPr lang="en-US" sz="1700" dirty="0">
+                <a:effectLst/>
+                <a:latin typeface="Open Sans" panose="020B0606030504020204" pitchFamily="34" charset="0"/>
+                <a:ea typeface="Open Sans" panose="020B0606030504020204" pitchFamily="34" charset="0"/>
+                <a:cs typeface="Open Sans" panose="020B0606030504020204" pitchFamily="34" charset="0"/>
+              </a:rPr>
+              <a:t>: We integrated the size of the article (total word count), as fake news often lacks the depth and length of authentic journalism.</a:t>
+            </a:r>
+          </a:p>
+          <a:p>
+            <a:r>
+              <a:rPr lang="en-US" sz="1700" b="1" dirty="0">
+                <a:effectLst/>
+                <a:latin typeface="Open Sans" panose="020B0606030504020204" pitchFamily="34" charset="0"/>
+                <a:ea typeface="Open Sans" panose="020B0606030504020204" pitchFamily="34" charset="0"/>
+                <a:cs typeface="Open Sans" panose="020B0606030504020204" pitchFamily="34" charset="0"/>
+              </a:rPr>
+              <a:t>Linguistic Integrity</a:t>
+            </a:r>
+            <a:r>
+              <a:rPr lang="en-US" sz="1700" dirty="0">
+                <a:effectLst/>
+                <a:latin typeface="Open Sans" panose="020B0606030504020204" pitchFamily="34" charset="0"/>
+                <a:ea typeface="Open Sans" panose="020B0606030504020204" pitchFamily="34" charset="0"/>
+                <a:cs typeface="Open Sans" panose="020B0606030504020204" pitchFamily="34" charset="0"/>
+              </a:rPr>
+              <a:t>: A dedicated module quantified the number of spelling errors, distinguishing professionally edited news from unverified content.</a:t>
+            </a:r>
+          </a:p>
+          <a:p>
+            <a:r>
+              <a:rPr lang="en-US" sz="1700" b="1" dirty="0">
+                <a:effectLst/>
+                <a:latin typeface="Open Sans" panose="020B0606030504020204" pitchFamily="34" charset="0"/>
+                <a:ea typeface="Open Sans" panose="020B0606030504020204" pitchFamily="34" charset="0"/>
+                <a:cs typeface="Open Sans" panose="020B0606030504020204" pitchFamily="34" charset="0"/>
+              </a:rPr>
+              <a:t>Punctuation Analysis</a:t>
+            </a:r>
+            <a:r>
+              <a:rPr lang="en-US" sz="1700" dirty="0">
+                <a:effectLst/>
+                <a:latin typeface="Open Sans" panose="020B0606030504020204" pitchFamily="34" charset="0"/>
+                <a:ea typeface="Open Sans" panose="020B0606030504020204" pitchFamily="34" charset="0"/>
+                <a:cs typeface="Open Sans" panose="020B0606030504020204" pitchFamily="34" charset="0"/>
+              </a:rPr>
+              <a:t>: We tracked the density of exclamation (!) and question marks (?) to detect inflammatory or non-neutral rhetoric.</a:t>
+            </a:r>
           </a:p>
           <a:p>
             <a:pPr marL="457200" lvl="0" indent="-342900" algn="l" rtl="0">
@@ -9577,7 +9099,7 @@
               <a:buFont typeface="Times New Roman"/>
               <a:buChar char="●"/>
             </a:pPr>
-            <a:endParaRPr lang="it-IT" dirty="0">
+            <a:endParaRPr lang="it-IT" sz="1700" dirty="0">
               <a:latin typeface="Open Sans" panose="020B0606030504020204" pitchFamily="34" charset="0"/>
               <a:ea typeface="Open Sans" panose="020B0606030504020204" pitchFamily="34" charset="0"/>
               <a:cs typeface="Open Sans" panose="020B0606030504020204" pitchFamily="34" charset="0"/>
@@ -9627,7 +9149,7 @@
                 <a:cs typeface="Times New Roman"/>
                 <a:sym typeface="Times New Roman"/>
               </a:rPr>
-              <a:t>10/27</a:t>
+              <a:t>11/27</a:t>
             </a:r>
             <a:endParaRPr dirty="0">
               <a:latin typeface="Times New Roman"/>
@@ -9953,75 +9475,15 @@
                 <a:cs typeface="Roboto Serif"/>
                 <a:sym typeface="Roboto Serif"/>
               </a:rPr>
-              <a:t>Data Cleaning and Data Integration</a:t>
+              <a:t>Stylometric Feature Engineering</a:t>
             </a:r>
           </a:p>
         </p:txBody>
       </p:sp>
-      <p:pic>
-        <p:nvPicPr>
-          <p:cNvPr id="4" name="Picture 3">
-            <a:extLst>
-              <a:ext uri="{FF2B5EF4-FFF2-40B4-BE49-F238E27FC236}">
-                <a16:creationId xmlns:a16="http://schemas.microsoft.com/office/drawing/2014/main" id="{9AC5C5CD-8492-376D-B7B8-1C894A90E963}"/>
-              </a:ext>
-            </a:extLst>
-          </p:cNvPr>
-          <p:cNvPicPr>
-            <a:picLocks noChangeAspect="1"/>
-          </p:cNvPicPr>
-          <p:nvPr/>
-        </p:nvPicPr>
-        <p:blipFill>
-          <a:blip r:embed="rId3"/>
-          <a:stretch>
-            <a:fillRect/>
-          </a:stretch>
-        </p:blipFill>
-        <p:spPr>
-          <a:xfrm>
-            <a:off x="1772368" y="3226493"/>
-            <a:ext cx="5599263" cy="418305"/>
-          </a:xfrm>
-          <a:prstGeom prst="rect">
-            <a:avLst/>
-          </a:prstGeom>
-        </p:spPr>
-      </p:pic>
-      <p:pic>
-        <p:nvPicPr>
-          <p:cNvPr id="7" name="Picture 6" descr="A screen shot of a computer code&#10;&#10;AI-generated content may be incorrect.">
-            <a:extLst>
-              <a:ext uri="{FF2B5EF4-FFF2-40B4-BE49-F238E27FC236}">
-                <a16:creationId xmlns:a16="http://schemas.microsoft.com/office/drawing/2014/main" id="{660F32BA-D019-4382-C506-08239F37E078}"/>
-              </a:ext>
-            </a:extLst>
-          </p:cNvPr>
-          <p:cNvPicPr>
-            <a:picLocks noChangeAspect="1"/>
-          </p:cNvPicPr>
-          <p:nvPr/>
-        </p:nvPicPr>
-        <p:blipFill>
-          <a:blip r:embed="rId4"/>
-          <a:stretch>
-            <a:fillRect/>
-          </a:stretch>
-        </p:blipFill>
-        <p:spPr>
-          <a:xfrm>
-            <a:off x="1530240" y="1778930"/>
-            <a:ext cx="6083520" cy="1002777"/>
-          </a:xfrm>
-          <a:prstGeom prst="rect">
-            <a:avLst/>
-          </a:prstGeom>
-        </p:spPr>
-      </p:pic>
     </p:spTree>
     <p:extLst>
       <p:ext uri="{BB962C8B-B14F-4D97-AF65-F5344CB8AC3E}">
-        <p14:creationId xmlns:p14="http://schemas.microsoft.com/office/powerpoint/2010/main" val="1463387416"/>
+        <p14:creationId xmlns:p14="http://schemas.microsoft.com/office/powerpoint/2010/main" val="1934266112"/>
       </p:ext>
     </p:extLst>
   </p:cSld>
@@ -10113,7 +9575,7 @@
         </p:nvSpPr>
         <p:spPr>
           <a:xfrm>
-            <a:off x="311700" y="1655798"/>
+            <a:off x="311700" y="1577250"/>
             <a:ext cx="8520600" cy="1989000"/>
           </a:xfrm>
           <a:prstGeom prst="rect">
@@ -10127,100 +9589,148 @@
           <a:lstStyle/>
           <a:p>
             <a:r>
-              <a:rPr lang="en-US" sz="1700" b="1" dirty="0">
+              <a:rPr lang="en-US" sz="1600" b="1" dirty="0">
                 <a:effectLst/>
                 <a:latin typeface="Open Sans" panose="020B0606030504020204" pitchFamily="34" charset="0"/>
                 <a:ea typeface="Open Sans" panose="020B0606030504020204" pitchFamily="34" charset="0"/>
                 <a:cs typeface="Open Sans" panose="020B0606030504020204" pitchFamily="34" charset="0"/>
               </a:rPr>
-              <a:t>Lexical Casing</a:t>
-            </a:r>
-            <a:r>
-              <a:rPr lang="en-US" sz="1700" dirty="0">
+              <a:t>Noise Removal</a:t>
+            </a:r>
+            <a:r>
+              <a:rPr lang="en-US" sz="1600" dirty="0">
                 <a:effectLst/>
                 <a:latin typeface="Open Sans" panose="020B0606030504020204" pitchFamily="34" charset="0"/>
                 <a:ea typeface="Open Sans" panose="020B0606030504020204" pitchFamily="34" charset="0"/>
                 <a:cs typeface="Open Sans" panose="020B0606030504020204" pitchFamily="34" charset="0"/>
               </a:rPr>
-              <a:t>: We calculated the percentage of uppercase words. High frequencies of capitalized text are a common proxy for sensationalism.</a:t>
-            </a:r>
-          </a:p>
-          <a:p>
-            <a:r>
-              <a:rPr lang="en-US" sz="1700" b="1" dirty="0">
+              <a:t>: We stripped non-alphanumeric characters using regular expressions.</a:t>
+            </a:r>
+          </a:p>
+          <a:p>
+            <a:r>
+              <a:rPr lang="en-US" sz="1600" b="1" dirty="0">
                 <a:effectLst/>
                 <a:latin typeface="Open Sans" panose="020B0606030504020204" pitchFamily="34" charset="0"/>
                 <a:ea typeface="Open Sans" panose="020B0606030504020204" pitchFamily="34" charset="0"/>
                 <a:cs typeface="Open Sans" panose="020B0606030504020204" pitchFamily="34" charset="0"/>
               </a:rPr>
-              <a:t>Article Volumetry</a:t>
-            </a:r>
-            <a:r>
-              <a:rPr lang="en-US" sz="1700" dirty="0">
+              <a:t>Case Folding</a:t>
+            </a:r>
+            <a:r>
+              <a:rPr lang="en-US" sz="1600" dirty="0">
                 <a:effectLst/>
                 <a:latin typeface="Open Sans" panose="020B0606030504020204" pitchFamily="34" charset="0"/>
                 <a:ea typeface="Open Sans" panose="020B0606030504020204" pitchFamily="34" charset="0"/>
                 <a:cs typeface="Open Sans" panose="020B0606030504020204" pitchFamily="34" charset="0"/>
               </a:rPr>
-              <a:t>: We integrated the size of the article (total word count), as fake news often lacks the depth and length of authentic journalism.</a:t>
-            </a:r>
-          </a:p>
-          <a:p>
-            <a:r>
-              <a:rPr lang="en-US" sz="1700" b="1" dirty="0">
+              <a:t>: All text was converted to lowercase to unify the vocabulary.</a:t>
+            </a:r>
+          </a:p>
+          <a:p>
+            <a:r>
+              <a:rPr lang="en-US" sz="1600" b="1" dirty="0">
                 <a:effectLst/>
                 <a:latin typeface="Open Sans" panose="020B0606030504020204" pitchFamily="34" charset="0"/>
                 <a:ea typeface="Open Sans" panose="020B0606030504020204" pitchFamily="34" charset="0"/>
                 <a:cs typeface="Open Sans" panose="020B0606030504020204" pitchFamily="34" charset="0"/>
               </a:rPr>
-              <a:t>Linguistic Integrity</a:t>
-            </a:r>
-            <a:r>
-              <a:rPr lang="en-US" sz="1700" dirty="0">
+              <a:t>Tokenization</a:t>
+            </a:r>
+            <a:r>
+              <a:rPr lang="en-US" sz="1600" dirty="0">
                 <a:effectLst/>
                 <a:latin typeface="Open Sans" panose="020B0606030504020204" pitchFamily="34" charset="0"/>
                 <a:ea typeface="Open Sans" panose="020B0606030504020204" pitchFamily="34" charset="0"/>
                 <a:cs typeface="Open Sans" panose="020B0606030504020204" pitchFamily="34" charset="0"/>
               </a:rPr>
-              <a:t>: A dedicated module quantified the number of spelling errors, distinguishing professionally edited news from unverified content.</a:t>
-            </a:r>
-          </a:p>
-          <a:p>
-            <a:r>
-              <a:rPr lang="en-US" sz="1700" b="1" dirty="0">
+              <a:t>: The clean text was segmented into individual tokens (words), which serve as the fundamental units for the subsequent vectorization.</a:t>
+            </a:r>
+          </a:p>
+          <a:p>
+            <a:r>
+              <a:rPr lang="en-US" sz="1600" b="1" dirty="0">
                 <a:effectLst/>
                 <a:latin typeface="Open Sans" panose="020B0606030504020204" pitchFamily="34" charset="0"/>
                 <a:ea typeface="Open Sans" panose="020B0606030504020204" pitchFamily="34" charset="0"/>
                 <a:cs typeface="Open Sans" panose="020B0606030504020204" pitchFamily="34" charset="0"/>
               </a:rPr>
-              <a:t>Punctuation Analysis</a:t>
-            </a:r>
-            <a:r>
-              <a:rPr lang="en-US" sz="1700" dirty="0">
+              <a:t>Lemmatization</a:t>
+            </a:r>
+            <a:r>
+              <a:rPr lang="en-US" sz="1600" dirty="0">
                 <a:effectLst/>
                 <a:latin typeface="Open Sans" panose="020B0606030504020204" pitchFamily="34" charset="0"/>
                 <a:ea typeface="Open Sans" panose="020B0606030504020204" pitchFamily="34" charset="0"/>
                 <a:cs typeface="Open Sans" panose="020B0606030504020204" pitchFamily="34" charset="0"/>
               </a:rPr>
-              <a:t>: We tracked the density of exclamation (!) and question marks (?) to detect inflammatory or non-neutral rhetoric.</a:t>
-            </a:r>
-          </a:p>
-          <a:p>
-            <a:pPr marL="457200" lvl="0" indent="-342900" algn="l" rtl="0">
-              <a:lnSpc>
-                <a:spcPct val="150000"/>
-              </a:lnSpc>
-              <a:spcBef>
-                <a:spcPts val="0"/>
-              </a:spcBef>
-              <a:spcAft>
-                <a:spcPts val="0"/>
-              </a:spcAft>
-              <a:buSzPts val="1800"/>
-              <a:buFont typeface="Times New Roman"/>
-              <a:buChar char="●"/>
-            </a:pPr>
-            <a:endParaRPr lang="it-IT" sz="1700" dirty="0">
+              <a:t>: To group inflected forms of words, tokens were reduced to their morphological roots (e.g., ”running” to ”run”), thereby reducing the dimensionality of the feature space without losing semantic meaning.</a:t>
+            </a:r>
+          </a:p>
+          <a:p>
+            <a:r>
+              <a:rPr lang="en-US" sz="1600" b="1" dirty="0">
+                <a:effectLst/>
+                <a:latin typeface="Open Sans" panose="020B0606030504020204" pitchFamily="34" charset="0"/>
+                <a:ea typeface="Open Sans" panose="020B0606030504020204" pitchFamily="34" charset="0"/>
+                <a:cs typeface="Open Sans" panose="020B0606030504020204" pitchFamily="34" charset="0"/>
+              </a:rPr>
+              <a:t>Custom </a:t>
+            </a:r>
+            <a:r>
+              <a:rPr lang="en-US" sz="1600" b="1" dirty="0" err="1">
+                <a:effectLst/>
+                <a:latin typeface="Open Sans" panose="020B0606030504020204" pitchFamily="34" charset="0"/>
+                <a:ea typeface="Open Sans" panose="020B0606030504020204" pitchFamily="34" charset="0"/>
+                <a:cs typeface="Open Sans" panose="020B0606030504020204" pitchFamily="34" charset="0"/>
+              </a:rPr>
+              <a:t>Stopword</a:t>
+            </a:r>
+            <a:r>
+              <a:rPr lang="en-US" sz="1600" b="1" dirty="0">
+                <a:effectLst/>
+                <a:latin typeface="Open Sans" panose="020B0606030504020204" pitchFamily="34" charset="0"/>
+                <a:ea typeface="Open Sans" panose="020B0606030504020204" pitchFamily="34" charset="0"/>
+                <a:cs typeface="Open Sans" panose="020B0606030504020204" pitchFamily="34" charset="0"/>
+              </a:rPr>
+              <a:t> Elimination</a:t>
+            </a:r>
+            <a:r>
+              <a:rPr lang="en-US" sz="1600" dirty="0">
+                <a:effectLst/>
+                <a:latin typeface="Open Sans" panose="020B0606030504020204" pitchFamily="34" charset="0"/>
+                <a:ea typeface="Open Sans" panose="020B0606030504020204" pitchFamily="34" charset="0"/>
+                <a:cs typeface="Open Sans" panose="020B0606030504020204" pitchFamily="34" charset="0"/>
+              </a:rPr>
+              <a:t>: Beyond standard English </a:t>
+            </a:r>
+            <a:r>
+              <a:rPr lang="en-US" sz="1600" dirty="0" err="1">
+                <a:effectLst/>
+                <a:latin typeface="Open Sans" panose="020B0606030504020204" pitchFamily="34" charset="0"/>
+                <a:ea typeface="Open Sans" panose="020B0606030504020204" pitchFamily="34" charset="0"/>
+                <a:cs typeface="Open Sans" panose="020B0606030504020204" pitchFamily="34" charset="0"/>
+              </a:rPr>
+              <a:t>stopwords</a:t>
+            </a:r>
+            <a:r>
+              <a:rPr lang="en-US" sz="1600" dirty="0">
+                <a:latin typeface="Open Sans" panose="020B0606030504020204" pitchFamily="34" charset="0"/>
+                <a:ea typeface="Open Sans" panose="020B0606030504020204" pitchFamily="34" charset="0"/>
+                <a:cs typeface="Open Sans" panose="020B0606030504020204" pitchFamily="34" charset="0"/>
+              </a:rPr>
+              <a:t> </a:t>
+            </a:r>
+            <a:r>
+              <a:rPr lang="en-US" sz="1600" dirty="0">
+                <a:effectLst/>
+                <a:latin typeface="Open Sans" panose="020B0606030504020204" pitchFamily="34" charset="0"/>
+                <a:ea typeface="Open Sans" panose="020B0606030504020204" pitchFamily="34" charset="0"/>
+                <a:cs typeface="Open Sans" panose="020B0606030504020204" pitchFamily="34" charset="0"/>
+              </a:rPr>
+              <a:t>(e.g., ”of”, ”the”, ”in”), we implemented a targeted exclusion list based on our exploratory N-gram analysis.</a:t>
+            </a:r>
+            <a:endParaRPr lang="it-IT" sz="1600" dirty="0">
               <a:latin typeface="Open Sans" panose="020B0606030504020204" pitchFamily="34" charset="0"/>
               <a:ea typeface="Open Sans" panose="020B0606030504020204" pitchFamily="34" charset="0"/>
               <a:cs typeface="Open Sans" panose="020B0606030504020204" pitchFamily="34" charset="0"/>
@@ -10270,7 +9780,7 @@
                 <a:cs typeface="Times New Roman"/>
                 <a:sym typeface="Times New Roman"/>
               </a:rPr>
-              <a:t>11/27</a:t>
+              <a:t>13/27</a:t>
             </a:r>
             <a:endParaRPr dirty="0">
               <a:latin typeface="Times New Roman"/>
@@ -10590,21 +10100,27 @@
               <a:buSzPts val="990"/>
             </a:pPr>
             <a:r>
-              <a:rPr lang="it-IT" sz="2000" b="1" dirty="0">
+              <a:rPr lang="en-US" sz="2000" b="1" dirty="0">
                 <a:latin typeface="Roboto Serif"/>
                 <a:ea typeface="Roboto Serif"/>
                 <a:cs typeface="Roboto Serif"/>
                 <a:sym typeface="Roboto Serif"/>
               </a:rPr>
-              <a:t>Stylometric Feature Engineering</a:t>
-            </a:r>
+              <a:t>Text Normalization, Tokenization, and Leak-age Prevention</a:t>
+            </a:r>
+            <a:endParaRPr lang="it-IT" sz="2000" b="1" dirty="0">
+              <a:latin typeface="Roboto Serif"/>
+              <a:ea typeface="Roboto Serif"/>
+              <a:cs typeface="Roboto Serif"/>
+              <a:sym typeface="Roboto Serif"/>
+            </a:endParaRPr>
           </a:p>
         </p:txBody>
       </p:sp>
     </p:spTree>
     <p:extLst>
       <p:ext uri="{BB962C8B-B14F-4D97-AF65-F5344CB8AC3E}">
-        <p14:creationId xmlns:p14="http://schemas.microsoft.com/office/powerpoint/2010/main" val="1934266112"/>
+        <p14:creationId xmlns:p14="http://schemas.microsoft.com/office/powerpoint/2010/main" val="2344727114"/>
       </p:ext>
     </p:extLst>
   </p:cSld>
@@ -10696,8 +10212,8 @@
         </p:nvSpPr>
         <p:spPr>
           <a:xfrm>
-            <a:off x="311700" y="1655798"/>
-            <a:ext cx="8520600" cy="1989000"/>
+            <a:off x="311699" y="1655797"/>
+            <a:ext cx="8770423" cy="3007420"/>
           </a:xfrm>
           <a:prstGeom prst="rect">
             <a:avLst/>
@@ -10705,30 +10221,148 @@
         </p:spPr>
         <p:txBody>
           <a:bodyPr spcFirstLastPara="1" wrap="square" lIns="91425" tIns="91425" rIns="91425" bIns="91425" anchor="t" anchorCtr="0">
-            <a:normAutofit/>
+            <a:normAutofit lnSpcReduction="10000"/>
           </a:bodyPr>
           <a:lstStyle/>
           <a:p>
-            <a:pPr marL="457200" lvl="0" indent="-342900" algn="l" rtl="0">
-              <a:lnSpc>
-                <a:spcPct val="150000"/>
-              </a:lnSpc>
-              <a:spcBef>
-                <a:spcPts val="0"/>
-              </a:spcBef>
-              <a:spcAft>
-                <a:spcPts val="0"/>
-              </a:spcAft>
-              <a:buSzPts val="1800"/>
-              <a:buFont typeface="Times New Roman"/>
-              <a:buChar char="●"/>
-            </a:pPr>
-            <a:endParaRPr lang="it-IT" dirty="0">
-              <a:latin typeface="Open Sans"/>
-              <a:ea typeface="Open Sans"/>
-              <a:cs typeface="Open Sans"/>
-              <a:sym typeface="Open Sans"/>
-            </a:endParaRPr>
+            <a:r>
+              <a:rPr lang="en-US" sz="1700" b="1" dirty="0">
+                <a:effectLst/>
+                <a:latin typeface="Open Sans" panose="020B0606030504020204" pitchFamily="34" charset="0"/>
+                <a:ea typeface="Open Sans" panose="020B0606030504020204" pitchFamily="34" charset="0"/>
+                <a:cs typeface="Open Sans" panose="020B0606030504020204" pitchFamily="34" charset="0"/>
+              </a:rPr>
+              <a:t>Configuration</a:t>
+            </a:r>
+            <a:r>
+              <a:rPr lang="en-US" sz="1700" dirty="0">
+                <a:effectLst/>
+                <a:latin typeface="Open Sans" panose="020B0606030504020204" pitchFamily="34" charset="0"/>
+                <a:ea typeface="Open Sans" panose="020B0606030504020204" pitchFamily="34" charset="0"/>
+                <a:cs typeface="Open Sans" panose="020B0606030504020204" pitchFamily="34" charset="0"/>
+              </a:rPr>
+              <a:t>:  TF-IDF using 10,000 features (Unigrams &amp; Bigrams).</a:t>
+            </a:r>
+          </a:p>
+          <a:p>
+            <a:r>
+              <a:rPr lang="en-US" sz="1700" b="1" dirty="0">
+                <a:effectLst/>
+                <a:latin typeface="Open Sans" panose="020B0606030504020204" pitchFamily="34" charset="0"/>
+                <a:ea typeface="Open Sans" panose="020B0606030504020204" pitchFamily="34" charset="0"/>
+                <a:cs typeface="Open Sans" panose="020B0606030504020204" pitchFamily="34" charset="0"/>
+              </a:rPr>
+              <a:t>Dimensionality Control</a:t>
+            </a:r>
+            <a:r>
+              <a:rPr lang="en-US" sz="1700" dirty="0">
+                <a:effectLst/>
+                <a:latin typeface="Open Sans" panose="020B0606030504020204" pitchFamily="34" charset="0"/>
+                <a:ea typeface="Open Sans" panose="020B0606030504020204" pitchFamily="34" charset="0"/>
+                <a:cs typeface="Open Sans" panose="020B0606030504020204" pitchFamily="34" charset="0"/>
+              </a:rPr>
+              <a:t>:  </a:t>
+            </a:r>
+          </a:p>
+          <a:p>
+            <a:pPr lvl="1"/>
+            <a:r>
+              <a:rPr lang="en-US" sz="1700" dirty="0">
+                <a:effectLst/>
+                <a:latin typeface="Open Sans" panose="020B0606030504020204" pitchFamily="34" charset="0"/>
+                <a:ea typeface="Open Sans" panose="020B0606030504020204" pitchFamily="34" charset="0"/>
+                <a:cs typeface="Open Sans" panose="020B0606030504020204" pitchFamily="34" charset="0"/>
+              </a:rPr>
+              <a:t>Mitigates the "Curse of Dimensionality".</a:t>
+            </a:r>
+          </a:p>
+          <a:p>
+            <a:pPr lvl="1"/>
+            <a:r>
+              <a:rPr lang="en-US" sz="1700" dirty="0">
+                <a:effectLst/>
+                <a:latin typeface="Open Sans" panose="020B0606030504020204" pitchFamily="34" charset="0"/>
+                <a:ea typeface="Open Sans" panose="020B0606030504020204" pitchFamily="34" charset="0"/>
+                <a:cs typeface="Open Sans" panose="020B0606030504020204" pitchFamily="34" charset="0"/>
+              </a:rPr>
+              <a:t>Optimizes the data-to-feature ratio for 72,095 samples.</a:t>
+            </a:r>
+          </a:p>
+          <a:p>
+            <a:pPr lvl="1"/>
+            <a:r>
+              <a:rPr lang="en-US" sz="1700" dirty="0">
+                <a:effectLst/>
+                <a:latin typeface="Open Sans" panose="020B0606030504020204" pitchFamily="34" charset="0"/>
+                <a:ea typeface="Open Sans" panose="020B0606030504020204" pitchFamily="34" charset="0"/>
+                <a:cs typeface="Open Sans" panose="020B0606030504020204" pitchFamily="34" charset="0"/>
+              </a:rPr>
+              <a:t>Prevents statistical sparsity and improves class separability.</a:t>
+            </a:r>
+          </a:p>
+          <a:p>
+            <a:r>
+              <a:rPr lang="en-US" sz="1700" b="1" dirty="0">
+                <a:effectLst/>
+                <a:latin typeface="Open Sans" panose="020B0606030504020204" pitchFamily="34" charset="0"/>
+                <a:ea typeface="Open Sans" panose="020B0606030504020204" pitchFamily="34" charset="0"/>
+                <a:cs typeface="Open Sans" panose="020B0606030504020204" pitchFamily="34" charset="0"/>
+              </a:rPr>
+              <a:t>Noise Reduction</a:t>
+            </a:r>
+            <a:r>
+              <a:rPr lang="en-US" sz="1700" dirty="0">
+                <a:effectLst/>
+                <a:latin typeface="Open Sans" panose="020B0606030504020204" pitchFamily="34" charset="0"/>
+                <a:ea typeface="Open Sans" panose="020B0606030504020204" pitchFamily="34" charset="0"/>
+                <a:cs typeface="Open Sans" panose="020B0606030504020204" pitchFamily="34" charset="0"/>
+              </a:rPr>
+              <a:t>:  Focuses on high-signal linguistic patterns to minimize overfitting.</a:t>
+            </a:r>
+          </a:p>
+          <a:p>
+            <a:r>
+              <a:rPr lang="en-US" sz="1700" b="1" dirty="0">
+                <a:effectLst/>
+                <a:latin typeface="Open Sans" panose="020B0606030504020204" pitchFamily="34" charset="0"/>
+                <a:ea typeface="Open Sans" panose="020B0606030504020204" pitchFamily="34" charset="0"/>
+                <a:cs typeface="Open Sans" panose="020B0606030504020204" pitchFamily="34" charset="0"/>
+              </a:rPr>
+              <a:t>Experimental Integrity</a:t>
+            </a:r>
+            <a:r>
+              <a:rPr lang="en-US" sz="1700" dirty="0">
+                <a:effectLst/>
+                <a:latin typeface="Open Sans" panose="020B0606030504020204" pitchFamily="34" charset="0"/>
+                <a:ea typeface="Open Sans" panose="020B0606030504020204" pitchFamily="34" charset="0"/>
+                <a:cs typeface="Open Sans" panose="020B0606030504020204" pitchFamily="34" charset="0"/>
+              </a:rPr>
+              <a:t>: </a:t>
+            </a:r>
+          </a:p>
+          <a:p>
+            <a:pPr lvl="1"/>
+            <a:r>
+              <a:rPr lang="en-US" sz="1700" dirty="0">
+                <a:effectLst/>
+                <a:latin typeface="Open Sans" panose="020B0606030504020204" pitchFamily="34" charset="0"/>
+                <a:ea typeface="Open Sans" panose="020B0606030504020204" pitchFamily="34" charset="0"/>
+                <a:cs typeface="Open Sans" panose="020B0606030504020204" pitchFamily="34" charset="0"/>
+              </a:rPr>
+              <a:t>Vectorizer fitted exclusively on training folds.</a:t>
+            </a:r>
+          </a:p>
+          <a:p>
+            <a:pPr lvl="1"/>
+            <a:r>
+              <a:rPr lang="en-US" sz="1700" dirty="0">
+                <a:effectLst/>
+                <a:latin typeface="Open Sans" panose="020B0606030504020204" pitchFamily="34" charset="0"/>
+                <a:ea typeface="Open Sans" panose="020B0606030504020204" pitchFamily="34" charset="0"/>
+                <a:cs typeface="Open Sans" panose="020B0606030504020204" pitchFamily="34" charset="0"/>
+              </a:rPr>
+              <a:t>Zero-knowledge approach for validation/test sets to prevent Data Leakage.</a:t>
+            </a:r>
           </a:p>
         </p:txBody>
       </p:sp>
@@ -10773,7 +10407,7 @@
                 <a:cs typeface="Times New Roman"/>
                 <a:sym typeface="Times New Roman"/>
               </a:rPr>
-              <a:t>12/27</a:t>
+              <a:t>16/27</a:t>
             </a:r>
             <a:endParaRPr dirty="0">
               <a:latin typeface="Times New Roman"/>
@@ -11099,74 +10733,15 @@
                 <a:cs typeface="Roboto Serif"/>
                 <a:sym typeface="Roboto Serif"/>
               </a:rPr>
-              <a:t>Stylometric Feature Engineering</a:t>
+              <a:t>Vectorization: 10,000 TF-IDF Features</a:t>
             </a:r>
           </a:p>
         </p:txBody>
       </p:sp>
-      <p:pic>
-        <p:nvPicPr>
-          <p:cNvPr id="4" name="Picture 3" descr="A screen shot of a computer program&#10;&#10;AI-generated content may be incorrect.">
-            <a:extLst>
-              <a:ext uri="{FF2B5EF4-FFF2-40B4-BE49-F238E27FC236}">
-                <a16:creationId xmlns:a16="http://schemas.microsoft.com/office/drawing/2014/main" id="{3534B4A9-0896-5589-A545-547A3EE166B1}"/>
-              </a:ext>
-            </a:extLst>
-          </p:cNvPr>
-          <p:cNvPicPr>
-            <a:picLocks noChangeAspect="1"/>
-          </p:cNvPicPr>
-          <p:nvPr/>
-        </p:nvPicPr>
-        <p:blipFill>
-          <a:blip r:embed="rId3"/>
-          <a:srcRect b="8066"/>
-          <a:stretch/>
-        </p:blipFill>
-        <p:spPr>
-          <a:xfrm>
-            <a:off x="2575377" y="3133477"/>
-            <a:ext cx="3993246" cy="1828667"/>
-          </a:xfrm>
-          <a:prstGeom prst="rect">
-            <a:avLst/>
-          </a:prstGeom>
-        </p:spPr>
-      </p:pic>
-      <p:pic>
-        <p:nvPicPr>
-          <p:cNvPr id="6" name="Picture 5" descr="A computer code with colorful text&#10;&#10;AI-generated content may be incorrect.">
-            <a:extLst>
-              <a:ext uri="{FF2B5EF4-FFF2-40B4-BE49-F238E27FC236}">
-                <a16:creationId xmlns:a16="http://schemas.microsoft.com/office/drawing/2014/main" id="{A45CDCCD-6BA9-FBED-56DE-0989E557D1DC}"/>
-              </a:ext>
-            </a:extLst>
-          </p:cNvPr>
-          <p:cNvPicPr>
-            <a:picLocks noChangeAspect="1"/>
-          </p:cNvPicPr>
-          <p:nvPr/>
-        </p:nvPicPr>
-        <p:blipFill>
-          <a:blip r:embed="rId4"/>
-          <a:stretch>
-            <a:fillRect/>
-          </a:stretch>
-        </p:blipFill>
-        <p:spPr>
-          <a:xfrm>
-            <a:off x="1197687" y="1584685"/>
-            <a:ext cx="6748625" cy="1357118"/>
-          </a:xfrm>
-          <a:prstGeom prst="rect">
-            <a:avLst/>
-          </a:prstGeom>
-        </p:spPr>
-      </p:pic>
     </p:spTree>
     <p:extLst>
       <p:ext uri="{BB962C8B-B14F-4D97-AF65-F5344CB8AC3E}">
-        <p14:creationId xmlns:p14="http://schemas.microsoft.com/office/powerpoint/2010/main" val="1259854846"/>
+        <p14:creationId xmlns:p14="http://schemas.microsoft.com/office/powerpoint/2010/main" val="3809772816"/>
       </p:ext>
     </p:extLst>
   </p:cSld>
@@ -11258,8 +10833,8 @@
         </p:nvSpPr>
         <p:spPr>
           <a:xfrm>
-            <a:off x="311700" y="1577250"/>
-            <a:ext cx="8520600" cy="1989000"/>
+            <a:off x="311699" y="1545796"/>
+            <a:ext cx="8832301" cy="3287461"/>
           </a:xfrm>
           <a:prstGeom prst="rect">
             <a:avLst/>
@@ -11272,153 +10847,161 @@
           <a:lstStyle/>
           <a:p>
             <a:r>
-              <a:rPr lang="en-US" sz="1600" b="1" dirty="0">
+              <a:rPr lang="en-US" sz="1500" b="1" dirty="0">
                 <a:effectLst/>
                 <a:latin typeface="Open Sans" panose="020B0606030504020204" pitchFamily="34" charset="0"/>
                 <a:ea typeface="Open Sans" panose="020B0606030504020204" pitchFamily="34" charset="0"/>
                 <a:cs typeface="Open Sans" panose="020B0606030504020204" pitchFamily="34" charset="0"/>
               </a:rPr>
-              <a:t>Noise Removal</a:t>
-            </a:r>
-            <a:r>
-              <a:rPr lang="en-US" sz="1600" dirty="0">
+              <a:t>Objective</a:t>
+            </a:r>
+            <a:r>
+              <a:rPr lang="en-US" sz="1500" dirty="0">
                 <a:effectLst/>
                 <a:latin typeface="Open Sans" panose="020B0606030504020204" pitchFamily="34" charset="0"/>
                 <a:ea typeface="Open Sans" panose="020B0606030504020204" pitchFamily="34" charset="0"/>
                 <a:cs typeface="Open Sans" panose="020B0606030504020204" pitchFamily="34" charset="0"/>
               </a:rPr>
-              <a:t>: We stripped non-alphanumeric characters using regular expressions.</a:t>
-            </a:r>
-          </a:p>
-          <a:p>
-            <a:r>
-              <a:rPr lang="en-US" sz="1600" b="1" dirty="0">
+              <a:t>:  Harmonize stylometric features (e.g., text length, punctuation) with TF-IDF vectors.</a:t>
+            </a:r>
+          </a:p>
+          <a:p>
+            <a:r>
+              <a:rPr lang="en-US" sz="1500" b="1" dirty="0">
                 <a:effectLst/>
                 <a:latin typeface="Open Sans" panose="020B0606030504020204" pitchFamily="34" charset="0"/>
                 <a:ea typeface="Open Sans" panose="020B0606030504020204" pitchFamily="34" charset="0"/>
                 <a:cs typeface="Open Sans" panose="020B0606030504020204" pitchFamily="34" charset="0"/>
               </a:rPr>
-              <a:t>Case Folding</a:t>
-            </a:r>
-            <a:r>
-              <a:rPr lang="en-US" sz="1600" dirty="0">
+              <a:t>Normalization</a:t>
+            </a:r>
+            <a:r>
+              <a:rPr lang="en-US" sz="1500" dirty="0">
                 <a:effectLst/>
                 <a:latin typeface="Open Sans" panose="020B0606030504020204" pitchFamily="34" charset="0"/>
                 <a:ea typeface="Open Sans" panose="020B0606030504020204" pitchFamily="34" charset="0"/>
                 <a:cs typeface="Open Sans" panose="020B0606030504020204" pitchFamily="34" charset="0"/>
               </a:rPr>
-              <a:t>: All text was converted to lowercase to unify the vocabulary.</a:t>
-            </a:r>
-          </a:p>
-          <a:p>
-            <a:r>
-              <a:rPr lang="en-US" sz="1600" b="1" dirty="0">
+              <a:t>: </a:t>
+            </a:r>
+          </a:p>
+          <a:p>
+            <a:pPr lvl="1"/>
+            <a:r>
+              <a:rPr lang="en-US" sz="1500" dirty="0">
                 <a:effectLst/>
                 <a:latin typeface="Open Sans" panose="020B0606030504020204" pitchFamily="34" charset="0"/>
                 <a:ea typeface="Open Sans" panose="020B0606030504020204" pitchFamily="34" charset="0"/>
                 <a:cs typeface="Open Sans" panose="020B0606030504020204" pitchFamily="34" charset="0"/>
               </a:rPr>
-              <a:t>Tokenization</a:t>
-            </a:r>
-            <a:r>
-              <a:rPr lang="en-US" sz="1600" dirty="0">
+              <a:t>Applied </a:t>
+            </a:r>
+            <a:r>
+              <a:rPr lang="en-US" sz="1500" dirty="0" err="1">
                 <a:effectLst/>
                 <a:latin typeface="Open Sans" panose="020B0606030504020204" pitchFamily="34" charset="0"/>
                 <a:ea typeface="Open Sans" panose="020B0606030504020204" pitchFamily="34" charset="0"/>
                 <a:cs typeface="Open Sans" panose="020B0606030504020204" pitchFamily="34" charset="0"/>
               </a:rPr>
-              <a:t>: The clean text was segmented into individual tokens (words), which serve as the fundamental units for the subsequent vectorization.</a:t>
-            </a:r>
-          </a:p>
-          <a:p>
-            <a:r>
-              <a:rPr lang="en-US" sz="1600" b="1" dirty="0">
+              <a:t>MinMaxScaler</a:t>
+            </a:r>
+            <a:r>
+              <a:rPr lang="en-US" sz="1500" dirty="0">
                 <a:effectLst/>
                 <a:latin typeface="Open Sans" panose="020B0606030504020204" pitchFamily="34" charset="0"/>
                 <a:ea typeface="Open Sans" panose="020B0606030504020204" pitchFamily="34" charset="0"/>
                 <a:cs typeface="Open Sans" panose="020B0606030504020204" pitchFamily="34" charset="0"/>
               </a:rPr>
-              <a:t>Lemmatization</a:t>
-            </a:r>
-            <a:r>
-              <a:rPr lang="en-US" sz="1600" dirty="0">
+              <a:t> to map all features to a fixed [0, 1] range.</a:t>
+            </a:r>
+          </a:p>
+          <a:p>
+            <a:pPr lvl="1"/>
+            <a:r>
+              <a:rPr lang="en-US" sz="1500" dirty="0">
                 <a:effectLst/>
                 <a:latin typeface="Open Sans" panose="020B0606030504020204" pitchFamily="34" charset="0"/>
                 <a:ea typeface="Open Sans" panose="020B0606030504020204" pitchFamily="34" charset="0"/>
                 <a:cs typeface="Open Sans" panose="020B0606030504020204" pitchFamily="34" charset="0"/>
               </a:rPr>
-              <a:t>: To group inflected forms of words, tokens were reduced to their morphological roots (e.g., ”running” to ”run”), thereby reducing the dimensionality of the feature space without losing semantic meaning.</a:t>
-            </a:r>
-          </a:p>
-          <a:p>
-            <a:r>
-              <a:rPr lang="en-US" sz="1600" b="1" dirty="0">
+              <a:t>Prevents high-magnitude variables (character counts) from biasing the model.</a:t>
+            </a:r>
+          </a:p>
+          <a:p>
+            <a:pPr lvl="1"/>
+            <a:r>
+              <a:rPr lang="en-US" sz="1500" dirty="0">
                 <a:effectLst/>
                 <a:latin typeface="Open Sans" panose="020B0606030504020204" pitchFamily="34" charset="0"/>
                 <a:ea typeface="Open Sans" panose="020B0606030504020204" pitchFamily="34" charset="0"/>
                 <a:cs typeface="Open Sans" panose="020B0606030504020204" pitchFamily="34" charset="0"/>
               </a:rPr>
-              <a:t>Custom </a:t>
-            </a:r>
-            <a:r>
-              <a:rPr lang="en-US" sz="1600" b="1" dirty="0" err="1">
+              <a:t>Aligns stylistic data with the inherently normalized TF-IDF scale.</a:t>
+            </a:r>
+          </a:p>
+          <a:p>
+            <a:r>
+              <a:rPr lang="en-US" sz="1500" b="1" dirty="0">
                 <a:effectLst/>
                 <a:latin typeface="Open Sans" panose="020B0606030504020204" pitchFamily="34" charset="0"/>
                 <a:ea typeface="Open Sans" panose="020B0606030504020204" pitchFamily="34" charset="0"/>
                 <a:cs typeface="Open Sans" panose="020B0606030504020204" pitchFamily="34" charset="0"/>
               </a:rPr>
-              <a:t>Stopword</a:t>
-            </a:r>
-            <a:r>
-              <a:rPr lang="en-US" sz="1600" b="1" dirty="0">
+              <a:t>Methodological Rigor</a:t>
+            </a:r>
+            <a:r>
+              <a:rPr lang="en-US" sz="1500" dirty="0">
                 <a:effectLst/>
                 <a:latin typeface="Open Sans" panose="020B0606030504020204" pitchFamily="34" charset="0"/>
                 <a:ea typeface="Open Sans" panose="020B0606030504020204" pitchFamily="34" charset="0"/>
                 <a:cs typeface="Open Sans" panose="020B0606030504020204" pitchFamily="34" charset="0"/>
               </a:rPr>
-              <a:t> Elimination</a:t>
-            </a:r>
-            <a:r>
-              <a:rPr lang="en-US" sz="1600" dirty="0">
+              <a:t>:</a:t>
+            </a:r>
+          </a:p>
+          <a:p>
+            <a:pPr lvl="1"/>
+            <a:r>
+              <a:rPr lang="en-US" sz="1500" dirty="0">
                 <a:effectLst/>
                 <a:latin typeface="Open Sans" panose="020B0606030504020204" pitchFamily="34" charset="0"/>
                 <a:ea typeface="Open Sans" panose="020B0606030504020204" pitchFamily="34" charset="0"/>
                 <a:cs typeface="Open Sans" panose="020B0606030504020204" pitchFamily="34" charset="0"/>
               </a:rPr>
-              <a:t>: Beyond standard English </a:t>
-            </a:r>
-            <a:r>
-              <a:rPr lang="en-US" sz="1600" dirty="0" err="1">
+              <a:t>Followed a "Zero-Knowledge" approach.</a:t>
+            </a:r>
+          </a:p>
+          <a:p>
+            <a:pPr lvl="1"/>
+            <a:r>
+              <a:rPr lang="en-US" sz="1500" dirty="0">
                 <a:effectLst/>
                 <a:latin typeface="Open Sans" panose="020B0606030504020204" pitchFamily="34" charset="0"/>
                 <a:ea typeface="Open Sans" panose="020B0606030504020204" pitchFamily="34" charset="0"/>
                 <a:cs typeface="Open Sans" panose="020B0606030504020204" pitchFamily="34" charset="0"/>
               </a:rPr>
-              <a:t>stopwords</a:t>
-            </a:r>
-            <a:r>
-              <a:rPr lang="en-US" sz="1600" dirty="0">
-                <a:latin typeface="Open Sans" panose="020B0606030504020204" pitchFamily="34" charset="0"/>
-                <a:ea typeface="Open Sans" panose="020B0606030504020204" pitchFamily="34" charset="0"/>
-                <a:cs typeface="Open Sans" panose="020B0606030504020204" pitchFamily="34" charset="0"/>
-              </a:rPr>
-              <a:t> </a:t>
-            </a:r>
-            <a:r>
-              <a:rPr lang="en-US" sz="1600" dirty="0">
+              <a:t>Scaling parameters (min, max) were fitted only on training folds to prevent data leakage.</a:t>
+            </a:r>
+          </a:p>
+          <a:p>
+            <a:r>
+              <a:rPr lang="en-US" sz="1500" b="1" dirty="0">
                 <a:effectLst/>
                 <a:latin typeface="Open Sans" panose="020B0606030504020204" pitchFamily="34" charset="0"/>
                 <a:ea typeface="Open Sans" panose="020B0606030504020204" pitchFamily="34" charset="0"/>
                 <a:cs typeface="Open Sans" panose="020B0606030504020204" pitchFamily="34" charset="0"/>
               </a:rPr>
-              <a:t>(e.g., ”of”, ”the”, ”in”), we implemented a targeted exclusion list based on our exploratory N-gram analysis.</a:t>
-            </a:r>
-            <a:endParaRPr lang="it-IT" sz="1600" dirty="0">
-              <a:latin typeface="Open Sans" panose="020B0606030504020204" pitchFamily="34" charset="0"/>
-              <a:ea typeface="Open Sans" panose="020B0606030504020204" pitchFamily="34" charset="0"/>
-              <a:cs typeface="Open Sans" panose="020B0606030504020204" pitchFamily="34" charset="0"/>
-              <a:sym typeface="Open Sans"/>
-            </a:endParaRPr>
+              <a:t>Feature Fusion</a:t>
+            </a:r>
+            <a:r>
+              <a:rPr lang="en-US" sz="1500" dirty="0">
+                <a:effectLst/>
+                <a:latin typeface="Open Sans" panose="020B0606030504020204" pitchFamily="34" charset="0"/>
+                <a:ea typeface="Open Sans" panose="020B0606030504020204" pitchFamily="34" charset="0"/>
+                <a:cs typeface="Open Sans" panose="020B0606030504020204" pitchFamily="34" charset="0"/>
+              </a:rPr>
+              <a:t>: Horizontal concatenation of the 5D stylistic vector and the sparse TF-IDF matrix to create the final feature set.</a:t>
+            </a:r>
           </a:p>
         </p:txBody>
       </p:sp>
@@ -11463,7 +11046,7 @@
                 <a:cs typeface="Times New Roman"/>
                 <a:sym typeface="Times New Roman"/>
               </a:rPr>
-              <a:t>13/27</a:t>
+              <a:t>17/27</a:t>
             </a:r>
             <a:endParaRPr dirty="0">
               <a:latin typeface="Times New Roman"/>
@@ -11783,27 +11366,21 @@
               <a:buSzPts val="990"/>
             </a:pPr>
             <a:r>
-              <a:rPr lang="en-US" sz="2000" b="1" dirty="0">
+              <a:rPr lang="it-IT" sz="2000" b="1" dirty="0">
                 <a:latin typeface="Roboto Serif"/>
                 <a:ea typeface="Roboto Serif"/>
                 <a:cs typeface="Roboto Serif"/>
                 <a:sym typeface="Roboto Serif"/>
               </a:rPr>
-              <a:t>Text Normalization, Tokenization, and Leak-age Prevention</a:t>
-            </a:r>
-            <a:endParaRPr lang="it-IT" sz="2000" b="1" dirty="0">
-              <a:latin typeface="Roboto Serif"/>
-              <a:ea typeface="Roboto Serif"/>
-              <a:cs typeface="Roboto Serif"/>
-              <a:sym typeface="Roboto Serif"/>
-            </a:endParaRPr>
+              <a:t>Feature Integration &amp; Scaling</a:t>
+            </a:r>
           </a:p>
         </p:txBody>
       </p:sp>
     </p:spTree>
     <p:extLst>
       <p:ext uri="{BB962C8B-B14F-4D97-AF65-F5344CB8AC3E}">
-        <p14:creationId xmlns:p14="http://schemas.microsoft.com/office/powerpoint/2010/main" val="2344727114"/>
+        <p14:creationId xmlns:p14="http://schemas.microsoft.com/office/powerpoint/2010/main" val="2885266651"/>
       </p:ext>
     </p:extLst>
   </p:cSld>
@@ -11872,13 +11449,181 @@
                 <a:cs typeface="Roboto Serif"/>
                 <a:sym typeface="Roboto Serif"/>
               </a:rPr>
-              <a:t>Data preprocessing</a:t>
+              <a:t>Models evaluation</a:t>
             </a:r>
             <a:endParaRPr sz="3720" b="1" dirty="0">
               <a:latin typeface="Roboto Serif"/>
               <a:ea typeface="Roboto Serif"/>
               <a:cs typeface="Roboto Serif"/>
               <a:sym typeface="Roboto Serif"/>
+            </a:endParaRPr>
+          </a:p>
+        </p:txBody>
+      </p:sp>
+      <p:sp>
+        <p:nvSpPr>
+          <p:cNvPr id="67" name="Google Shape;67;p14"/>
+          <p:cNvSpPr txBox="1">
+            <a:spLocks noGrp="1"/>
+          </p:cNvSpPr>
+          <p:nvPr>
+            <p:ph type="body" idx="1"/>
+          </p:nvPr>
+        </p:nvSpPr>
+        <p:spPr>
+          <a:xfrm>
+            <a:off x="346750" y="1138425"/>
+            <a:ext cx="8520600" cy="1989000"/>
+          </a:xfrm>
+          <a:prstGeom prst="rect">
+            <a:avLst/>
+          </a:prstGeom>
+        </p:spPr>
+        <p:txBody>
+          <a:bodyPr spcFirstLastPara="1" wrap="square" lIns="91425" tIns="91425" rIns="91425" bIns="91425" anchor="t" anchorCtr="0">
+            <a:normAutofit fontScale="85000" lnSpcReduction="10000"/>
+          </a:bodyPr>
+          <a:lstStyle/>
+          <a:p>
+            <a:pPr marL="457200" lvl="0" indent="-342900" algn="l" rtl="0">
+              <a:lnSpc>
+                <a:spcPct val="150000"/>
+              </a:lnSpc>
+              <a:spcBef>
+                <a:spcPts val="0"/>
+              </a:spcBef>
+              <a:spcAft>
+                <a:spcPts val="0"/>
+              </a:spcAft>
+              <a:buSzPts val="1800"/>
+              <a:buFont typeface="Times New Roman"/>
+              <a:buChar char="●"/>
+            </a:pPr>
+            <a:r>
+              <a:rPr lang="it-IT" b="1" dirty="0">
+                <a:latin typeface="Open Sans"/>
+                <a:ea typeface="Open Sans"/>
+                <a:cs typeface="Open Sans"/>
+                <a:sym typeface="Open Sans"/>
+              </a:rPr>
+              <a:t>Validation Strategy</a:t>
+            </a:r>
+            <a:r>
+              <a:rPr lang="it-IT" dirty="0">
+                <a:latin typeface="Open Sans"/>
+                <a:ea typeface="Open Sans"/>
+                <a:cs typeface="Open Sans"/>
+                <a:sym typeface="Open Sans"/>
+              </a:rPr>
+              <a:t>: Stratified 10-Fold Cross-Validation.</a:t>
+            </a:r>
+          </a:p>
+          <a:p>
+            <a:pPr marL="457200" lvl="0" indent="-342900" algn="l" rtl="0">
+              <a:lnSpc>
+                <a:spcPct val="150000"/>
+              </a:lnSpc>
+              <a:spcBef>
+                <a:spcPts val="0"/>
+              </a:spcBef>
+              <a:spcAft>
+                <a:spcPts val="0"/>
+              </a:spcAft>
+              <a:buSzPts val="1800"/>
+              <a:buFont typeface="Times New Roman"/>
+              <a:buChar char="●"/>
+            </a:pPr>
+            <a:r>
+              <a:rPr lang="it-IT" b="1" dirty="0">
+                <a:latin typeface="Open Sans"/>
+                <a:ea typeface="Open Sans"/>
+                <a:cs typeface="Open Sans"/>
+                <a:sym typeface="Open Sans"/>
+              </a:rPr>
+              <a:t>Algorithms Tested</a:t>
+            </a:r>
+            <a:r>
+              <a:rPr lang="it-IT" dirty="0">
+                <a:latin typeface="Open Sans"/>
+                <a:ea typeface="Open Sans"/>
+                <a:cs typeface="Open Sans"/>
+                <a:sym typeface="Open Sans"/>
+              </a:rPr>
+              <a:t>: Logistic Regression, SVM, Random Forest, AdaBoost, LightGBM.</a:t>
+            </a:r>
+          </a:p>
+          <a:p>
+            <a:pPr marL="457200" lvl="0" indent="-342900" algn="l" rtl="0">
+              <a:lnSpc>
+                <a:spcPct val="150000"/>
+              </a:lnSpc>
+              <a:spcBef>
+                <a:spcPts val="0"/>
+              </a:spcBef>
+              <a:spcAft>
+                <a:spcPts val="0"/>
+              </a:spcAft>
+              <a:buSzPts val="1800"/>
+              <a:buFont typeface="Times New Roman"/>
+              <a:buChar char="●"/>
+            </a:pPr>
+            <a:r>
+              <a:rPr lang="it-IT" b="1" dirty="0">
+                <a:latin typeface="Open Sans"/>
+                <a:ea typeface="Open Sans"/>
+                <a:cs typeface="Open Sans"/>
+                <a:sym typeface="Open Sans"/>
+              </a:rPr>
+              <a:t>Winner</a:t>
+            </a:r>
+            <a:r>
+              <a:rPr lang="it-IT" dirty="0">
+                <a:latin typeface="Open Sans"/>
+                <a:ea typeface="Open Sans"/>
+                <a:cs typeface="Open Sans"/>
+                <a:sym typeface="Open Sans"/>
+              </a:rPr>
+              <a:t>: LightGBM (F1-Score: 0.971, Accuracy: 0.970).</a:t>
+            </a:r>
+          </a:p>
+          <a:p>
+            <a:pPr marL="457200" lvl="0" indent="-342900" algn="l" rtl="0">
+              <a:lnSpc>
+                <a:spcPct val="150000"/>
+              </a:lnSpc>
+              <a:spcBef>
+                <a:spcPts val="0"/>
+              </a:spcBef>
+              <a:spcAft>
+                <a:spcPts val="0"/>
+              </a:spcAft>
+              <a:buSzPts val="1800"/>
+              <a:buFont typeface="Times New Roman"/>
+              <a:buChar char="●"/>
+            </a:pPr>
+            <a:r>
+              <a:rPr lang="it-IT" b="1" dirty="0">
+                <a:latin typeface="Open Sans"/>
+                <a:ea typeface="Open Sans"/>
+                <a:cs typeface="Open Sans"/>
+                <a:sym typeface="Open Sans"/>
+              </a:rPr>
+              <a:t>Why LightGBM</a:t>
+            </a:r>
+            <a:r>
+              <a:rPr lang="it-IT" dirty="0">
+                <a:latin typeface="Open Sans"/>
+                <a:ea typeface="Open Sans"/>
+                <a:cs typeface="Open Sans"/>
+                <a:sym typeface="Open Sans"/>
+              </a:rPr>
+              <a:t>? Best balance between speed, precision, and handling of our high-dimensional features (TF-IDF).</a:t>
+            </a:r>
+            <a:endParaRPr dirty="0">
+              <a:latin typeface="Open Sans"/>
+              <a:ea typeface="Open Sans"/>
+              <a:cs typeface="Open Sans"/>
+              <a:sym typeface="Open Sans"/>
             </a:endParaRPr>
           </a:p>
         </p:txBody>
@@ -11924,7 +11669,7 @@
                 <a:cs typeface="Times New Roman"/>
                 <a:sym typeface="Times New Roman"/>
               </a:rPr>
-              <a:t>14/27</a:t>
+              <a:t>19/27</a:t>
             </a:r>
             <a:endParaRPr dirty="0">
               <a:latin typeface="Times New Roman"/>
@@ -11961,340 +11706,10 @@
           </a:ln>
         </p:spPr>
       </p:cxnSp>
-      <p:sp>
-        <p:nvSpPr>
-          <p:cNvPr id="2" name="Google Shape;66;p14">
-            <a:extLst>
-              <a:ext uri="{FF2B5EF4-FFF2-40B4-BE49-F238E27FC236}">
-                <a16:creationId xmlns:a16="http://schemas.microsoft.com/office/drawing/2014/main" id="{554C9706-350E-2CDE-547D-26DCC41C2A04}"/>
-              </a:ext>
-            </a:extLst>
-          </p:cNvPr>
-          <p:cNvSpPr txBox="1">
-            <a:spLocks/>
-          </p:cNvSpPr>
-          <p:nvPr/>
-        </p:nvSpPr>
-        <p:spPr>
-          <a:xfrm>
-            <a:off x="311700" y="1011985"/>
-            <a:ext cx="8520600" cy="572700"/>
-          </a:xfrm>
-          <a:prstGeom prst="rect">
-            <a:avLst/>
-          </a:prstGeom>
-          <a:noFill/>
-          <a:ln>
-            <a:noFill/>
-          </a:ln>
-        </p:spPr>
-        <p:txBody>
-          <a:bodyPr spcFirstLastPara="1" wrap="square" lIns="91425" tIns="91425" rIns="91425" bIns="91425" anchor="t" anchorCtr="0">
-            <a:noAutofit/>
-          </a:bodyPr>
-          <a:lstStyle>
-            <a:defPPr marR="0" lvl="0" algn="l" rtl="0">
-              <a:lnSpc>
-                <a:spcPct val="100000"/>
-              </a:lnSpc>
-              <a:spcBef>
-                <a:spcPts val="0"/>
-              </a:spcBef>
-              <a:spcAft>
-                <a:spcPts val="0"/>
-              </a:spcAft>
-            </a:defPPr>
-            <a:lvl1pPr marR="0" lvl="0" algn="l" rtl="0">
-              <a:lnSpc>
-                <a:spcPct val="100000"/>
-              </a:lnSpc>
-              <a:spcBef>
-                <a:spcPts val="0"/>
-              </a:spcBef>
-              <a:spcAft>
-                <a:spcPts val="0"/>
-              </a:spcAft>
-              <a:buClr>
-                <a:schemeClr val="dk1"/>
-              </a:buClr>
-              <a:buSzPts val="2800"/>
-              <a:buFont typeface="Arial"/>
-              <a:buNone/>
-              <a:defRPr sz="2800" b="0" i="0" u="none" strike="noStrike" cap="none">
-                <a:solidFill>
-                  <a:schemeClr val="dk1"/>
-                </a:solidFill>
-                <a:latin typeface="Arial"/>
-                <a:ea typeface="Arial"/>
-                <a:cs typeface="Arial"/>
-                <a:sym typeface="Arial"/>
-              </a:defRPr>
-            </a:lvl1pPr>
-            <a:lvl2pPr marR="0" lvl="1" algn="l" rtl="0">
-              <a:lnSpc>
-                <a:spcPct val="100000"/>
-              </a:lnSpc>
-              <a:spcBef>
-                <a:spcPts val="0"/>
-              </a:spcBef>
-              <a:spcAft>
-                <a:spcPts val="0"/>
-              </a:spcAft>
-              <a:buClr>
-                <a:schemeClr val="dk1"/>
-              </a:buClr>
-              <a:buSzPts val="2800"/>
-              <a:buFont typeface="Arial"/>
-              <a:buNone/>
-              <a:defRPr sz="2800" b="0" i="0" u="none" strike="noStrike" cap="none">
-                <a:solidFill>
-                  <a:schemeClr val="dk1"/>
-                </a:solidFill>
-                <a:latin typeface="Arial"/>
-                <a:ea typeface="Arial"/>
-                <a:cs typeface="Arial"/>
-                <a:sym typeface="Arial"/>
-              </a:defRPr>
-            </a:lvl2pPr>
-            <a:lvl3pPr marR="0" lvl="2" algn="l" rtl="0">
-              <a:lnSpc>
-                <a:spcPct val="100000"/>
-              </a:lnSpc>
-              <a:spcBef>
-                <a:spcPts val="0"/>
-              </a:spcBef>
-              <a:spcAft>
-                <a:spcPts val="0"/>
-              </a:spcAft>
-              <a:buClr>
-                <a:schemeClr val="dk1"/>
-              </a:buClr>
-              <a:buSzPts val="2800"/>
-              <a:buFont typeface="Arial"/>
-              <a:buNone/>
-              <a:defRPr sz="2800" b="0" i="0" u="none" strike="noStrike" cap="none">
-                <a:solidFill>
-                  <a:schemeClr val="dk1"/>
-                </a:solidFill>
-                <a:latin typeface="Arial"/>
-                <a:ea typeface="Arial"/>
-                <a:cs typeface="Arial"/>
-                <a:sym typeface="Arial"/>
-              </a:defRPr>
-            </a:lvl3pPr>
-            <a:lvl4pPr marR="0" lvl="3" algn="l" rtl="0">
-              <a:lnSpc>
-                <a:spcPct val="100000"/>
-              </a:lnSpc>
-              <a:spcBef>
-                <a:spcPts val="0"/>
-              </a:spcBef>
-              <a:spcAft>
-                <a:spcPts val="0"/>
-              </a:spcAft>
-              <a:buClr>
-                <a:schemeClr val="dk1"/>
-              </a:buClr>
-              <a:buSzPts val="2800"/>
-              <a:buFont typeface="Arial"/>
-              <a:buNone/>
-              <a:defRPr sz="2800" b="0" i="0" u="none" strike="noStrike" cap="none">
-                <a:solidFill>
-                  <a:schemeClr val="dk1"/>
-                </a:solidFill>
-                <a:latin typeface="Arial"/>
-                <a:ea typeface="Arial"/>
-                <a:cs typeface="Arial"/>
-                <a:sym typeface="Arial"/>
-              </a:defRPr>
-            </a:lvl4pPr>
-            <a:lvl5pPr marR="0" lvl="4" algn="l" rtl="0">
-              <a:lnSpc>
-                <a:spcPct val="100000"/>
-              </a:lnSpc>
-              <a:spcBef>
-                <a:spcPts val="0"/>
-              </a:spcBef>
-              <a:spcAft>
-                <a:spcPts val="0"/>
-              </a:spcAft>
-              <a:buClr>
-                <a:schemeClr val="dk1"/>
-              </a:buClr>
-              <a:buSzPts val="2800"/>
-              <a:buFont typeface="Arial"/>
-              <a:buNone/>
-              <a:defRPr sz="2800" b="0" i="0" u="none" strike="noStrike" cap="none">
-                <a:solidFill>
-                  <a:schemeClr val="dk1"/>
-                </a:solidFill>
-                <a:latin typeface="Arial"/>
-                <a:ea typeface="Arial"/>
-                <a:cs typeface="Arial"/>
-                <a:sym typeface="Arial"/>
-              </a:defRPr>
-            </a:lvl5pPr>
-            <a:lvl6pPr marR="0" lvl="5" algn="l" rtl="0">
-              <a:lnSpc>
-                <a:spcPct val="100000"/>
-              </a:lnSpc>
-              <a:spcBef>
-                <a:spcPts val="0"/>
-              </a:spcBef>
-              <a:spcAft>
-                <a:spcPts val="0"/>
-              </a:spcAft>
-              <a:buClr>
-                <a:schemeClr val="dk1"/>
-              </a:buClr>
-              <a:buSzPts val="2800"/>
-              <a:buFont typeface="Arial"/>
-              <a:buNone/>
-              <a:defRPr sz="2800" b="0" i="0" u="none" strike="noStrike" cap="none">
-                <a:solidFill>
-                  <a:schemeClr val="dk1"/>
-                </a:solidFill>
-                <a:latin typeface="Arial"/>
-                <a:ea typeface="Arial"/>
-                <a:cs typeface="Arial"/>
-                <a:sym typeface="Arial"/>
-              </a:defRPr>
-            </a:lvl6pPr>
-            <a:lvl7pPr marR="0" lvl="6" algn="l" rtl="0">
-              <a:lnSpc>
-                <a:spcPct val="100000"/>
-              </a:lnSpc>
-              <a:spcBef>
-                <a:spcPts val="0"/>
-              </a:spcBef>
-              <a:spcAft>
-                <a:spcPts val="0"/>
-              </a:spcAft>
-              <a:buClr>
-                <a:schemeClr val="dk1"/>
-              </a:buClr>
-              <a:buSzPts val="2800"/>
-              <a:buFont typeface="Arial"/>
-              <a:buNone/>
-              <a:defRPr sz="2800" b="0" i="0" u="none" strike="noStrike" cap="none">
-                <a:solidFill>
-                  <a:schemeClr val="dk1"/>
-                </a:solidFill>
-                <a:latin typeface="Arial"/>
-                <a:ea typeface="Arial"/>
-                <a:cs typeface="Arial"/>
-                <a:sym typeface="Arial"/>
-              </a:defRPr>
-            </a:lvl7pPr>
-            <a:lvl8pPr marR="0" lvl="7" algn="l" rtl="0">
-              <a:lnSpc>
-                <a:spcPct val="100000"/>
-              </a:lnSpc>
-              <a:spcBef>
-                <a:spcPts val="0"/>
-              </a:spcBef>
-              <a:spcAft>
-                <a:spcPts val="0"/>
-              </a:spcAft>
-              <a:buClr>
-                <a:schemeClr val="dk1"/>
-              </a:buClr>
-              <a:buSzPts val="2800"/>
-              <a:buFont typeface="Arial"/>
-              <a:buNone/>
-              <a:defRPr sz="2800" b="0" i="0" u="none" strike="noStrike" cap="none">
-                <a:solidFill>
-                  <a:schemeClr val="dk1"/>
-                </a:solidFill>
-                <a:latin typeface="Arial"/>
-                <a:ea typeface="Arial"/>
-                <a:cs typeface="Arial"/>
-                <a:sym typeface="Arial"/>
-              </a:defRPr>
-            </a:lvl8pPr>
-            <a:lvl9pPr marR="0" lvl="8" algn="l" rtl="0">
-              <a:lnSpc>
-                <a:spcPct val="100000"/>
-              </a:lnSpc>
-              <a:spcBef>
-                <a:spcPts val="0"/>
-              </a:spcBef>
-              <a:spcAft>
-                <a:spcPts val="0"/>
-              </a:spcAft>
-              <a:buClr>
-                <a:schemeClr val="dk1"/>
-              </a:buClr>
-              <a:buSzPts val="2800"/>
-              <a:buFont typeface="Arial"/>
-              <a:buNone/>
-              <a:defRPr sz="2800" b="0" i="0" u="none" strike="noStrike" cap="none">
-                <a:solidFill>
-                  <a:schemeClr val="dk1"/>
-                </a:solidFill>
-                <a:latin typeface="Arial"/>
-                <a:ea typeface="Arial"/>
-                <a:cs typeface="Arial"/>
-                <a:sym typeface="Arial"/>
-              </a:defRPr>
-            </a:lvl9pPr>
-          </a:lstStyle>
-          <a:p>
-            <a:pPr algn="ctr">
-              <a:buSzPts val="990"/>
-            </a:pPr>
-            <a:r>
-              <a:rPr lang="en-US" sz="2000" b="1" dirty="0">
-                <a:latin typeface="Roboto Serif"/>
-                <a:ea typeface="Roboto Serif"/>
-                <a:cs typeface="Roboto Serif"/>
-                <a:sym typeface="Roboto Serif"/>
-              </a:rPr>
-              <a:t>Text Normalization, Tokenization, and Leak-age Prevention</a:t>
-            </a:r>
-            <a:endParaRPr lang="it-IT" sz="2000" b="1" dirty="0">
-              <a:latin typeface="Roboto Serif"/>
-              <a:ea typeface="Roboto Serif"/>
-              <a:cs typeface="Roboto Serif"/>
-              <a:sym typeface="Roboto Serif"/>
-            </a:endParaRPr>
-          </a:p>
-        </p:txBody>
-      </p:sp>
-      <p:pic>
-        <p:nvPicPr>
-          <p:cNvPr id="5" name="Picture 4" descr="A screen shot of a computer screen&#10;&#10;AI-generated content may be incorrect.">
-            <a:extLst>
-              <a:ext uri="{FF2B5EF4-FFF2-40B4-BE49-F238E27FC236}">
-                <a16:creationId xmlns:a16="http://schemas.microsoft.com/office/drawing/2014/main" id="{22C6C544-02C5-9C5C-5C17-173EC0855490}"/>
-              </a:ext>
-            </a:extLst>
-          </p:cNvPr>
-          <p:cNvPicPr>
-            <a:picLocks noChangeAspect="1"/>
-          </p:cNvPicPr>
-          <p:nvPr/>
-        </p:nvPicPr>
-        <p:blipFill>
-          <a:blip r:embed="rId3"/>
-          <a:stretch>
-            <a:fillRect/>
-          </a:stretch>
-        </p:blipFill>
-        <p:spPr>
-          <a:xfrm>
-            <a:off x="1668509" y="1644248"/>
-            <a:ext cx="5806981" cy="2918534"/>
-          </a:xfrm>
-          <a:prstGeom prst="rect">
-            <a:avLst/>
-          </a:prstGeom>
-        </p:spPr>
-      </p:pic>
     </p:spTree>
     <p:extLst>
       <p:ext uri="{BB962C8B-B14F-4D97-AF65-F5344CB8AC3E}">
-        <p14:creationId xmlns:p14="http://schemas.microsoft.com/office/powerpoint/2010/main" val="288655946"/>
+        <p14:creationId xmlns:p14="http://schemas.microsoft.com/office/powerpoint/2010/main" val="42202743"/>
       </p:ext>
     </p:extLst>
   </p:cSld>
@@ -12363,7 +11778,7 @@
                 <a:cs typeface="Roboto Serif"/>
                 <a:sym typeface="Roboto Serif"/>
               </a:rPr>
-              <a:t>Data preprocessing</a:t>
+              <a:t>Models evaluation</a:t>
             </a:r>
             <a:endParaRPr sz="3720" b="1" dirty="0">
               <a:latin typeface="Roboto Serif"/>
@@ -12415,7 +11830,7 @@
                 <a:cs typeface="Times New Roman"/>
                 <a:sym typeface="Times New Roman"/>
               </a:rPr>
-              <a:t>15/27</a:t>
+              <a:t>21/27</a:t>
             </a:r>
             <a:endParaRPr dirty="0">
               <a:latin typeface="Times New Roman"/>
@@ -12452,312 +11867,12 @@
           </a:ln>
         </p:spPr>
       </p:cxnSp>
-      <p:sp>
-        <p:nvSpPr>
-          <p:cNvPr id="2" name="Google Shape;66;p14">
+      <p:pic>
+        <p:nvPicPr>
+          <p:cNvPr id="3" name="Immagine 2" descr="Immagine che contiene schermata, testo, quadrato, Rettangolo&#10;&#10;Il contenuto generato dall&amp;#39;IA potrebbe non essere corretto.">
             <a:extLst>
               <a:ext uri="{FF2B5EF4-FFF2-40B4-BE49-F238E27FC236}">
-                <a16:creationId xmlns:a16="http://schemas.microsoft.com/office/drawing/2014/main" id="{554C9706-350E-2CDE-547D-26DCC41C2A04}"/>
-              </a:ext>
-            </a:extLst>
-          </p:cNvPr>
-          <p:cNvSpPr txBox="1">
-            <a:spLocks/>
-          </p:cNvSpPr>
-          <p:nvPr/>
-        </p:nvSpPr>
-        <p:spPr>
-          <a:xfrm>
-            <a:off x="311700" y="1011985"/>
-            <a:ext cx="8520600" cy="572700"/>
-          </a:xfrm>
-          <a:prstGeom prst="rect">
-            <a:avLst/>
-          </a:prstGeom>
-          <a:noFill/>
-          <a:ln>
-            <a:noFill/>
-          </a:ln>
-        </p:spPr>
-        <p:txBody>
-          <a:bodyPr spcFirstLastPara="1" wrap="square" lIns="91425" tIns="91425" rIns="91425" bIns="91425" anchor="t" anchorCtr="0">
-            <a:noAutofit/>
-          </a:bodyPr>
-          <a:lstStyle>
-            <a:defPPr marR="0" lvl="0" algn="l" rtl="0">
-              <a:lnSpc>
-                <a:spcPct val="100000"/>
-              </a:lnSpc>
-              <a:spcBef>
-                <a:spcPts val="0"/>
-              </a:spcBef>
-              <a:spcAft>
-                <a:spcPts val="0"/>
-              </a:spcAft>
-            </a:defPPr>
-            <a:lvl1pPr marR="0" lvl="0" algn="l" rtl="0">
-              <a:lnSpc>
-                <a:spcPct val="100000"/>
-              </a:lnSpc>
-              <a:spcBef>
-                <a:spcPts val="0"/>
-              </a:spcBef>
-              <a:spcAft>
-                <a:spcPts val="0"/>
-              </a:spcAft>
-              <a:buClr>
-                <a:schemeClr val="dk1"/>
-              </a:buClr>
-              <a:buSzPts val="2800"/>
-              <a:buFont typeface="Arial"/>
-              <a:buNone/>
-              <a:defRPr sz="2800" b="0" i="0" u="none" strike="noStrike" cap="none">
-                <a:solidFill>
-                  <a:schemeClr val="dk1"/>
-                </a:solidFill>
-                <a:latin typeface="Arial"/>
-                <a:ea typeface="Arial"/>
-                <a:cs typeface="Arial"/>
-                <a:sym typeface="Arial"/>
-              </a:defRPr>
-            </a:lvl1pPr>
-            <a:lvl2pPr marR="0" lvl="1" algn="l" rtl="0">
-              <a:lnSpc>
-                <a:spcPct val="100000"/>
-              </a:lnSpc>
-              <a:spcBef>
-                <a:spcPts val="0"/>
-              </a:spcBef>
-              <a:spcAft>
-                <a:spcPts val="0"/>
-              </a:spcAft>
-              <a:buClr>
-                <a:schemeClr val="dk1"/>
-              </a:buClr>
-              <a:buSzPts val="2800"/>
-              <a:buFont typeface="Arial"/>
-              <a:buNone/>
-              <a:defRPr sz="2800" b="0" i="0" u="none" strike="noStrike" cap="none">
-                <a:solidFill>
-                  <a:schemeClr val="dk1"/>
-                </a:solidFill>
-                <a:latin typeface="Arial"/>
-                <a:ea typeface="Arial"/>
-                <a:cs typeface="Arial"/>
-                <a:sym typeface="Arial"/>
-              </a:defRPr>
-            </a:lvl2pPr>
-            <a:lvl3pPr marR="0" lvl="2" algn="l" rtl="0">
-              <a:lnSpc>
-                <a:spcPct val="100000"/>
-              </a:lnSpc>
-              <a:spcBef>
-                <a:spcPts val="0"/>
-              </a:spcBef>
-              <a:spcAft>
-                <a:spcPts val="0"/>
-              </a:spcAft>
-              <a:buClr>
-                <a:schemeClr val="dk1"/>
-              </a:buClr>
-              <a:buSzPts val="2800"/>
-              <a:buFont typeface="Arial"/>
-              <a:buNone/>
-              <a:defRPr sz="2800" b="0" i="0" u="none" strike="noStrike" cap="none">
-                <a:solidFill>
-                  <a:schemeClr val="dk1"/>
-                </a:solidFill>
-                <a:latin typeface="Arial"/>
-                <a:ea typeface="Arial"/>
-                <a:cs typeface="Arial"/>
-                <a:sym typeface="Arial"/>
-              </a:defRPr>
-            </a:lvl3pPr>
-            <a:lvl4pPr marR="0" lvl="3" algn="l" rtl="0">
-              <a:lnSpc>
-                <a:spcPct val="100000"/>
-              </a:lnSpc>
-              <a:spcBef>
-                <a:spcPts val="0"/>
-              </a:spcBef>
-              <a:spcAft>
-                <a:spcPts val="0"/>
-              </a:spcAft>
-              <a:buClr>
-                <a:schemeClr val="dk1"/>
-              </a:buClr>
-              <a:buSzPts val="2800"/>
-              <a:buFont typeface="Arial"/>
-              <a:buNone/>
-              <a:defRPr sz="2800" b="0" i="0" u="none" strike="noStrike" cap="none">
-                <a:solidFill>
-                  <a:schemeClr val="dk1"/>
-                </a:solidFill>
-                <a:latin typeface="Arial"/>
-                <a:ea typeface="Arial"/>
-                <a:cs typeface="Arial"/>
-                <a:sym typeface="Arial"/>
-              </a:defRPr>
-            </a:lvl4pPr>
-            <a:lvl5pPr marR="0" lvl="4" algn="l" rtl="0">
-              <a:lnSpc>
-                <a:spcPct val="100000"/>
-              </a:lnSpc>
-              <a:spcBef>
-                <a:spcPts val="0"/>
-              </a:spcBef>
-              <a:spcAft>
-                <a:spcPts val="0"/>
-              </a:spcAft>
-              <a:buClr>
-                <a:schemeClr val="dk1"/>
-              </a:buClr>
-              <a:buSzPts val="2800"/>
-              <a:buFont typeface="Arial"/>
-              <a:buNone/>
-              <a:defRPr sz="2800" b="0" i="0" u="none" strike="noStrike" cap="none">
-                <a:solidFill>
-                  <a:schemeClr val="dk1"/>
-                </a:solidFill>
-                <a:latin typeface="Arial"/>
-                <a:ea typeface="Arial"/>
-                <a:cs typeface="Arial"/>
-                <a:sym typeface="Arial"/>
-              </a:defRPr>
-            </a:lvl5pPr>
-            <a:lvl6pPr marR="0" lvl="5" algn="l" rtl="0">
-              <a:lnSpc>
-                <a:spcPct val="100000"/>
-              </a:lnSpc>
-              <a:spcBef>
-                <a:spcPts val="0"/>
-              </a:spcBef>
-              <a:spcAft>
-                <a:spcPts val="0"/>
-              </a:spcAft>
-              <a:buClr>
-                <a:schemeClr val="dk1"/>
-              </a:buClr>
-              <a:buSzPts val="2800"/>
-              <a:buFont typeface="Arial"/>
-              <a:buNone/>
-              <a:defRPr sz="2800" b="0" i="0" u="none" strike="noStrike" cap="none">
-                <a:solidFill>
-                  <a:schemeClr val="dk1"/>
-                </a:solidFill>
-                <a:latin typeface="Arial"/>
-                <a:ea typeface="Arial"/>
-                <a:cs typeface="Arial"/>
-                <a:sym typeface="Arial"/>
-              </a:defRPr>
-            </a:lvl6pPr>
-            <a:lvl7pPr marR="0" lvl="6" algn="l" rtl="0">
-              <a:lnSpc>
-                <a:spcPct val="100000"/>
-              </a:lnSpc>
-              <a:spcBef>
-                <a:spcPts val="0"/>
-              </a:spcBef>
-              <a:spcAft>
-                <a:spcPts val="0"/>
-              </a:spcAft>
-              <a:buClr>
-                <a:schemeClr val="dk1"/>
-              </a:buClr>
-              <a:buSzPts val="2800"/>
-              <a:buFont typeface="Arial"/>
-              <a:buNone/>
-              <a:defRPr sz="2800" b="0" i="0" u="none" strike="noStrike" cap="none">
-                <a:solidFill>
-                  <a:schemeClr val="dk1"/>
-                </a:solidFill>
-                <a:latin typeface="Arial"/>
-                <a:ea typeface="Arial"/>
-                <a:cs typeface="Arial"/>
-                <a:sym typeface="Arial"/>
-              </a:defRPr>
-            </a:lvl7pPr>
-            <a:lvl8pPr marR="0" lvl="7" algn="l" rtl="0">
-              <a:lnSpc>
-                <a:spcPct val="100000"/>
-              </a:lnSpc>
-              <a:spcBef>
-                <a:spcPts val="0"/>
-              </a:spcBef>
-              <a:spcAft>
-                <a:spcPts val="0"/>
-              </a:spcAft>
-              <a:buClr>
-                <a:schemeClr val="dk1"/>
-              </a:buClr>
-              <a:buSzPts val="2800"/>
-              <a:buFont typeface="Arial"/>
-              <a:buNone/>
-              <a:defRPr sz="2800" b="0" i="0" u="none" strike="noStrike" cap="none">
-                <a:solidFill>
-                  <a:schemeClr val="dk1"/>
-                </a:solidFill>
-                <a:latin typeface="Arial"/>
-                <a:ea typeface="Arial"/>
-                <a:cs typeface="Arial"/>
-                <a:sym typeface="Arial"/>
-              </a:defRPr>
-            </a:lvl8pPr>
-            <a:lvl9pPr marR="0" lvl="8" algn="l" rtl="0">
-              <a:lnSpc>
-                <a:spcPct val="100000"/>
-              </a:lnSpc>
-              <a:spcBef>
-                <a:spcPts val="0"/>
-              </a:spcBef>
-              <a:spcAft>
-                <a:spcPts val="0"/>
-              </a:spcAft>
-              <a:buClr>
-                <a:schemeClr val="dk1"/>
-              </a:buClr>
-              <a:buSzPts val="2800"/>
-              <a:buFont typeface="Arial"/>
-              <a:buNone/>
-              <a:defRPr sz="2800" b="0" i="0" u="none" strike="noStrike" cap="none">
-                <a:solidFill>
-                  <a:schemeClr val="dk1"/>
-                </a:solidFill>
-                <a:latin typeface="Arial"/>
-                <a:ea typeface="Arial"/>
-                <a:cs typeface="Arial"/>
-                <a:sym typeface="Arial"/>
-              </a:defRPr>
-            </a:lvl9pPr>
-          </a:lstStyle>
-          <a:p>
-            <a:pPr algn="ctr">
-              <a:buSzPts val="990"/>
-            </a:pPr>
-            <a:r>
-              <a:rPr lang="en-US" sz="2000" b="1" dirty="0">
-                <a:latin typeface="Roboto Serif"/>
-                <a:ea typeface="Roboto Serif"/>
-                <a:cs typeface="Roboto Serif"/>
-                <a:sym typeface="Roboto Serif"/>
-              </a:rPr>
-              <a:t>Text Normalization, Tokenization, and Leak-age Prevention</a:t>
-            </a:r>
-            <a:endParaRPr lang="it-IT" sz="2000" b="1" dirty="0">
-              <a:latin typeface="Roboto Serif"/>
-              <a:ea typeface="Roboto Serif"/>
-              <a:cs typeface="Roboto Serif"/>
-              <a:sym typeface="Roboto Serif"/>
-            </a:endParaRPr>
-          </a:p>
-        </p:txBody>
-      </p:sp>
-      <p:pic>
-        <p:nvPicPr>
-          <p:cNvPr id="5" name="Picture 4">
-            <a:extLst>
-              <a:ext uri="{FF2B5EF4-FFF2-40B4-BE49-F238E27FC236}">
-                <a16:creationId xmlns:a16="http://schemas.microsoft.com/office/drawing/2014/main" id="{11666868-18F2-DA50-8FA3-9890EA49F27B}"/>
+                <a16:creationId xmlns:a16="http://schemas.microsoft.com/office/drawing/2014/main" id="{821CDB63-EF4B-74FF-6497-5AC7CD3528E4}"/>
               </a:ext>
             </a:extLst>
           </p:cNvPr>
@@ -12774,8 +11889,8 @@
         </p:blipFill>
         <p:spPr>
           <a:xfrm>
-            <a:off x="1519279" y="1676903"/>
-            <a:ext cx="6105442" cy="2894096"/>
+            <a:off x="1436970" y="829849"/>
+            <a:ext cx="6176115" cy="4243192"/>
           </a:xfrm>
           <a:prstGeom prst="rect">
             <a:avLst/>
@@ -12785,7 +11900,7 @@
     </p:spTree>
     <p:extLst>
       <p:ext uri="{BB962C8B-B14F-4D97-AF65-F5344CB8AC3E}">
-        <p14:creationId xmlns:p14="http://schemas.microsoft.com/office/powerpoint/2010/main" val="1533554708"/>
+        <p14:creationId xmlns:p14="http://schemas.microsoft.com/office/powerpoint/2010/main" val="1279555456"/>
       </p:ext>
     </p:extLst>
   </p:cSld>
@@ -12854,7 +11969,7 @@
                 <a:cs typeface="Roboto Serif"/>
                 <a:sym typeface="Roboto Serif"/>
               </a:rPr>
-              <a:t>Data preprocessing</a:t>
+              <a:t>Models evaluation</a:t>
             </a:r>
             <a:endParaRPr sz="3720" b="1" dirty="0">
               <a:latin typeface="Roboto Serif"/>
@@ -12862,172 +11977,6 @@
               <a:cs typeface="Roboto Serif"/>
               <a:sym typeface="Roboto Serif"/>
             </a:endParaRPr>
-          </a:p>
-        </p:txBody>
-      </p:sp>
-      <p:sp>
-        <p:nvSpPr>
-          <p:cNvPr id="67" name="Google Shape;67;p14"/>
-          <p:cNvSpPr txBox="1">
-            <a:spLocks noGrp="1"/>
-          </p:cNvSpPr>
-          <p:nvPr>
-            <p:ph type="body" idx="1"/>
-          </p:nvPr>
-        </p:nvSpPr>
-        <p:spPr>
-          <a:xfrm>
-            <a:off x="311699" y="1655797"/>
-            <a:ext cx="8770423" cy="3007420"/>
-          </a:xfrm>
-          <a:prstGeom prst="rect">
-            <a:avLst/>
-          </a:prstGeom>
-        </p:spPr>
-        <p:txBody>
-          <a:bodyPr spcFirstLastPara="1" wrap="square" lIns="91425" tIns="91425" rIns="91425" bIns="91425" anchor="t" anchorCtr="0">
-            <a:normAutofit lnSpcReduction="10000"/>
-          </a:bodyPr>
-          <a:lstStyle/>
-          <a:p>
-            <a:r>
-              <a:rPr lang="en-US" sz="1700" b="1" dirty="0">
-                <a:effectLst/>
-                <a:latin typeface="Open Sans" panose="020B0606030504020204" pitchFamily="34" charset="0"/>
-                <a:ea typeface="Open Sans" panose="020B0606030504020204" pitchFamily="34" charset="0"/>
-                <a:cs typeface="Open Sans" panose="020B0606030504020204" pitchFamily="34" charset="0"/>
-              </a:rPr>
-              <a:t>Configuration</a:t>
-            </a:r>
-            <a:r>
-              <a:rPr lang="en-US" sz="1700" dirty="0">
-                <a:effectLst/>
-                <a:latin typeface="Open Sans" panose="020B0606030504020204" pitchFamily="34" charset="0"/>
-                <a:ea typeface="Open Sans" panose="020B0606030504020204" pitchFamily="34" charset="0"/>
-                <a:cs typeface="Open Sans" panose="020B0606030504020204" pitchFamily="34" charset="0"/>
-              </a:rPr>
-              <a:t>:  TF-IDF using 10,000 features (Unigrams &amp; Bigrams).</a:t>
-            </a:r>
-          </a:p>
-          <a:p>
-            <a:r>
-              <a:rPr lang="en-US" sz="1700" b="1" dirty="0">
-                <a:effectLst/>
-                <a:latin typeface="Open Sans" panose="020B0606030504020204" pitchFamily="34" charset="0"/>
-                <a:ea typeface="Open Sans" panose="020B0606030504020204" pitchFamily="34" charset="0"/>
-                <a:cs typeface="Open Sans" panose="020B0606030504020204" pitchFamily="34" charset="0"/>
-              </a:rPr>
-              <a:t>Dimensionality Control</a:t>
-            </a:r>
-            <a:r>
-              <a:rPr lang="en-US" sz="1700" dirty="0">
-                <a:effectLst/>
-                <a:latin typeface="Open Sans" panose="020B0606030504020204" pitchFamily="34" charset="0"/>
-                <a:ea typeface="Open Sans" panose="020B0606030504020204" pitchFamily="34" charset="0"/>
-                <a:cs typeface="Open Sans" panose="020B0606030504020204" pitchFamily="34" charset="0"/>
-              </a:rPr>
-              <a:t>:  </a:t>
-            </a:r>
-          </a:p>
-          <a:p>
-            <a:pPr lvl="1"/>
-            <a:r>
-              <a:rPr lang="en-US" sz="1700" dirty="0">
-                <a:effectLst/>
-                <a:latin typeface="Open Sans" panose="020B0606030504020204" pitchFamily="34" charset="0"/>
-                <a:ea typeface="Open Sans" panose="020B0606030504020204" pitchFamily="34" charset="0"/>
-                <a:cs typeface="Open Sans" panose="020B0606030504020204" pitchFamily="34" charset="0"/>
-              </a:rPr>
-              <a:t>Mitigates the "Curse of Dimensionality".</a:t>
-            </a:r>
-          </a:p>
-          <a:p>
-            <a:pPr lvl="1"/>
-            <a:r>
-              <a:rPr lang="en-US" sz="1700" dirty="0">
-                <a:effectLst/>
-                <a:latin typeface="Open Sans" panose="020B0606030504020204" pitchFamily="34" charset="0"/>
-                <a:ea typeface="Open Sans" panose="020B0606030504020204" pitchFamily="34" charset="0"/>
-                <a:cs typeface="Open Sans" panose="020B0606030504020204" pitchFamily="34" charset="0"/>
-              </a:rPr>
-              <a:t>Optimizes the data-to-feature ratio for 72,095 samples.</a:t>
-            </a:r>
-          </a:p>
-          <a:p>
-            <a:pPr lvl="1"/>
-            <a:r>
-              <a:rPr lang="en-US" sz="1700" dirty="0">
-                <a:effectLst/>
-                <a:latin typeface="Open Sans" panose="020B0606030504020204" pitchFamily="34" charset="0"/>
-                <a:ea typeface="Open Sans" panose="020B0606030504020204" pitchFamily="34" charset="0"/>
-                <a:cs typeface="Open Sans" panose="020B0606030504020204" pitchFamily="34" charset="0"/>
-              </a:rPr>
-              <a:t>Prevents statistical sparsity and improves class separability.</a:t>
-            </a:r>
-          </a:p>
-          <a:p>
-            <a:r>
-              <a:rPr lang="en-US" sz="1700" b="1" dirty="0">
-                <a:effectLst/>
-                <a:latin typeface="Open Sans" panose="020B0606030504020204" pitchFamily="34" charset="0"/>
-                <a:ea typeface="Open Sans" panose="020B0606030504020204" pitchFamily="34" charset="0"/>
-                <a:cs typeface="Open Sans" panose="020B0606030504020204" pitchFamily="34" charset="0"/>
-              </a:rPr>
-              <a:t>Noise Reduction</a:t>
-            </a:r>
-            <a:r>
-              <a:rPr lang="en-US" sz="1700" dirty="0">
-                <a:effectLst/>
-                <a:latin typeface="Open Sans" panose="020B0606030504020204" pitchFamily="34" charset="0"/>
-                <a:ea typeface="Open Sans" panose="020B0606030504020204" pitchFamily="34" charset="0"/>
-                <a:cs typeface="Open Sans" panose="020B0606030504020204" pitchFamily="34" charset="0"/>
-              </a:rPr>
-              <a:t>:  Focuses on high-signal linguistic patterns to minimize overfitting.</a:t>
-            </a:r>
-          </a:p>
-          <a:p>
-            <a:r>
-              <a:rPr lang="en-US" sz="1700" b="1" dirty="0">
-                <a:effectLst/>
-                <a:latin typeface="Open Sans" panose="020B0606030504020204" pitchFamily="34" charset="0"/>
-                <a:ea typeface="Open Sans" panose="020B0606030504020204" pitchFamily="34" charset="0"/>
-                <a:cs typeface="Open Sans" panose="020B0606030504020204" pitchFamily="34" charset="0"/>
-              </a:rPr>
-              <a:t>Experimental Integrity</a:t>
-            </a:r>
-            <a:r>
-              <a:rPr lang="en-US" sz="1700" dirty="0">
-                <a:effectLst/>
-                <a:latin typeface="Open Sans" panose="020B0606030504020204" pitchFamily="34" charset="0"/>
-                <a:ea typeface="Open Sans" panose="020B0606030504020204" pitchFamily="34" charset="0"/>
-                <a:cs typeface="Open Sans" panose="020B0606030504020204" pitchFamily="34" charset="0"/>
-              </a:rPr>
-              <a:t>: </a:t>
-            </a:r>
-          </a:p>
-          <a:p>
-            <a:pPr lvl="1"/>
-            <a:r>
-              <a:rPr lang="en-US" sz="1700" dirty="0">
-                <a:effectLst/>
-                <a:latin typeface="Open Sans" panose="020B0606030504020204" pitchFamily="34" charset="0"/>
-                <a:ea typeface="Open Sans" panose="020B0606030504020204" pitchFamily="34" charset="0"/>
-                <a:cs typeface="Open Sans" panose="020B0606030504020204" pitchFamily="34" charset="0"/>
-              </a:rPr>
-              <a:t>Vectorizer fitted exclusively on training folds.</a:t>
-            </a:r>
-          </a:p>
-          <a:p>
-            <a:pPr lvl="1"/>
-            <a:r>
-              <a:rPr lang="en-US" sz="1700" dirty="0">
-                <a:effectLst/>
-                <a:latin typeface="Open Sans" panose="020B0606030504020204" pitchFamily="34" charset="0"/>
-                <a:ea typeface="Open Sans" panose="020B0606030504020204" pitchFamily="34" charset="0"/>
-                <a:cs typeface="Open Sans" panose="020B0606030504020204" pitchFamily="34" charset="0"/>
-              </a:rPr>
-              <a:t>Zero-knowledge approach for validation/test sets to prevent Data Leakage.</a:t>
-            </a:r>
           </a:p>
         </p:txBody>
       </p:sp>
@@ -13072,7 +12021,7 @@
                 <a:cs typeface="Times New Roman"/>
                 <a:sym typeface="Times New Roman"/>
               </a:rPr>
-              <a:t>16/27</a:t>
+              <a:t>20/27</a:t>
             </a:r>
             <a:endParaRPr dirty="0">
               <a:latin typeface="Times New Roman"/>
@@ -13109,304 +12058,40 @@
           </a:ln>
         </p:spPr>
       </p:cxnSp>
-      <p:sp>
-        <p:nvSpPr>
-          <p:cNvPr id="2" name="Google Shape;66;p14">
+      <p:pic>
+        <p:nvPicPr>
+          <p:cNvPr id="3" name="Picture 2" descr="A table with numbers and text&#10;&#10;AI-generated content may be incorrect.">
             <a:extLst>
               <a:ext uri="{FF2B5EF4-FFF2-40B4-BE49-F238E27FC236}">
-                <a16:creationId xmlns:a16="http://schemas.microsoft.com/office/drawing/2014/main" id="{554C9706-350E-2CDE-547D-26DCC41C2A04}"/>
+                <a16:creationId xmlns:a16="http://schemas.microsoft.com/office/drawing/2014/main" id="{B9786BB9-5803-876E-DDEB-90AF2C083B3F}"/>
               </a:ext>
             </a:extLst>
           </p:cNvPr>
-          <p:cNvSpPr txBox="1">
-            <a:spLocks/>
-          </p:cNvSpPr>
+          <p:cNvPicPr>
+            <a:picLocks noChangeAspect="1"/>
+          </p:cNvPicPr>
           <p:nvPr/>
-        </p:nvSpPr>
-        <p:spPr>
-          <a:xfrm>
-            <a:off x="311700" y="1011985"/>
-            <a:ext cx="8520600" cy="572700"/>
+        </p:nvPicPr>
+        <p:blipFill>
+          <a:blip r:embed="rId3"/>
+          <a:stretch>
+            <a:fillRect/>
+          </a:stretch>
+        </p:blipFill>
+        <p:spPr>
+          <a:xfrm>
+            <a:off x="874934" y="1456985"/>
+            <a:ext cx="7394132" cy="2229529"/>
           </a:xfrm>
           <a:prstGeom prst="rect">
             <a:avLst/>
           </a:prstGeom>
-          <a:noFill/>
-          <a:ln>
-            <a:noFill/>
-          </a:ln>
-        </p:spPr>
-        <p:txBody>
-          <a:bodyPr spcFirstLastPara="1" wrap="square" lIns="91425" tIns="91425" rIns="91425" bIns="91425" anchor="t" anchorCtr="0">
-            <a:noAutofit/>
-          </a:bodyPr>
-          <a:lstStyle>
-            <a:defPPr marR="0" lvl="0" algn="l" rtl="0">
-              <a:lnSpc>
-                <a:spcPct val="100000"/>
-              </a:lnSpc>
-              <a:spcBef>
-                <a:spcPts val="0"/>
-              </a:spcBef>
-              <a:spcAft>
-                <a:spcPts val="0"/>
-              </a:spcAft>
-            </a:defPPr>
-            <a:lvl1pPr marR="0" lvl="0" algn="l" rtl="0">
-              <a:lnSpc>
-                <a:spcPct val="100000"/>
-              </a:lnSpc>
-              <a:spcBef>
-                <a:spcPts val="0"/>
-              </a:spcBef>
-              <a:spcAft>
-                <a:spcPts val="0"/>
-              </a:spcAft>
-              <a:buClr>
-                <a:schemeClr val="dk1"/>
-              </a:buClr>
-              <a:buSzPts val="2800"/>
-              <a:buFont typeface="Arial"/>
-              <a:buNone/>
-              <a:defRPr sz="2800" b="0" i="0" u="none" strike="noStrike" cap="none">
-                <a:solidFill>
-                  <a:schemeClr val="dk1"/>
-                </a:solidFill>
-                <a:latin typeface="Arial"/>
-                <a:ea typeface="Arial"/>
-                <a:cs typeface="Arial"/>
-                <a:sym typeface="Arial"/>
-              </a:defRPr>
-            </a:lvl1pPr>
-            <a:lvl2pPr marR="0" lvl="1" algn="l" rtl="0">
-              <a:lnSpc>
-                <a:spcPct val="100000"/>
-              </a:lnSpc>
-              <a:spcBef>
-                <a:spcPts val="0"/>
-              </a:spcBef>
-              <a:spcAft>
-                <a:spcPts val="0"/>
-              </a:spcAft>
-              <a:buClr>
-                <a:schemeClr val="dk1"/>
-              </a:buClr>
-              <a:buSzPts val="2800"/>
-              <a:buFont typeface="Arial"/>
-              <a:buNone/>
-              <a:defRPr sz="2800" b="0" i="0" u="none" strike="noStrike" cap="none">
-                <a:solidFill>
-                  <a:schemeClr val="dk1"/>
-                </a:solidFill>
-                <a:latin typeface="Arial"/>
-                <a:ea typeface="Arial"/>
-                <a:cs typeface="Arial"/>
-                <a:sym typeface="Arial"/>
-              </a:defRPr>
-            </a:lvl2pPr>
-            <a:lvl3pPr marR="0" lvl="2" algn="l" rtl="0">
-              <a:lnSpc>
-                <a:spcPct val="100000"/>
-              </a:lnSpc>
-              <a:spcBef>
-                <a:spcPts val="0"/>
-              </a:spcBef>
-              <a:spcAft>
-                <a:spcPts val="0"/>
-              </a:spcAft>
-              <a:buClr>
-                <a:schemeClr val="dk1"/>
-              </a:buClr>
-              <a:buSzPts val="2800"/>
-              <a:buFont typeface="Arial"/>
-              <a:buNone/>
-              <a:defRPr sz="2800" b="0" i="0" u="none" strike="noStrike" cap="none">
-                <a:solidFill>
-                  <a:schemeClr val="dk1"/>
-                </a:solidFill>
-                <a:latin typeface="Arial"/>
-                <a:ea typeface="Arial"/>
-                <a:cs typeface="Arial"/>
-                <a:sym typeface="Arial"/>
-              </a:defRPr>
-            </a:lvl3pPr>
-            <a:lvl4pPr marR="0" lvl="3" algn="l" rtl="0">
-              <a:lnSpc>
-                <a:spcPct val="100000"/>
-              </a:lnSpc>
-              <a:spcBef>
-                <a:spcPts val="0"/>
-              </a:spcBef>
-              <a:spcAft>
-                <a:spcPts val="0"/>
-              </a:spcAft>
-              <a:buClr>
-                <a:schemeClr val="dk1"/>
-              </a:buClr>
-              <a:buSzPts val="2800"/>
-              <a:buFont typeface="Arial"/>
-              <a:buNone/>
-              <a:defRPr sz="2800" b="0" i="0" u="none" strike="noStrike" cap="none">
-                <a:solidFill>
-                  <a:schemeClr val="dk1"/>
-                </a:solidFill>
-                <a:latin typeface="Arial"/>
-                <a:ea typeface="Arial"/>
-                <a:cs typeface="Arial"/>
-                <a:sym typeface="Arial"/>
-              </a:defRPr>
-            </a:lvl4pPr>
-            <a:lvl5pPr marR="0" lvl="4" algn="l" rtl="0">
-              <a:lnSpc>
-                <a:spcPct val="100000"/>
-              </a:lnSpc>
-              <a:spcBef>
-                <a:spcPts val="0"/>
-              </a:spcBef>
-              <a:spcAft>
-                <a:spcPts val="0"/>
-              </a:spcAft>
-              <a:buClr>
-                <a:schemeClr val="dk1"/>
-              </a:buClr>
-              <a:buSzPts val="2800"/>
-              <a:buFont typeface="Arial"/>
-              <a:buNone/>
-              <a:defRPr sz="2800" b="0" i="0" u="none" strike="noStrike" cap="none">
-                <a:solidFill>
-                  <a:schemeClr val="dk1"/>
-                </a:solidFill>
-                <a:latin typeface="Arial"/>
-                <a:ea typeface="Arial"/>
-                <a:cs typeface="Arial"/>
-                <a:sym typeface="Arial"/>
-              </a:defRPr>
-            </a:lvl5pPr>
-            <a:lvl6pPr marR="0" lvl="5" algn="l" rtl="0">
-              <a:lnSpc>
-                <a:spcPct val="100000"/>
-              </a:lnSpc>
-              <a:spcBef>
-                <a:spcPts val="0"/>
-              </a:spcBef>
-              <a:spcAft>
-                <a:spcPts val="0"/>
-              </a:spcAft>
-              <a:buClr>
-                <a:schemeClr val="dk1"/>
-              </a:buClr>
-              <a:buSzPts val="2800"/>
-              <a:buFont typeface="Arial"/>
-              <a:buNone/>
-              <a:defRPr sz="2800" b="0" i="0" u="none" strike="noStrike" cap="none">
-                <a:solidFill>
-                  <a:schemeClr val="dk1"/>
-                </a:solidFill>
-                <a:latin typeface="Arial"/>
-                <a:ea typeface="Arial"/>
-                <a:cs typeface="Arial"/>
-                <a:sym typeface="Arial"/>
-              </a:defRPr>
-            </a:lvl6pPr>
-            <a:lvl7pPr marR="0" lvl="6" algn="l" rtl="0">
-              <a:lnSpc>
-                <a:spcPct val="100000"/>
-              </a:lnSpc>
-              <a:spcBef>
-                <a:spcPts val="0"/>
-              </a:spcBef>
-              <a:spcAft>
-                <a:spcPts val="0"/>
-              </a:spcAft>
-              <a:buClr>
-                <a:schemeClr val="dk1"/>
-              </a:buClr>
-              <a:buSzPts val="2800"/>
-              <a:buFont typeface="Arial"/>
-              <a:buNone/>
-              <a:defRPr sz="2800" b="0" i="0" u="none" strike="noStrike" cap="none">
-                <a:solidFill>
-                  <a:schemeClr val="dk1"/>
-                </a:solidFill>
-                <a:latin typeface="Arial"/>
-                <a:ea typeface="Arial"/>
-                <a:cs typeface="Arial"/>
-                <a:sym typeface="Arial"/>
-              </a:defRPr>
-            </a:lvl7pPr>
-            <a:lvl8pPr marR="0" lvl="7" algn="l" rtl="0">
-              <a:lnSpc>
-                <a:spcPct val="100000"/>
-              </a:lnSpc>
-              <a:spcBef>
-                <a:spcPts val="0"/>
-              </a:spcBef>
-              <a:spcAft>
-                <a:spcPts val="0"/>
-              </a:spcAft>
-              <a:buClr>
-                <a:schemeClr val="dk1"/>
-              </a:buClr>
-              <a:buSzPts val="2800"/>
-              <a:buFont typeface="Arial"/>
-              <a:buNone/>
-              <a:defRPr sz="2800" b="0" i="0" u="none" strike="noStrike" cap="none">
-                <a:solidFill>
-                  <a:schemeClr val="dk1"/>
-                </a:solidFill>
-                <a:latin typeface="Arial"/>
-                <a:ea typeface="Arial"/>
-                <a:cs typeface="Arial"/>
-                <a:sym typeface="Arial"/>
-              </a:defRPr>
-            </a:lvl8pPr>
-            <a:lvl9pPr marR="0" lvl="8" algn="l" rtl="0">
-              <a:lnSpc>
-                <a:spcPct val="100000"/>
-              </a:lnSpc>
-              <a:spcBef>
-                <a:spcPts val="0"/>
-              </a:spcBef>
-              <a:spcAft>
-                <a:spcPts val="0"/>
-              </a:spcAft>
-              <a:buClr>
-                <a:schemeClr val="dk1"/>
-              </a:buClr>
-              <a:buSzPts val="2800"/>
-              <a:buFont typeface="Arial"/>
-              <a:buNone/>
-              <a:defRPr sz="2800" b="0" i="0" u="none" strike="noStrike" cap="none">
-                <a:solidFill>
-                  <a:schemeClr val="dk1"/>
-                </a:solidFill>
-                <a:latin typeface="Arial"/>
-                <a:ea typeface="Arial"/>
-                <a:cs typeface="Arial"/>
-                <a:sym typeface="Arial"/>
-              </a:defRPr>
-            </a:lvl9pPr>
-          </a:lstStyle>
-          <a:p>
-            <a:pPr algn="ctr">
-              <a:buSzPts val="990"/>
-            </a:pPr>
-            <a:r>
-              <a:rPr lang="it-IT" sz="2000" b="1" dirty="0">
-                <a:latin typeface="Roboto Serif"/>
-                <a:ea typeface="Roboto Serif"/>
-                <a:cs typeface="Roboto Serif"/>
-                <a:sym typeface="Roboto Serif"/>
-              </a:rPr>
-              <a:t>Vectorization: 10,000 TF-IDF Features</a:t>
-            </a:r>
-          </a:p>
-        </p:txBody>
-      </p:sp>
+        </p:spPr>
+      </p:pic>
     </p:spTree>
     <p:extLst>
       <p:ext uri="{BB962C8B-B14F-4D97-AF65-F5344CB8AC3E}">
-        <p14:creationId xmlns:p14="http://schemas.microsoft.com/office/powerpoint/2010/main" val="3809772816"/>
+        <p14:creationId xmlns:p14="http://schemas.microsoft.com/office/powerpoint/2010/main" val="1439281819"/>
       </p:ext>
     </p:extLst>
   </p:cSld>
@@ -13475,7 +12160,7 @@
                 <a:cs typeface="Roboto Serif"/>
                 <a:sym typeface="Roboto Serif"/>
               </a:rPr>
-              <a:t>Data preprocessing</a:t>
+              <a:t>LightGBM optimization</a:t>
             </a:r>
             <a:endParaRPr sz="3720" b="1" dirty="0">
               <a:latin typeface="Roboto Serif"/>
@@ -13498,8 +12183,8 @@
         </p:nvSpPr>
         <p:spPr>
           <a:xfrm>
-            <a:off x="311699" y="1545796"/>
-            <a:ext cx="8832301" cy="3287461"/>
+            <a:off x="346750" y="1138425"/>
+            <a:ext cx="8520600" cy="1989000"/>
           </a:xfrm>
           <a:prstGeom prst="rect">
             <a:avLst/>
@@ -13507,166 +12192,184 @@
         </p:spPr>
         <p:txBody>
           <a:bodyPr spcFirstLastPara="1" wrap="square" lIns="91425" tIns="91425" rIns="91425" bIns="91425" anchor="t" anchorCtr="0">
-            <a:noAutofit/>
+            <a:normAutofit fontScale="92500" lnSpcReduction="20000"/>
           </a:bodyPr>
           <a:lstStyle/>
           <a:p>
-            <a:r>
-              <a:rPr lang="en-US" sz="1500" b="1" dirty="0">
-                <a:effectLst/>
-                <a:latin typeface="Open Sans" panose="020B0606030504020204" pitchFamily="34" charset="0"/>
-                <a:ea typeface="Open Sans" panose="020B0606030504020204" pitchFamily="34" charset="0"/>
-                <a:cs typeface="Open Sans" panose="020B0606030504020204" pitchFamily="34" charset="0"/>
-              </a:rPr>
-              <a:t>Objective</a:t>
-            </a:r>
-            <a:r>
-              <a:rPr lang="en-US" sz="1500" dirty="0">
-                <a:effectLst/>
-                <a:latin typeface="Open Sans" panose="020B0606030504020204" pitchFamily="34" charset="0"/>
-                <a:ea typeface="Open Sans" panose="020B0606030504020204" pitchFamily="34" charset="0"/>
-                <a:cs typeface="Open Sans" panose="020B0606030504020204" pitchFamily="34" charset="0"/>
-              </a:rPr>
-              <a:t>:  Harmonize stylometric features (e.g., text length, punctuation) with TF-IDF vectors.</a:t>
-            </a:r>
-          </a:p>
-          <a:p>
-            <a:r>
-              <a:rPr lang="en-US" sz="1500" b="1" dirty="0">
-                <a:effectLst/>
-                <a:latin typeface="Open Sans" panose="020B0606030504020204" pitchFamily="34" charset="0"/>
-                <a:ea typeface="Open Sans" panose="020B0606030504020204" pitchFamily="34" charset="0"/>
-                <a:cs typeface="Open Sans" panose="020B0606030504020204" pitchFamily="34" charset="0"/>
-              </a:rPr>
-              <a:t>Normalization</a:t>
-            </a:r>
-            <a:r>
-              <a:rPr lang="en-US" sz="1500" dirty="0">
-                <a:effectLst/>
-                <a:latin typeface="Open Sans" panose="020B0606030504020204" pitchFamily="34" charset="0"/>
-                <a:ea typeface="Open Sans" panose="020B0606030504020204" pitchFamily="34" charset="0"/>
-                <a:cs typeface="Open Sans" panose="020B0606030504020204" pitchFamily="34" charset="0"/>
-              </a:rPr>
-              <a:t>: </a:t>
-            </a:r>
-          </a:p>
-          <a:p>
-            <a:pPr lvl="1"/>
-            <a:r>
-              <a:rPr lang="en-US" sz="1500" dirty="0">
-                <a:effectLst/>
-                <a:latin typeface="Open Sans" panose="020B0606030504020204" pitchFamily="34" charset="0"/>
-                <a:ea typeface="Open Sans" panose="020B0606030504020204" pitchFamily="34" charset="0"/>
-                <a:cs typeface="Open Sans" panose="020B0606030504020204" pitchFamily="34" charset="0"/>
-              </a:rPr>
-              <a:t>Applied </a:t>
-            </a:r>
-            <a:r>
-              <a:rPr lang="en-US" sz="1500" dirty="0" err="1">
-                <a:effectLst/>
-                <a:latin typeface="Open Sans" panose="020B0606030504020204" pitchFamily="34" charset="0"/>
-                <a:ea typeface="Open Sans" panose="020B0606030504020204" pitchFamily="34" charset="0"/>
-                <a:cs typeface="Open Sans" panose="020B0606030504020204" pitchFamily="34" charset="0"/>
-              </a:rPr>
-              <a:t>MinMaxScaler</a:t>
-            </a:r>
-            <a:r>
-              <a:rPr lang="en-US" sz="1500" dirty="0">
-                <a:effectLst/>
-                <a:latin typeface="Open Sans" panose="020B0606030504020204" pitchFamily="34" charset="0"/>
-                <a:ea typeface="Open Sans" panose="020B0606030504020204" pitchFamily="34" charset="0"/>
-                <a:cs typeface="Open Sans" panose="020B0606030504020204" pitchFamily="34" charset="0"/>
-              </a:rPr>
-              <a:t> to map all features to a fixed [0, 1] range.</a:t>
-            </a:r>
-          </a:p>
-          <a:p>
-            <a:pPr lvl="1"/>
-            <a:r>
-              <a:rPr lang="en-US" sz="1500" dirty="0">
-                <a:effectLst/>
-                <a:latin typeface="Open Sans" panose="020B0606030504020204" pitchFamily="34" charset="0"/>
-                <a:ea typeface="Open Sans" panose="020B0606030504020204" pitchFamily="34" charset="0"/>
-                <a:cs typeface="Open Sans" panose="020B0606030504020204" pitchFamily="34" charset="0"/>
-              </a:rPr>
-              <a:t>Prevents high-magnitude variables (character counts) from biasing the model.</a:t>
-            </a:r>
-          </a:p>
-          <a:p>
-            <a:pPr lvl="1"/>
-            <a:r>
-              <a:rPr lang="en-US" sz="1500" dirty="0">
-                <a:effectLst/>
-                <a:latin typeface="Open Sans" panose="020B0606030504020204" pitchFamily="34" charset="0"/>
-                <a:ea typeface="Open Sans" panose="020B0606030504020204" pitchFamily="34" charset="0"/>
-                <a:cs typeface="Open Sans" panose="020B0606030504020204" pitchFamily="34" charset="0"/>
-              </a:rPr>
-              <a:t>Aligns stylistic data with the inherently normalized TF-IDF scale.</a:t>
-            </a:r>
-          </a:p>
-          <a:p>
-            <a:r>
-              <a:rPr lang="en-US" sz="1500" b="1" dirty="0">
-                <a:effectLst/>
-                <a:latin typeface="Open Sans" panose="020B0606030504020204" pitchFamily="34" charset="0"/>
-                <a:ea typeface="Open Sans" panose="020B0606030504020204" pitchFamily="34" charset="0"/>
-                <a:cs typeface="Open Sans" panose="020B0606030504020204" pitchFamily="34" charset="0"/>
-              </a:rPr>
-              <a:t>Methodological Rigor</a:t>
-            </a:r>
-            <a:r>
-              <a:rPr lang="en-US" sz="1500" dirty="0">
-                <a:effectLst/>
-                <a:latin typeface="Open Sans" panose="020B0606030504020204" pitchFamily="34" charset="0"/>
-                <a:ea typeface="Open Sans" panose="020B0606030504020204" pitchFamily="34" charset="0"/>
-                <a:cs typeface="Open Sans" panose="020B0606030504020204" pitchFamily="34" charset="0"/>
-              </a:rPr>
-              <a:t>:</a:t>
-            </a:r>
-          </a:p>
-          <a:p>
-            <a:pPr lvl="1"/>
-            <a:r>
-              <a:rPr lang="en-US" sz="1500" dirty="0">
-                <a:effectLst/>
-                <a:latin typeface="Open Sans" panose="020B0606030504020204" pitchFamily="34" charset="0"/>
-                <a:ea typeface="Open Sans" panose="020B0606030504020204" pitchFamily="34" charset="0"/>
-                <a:cs typeface="Open Sans" panose="020B0606030504020204" pitchFamily="34" charset="0"/>
-              </a:rPr>
-              <a:t>Followed a "Zero-Knowledge" approach.</a:t>
-            </a:r>
-          </a:p>
-          <a:p>
-            <a:pPr lvl="1"/>
-            <a:r>
-              <a:rPr lang="en-US" sz="1500" dirty="0">
-                <a:effectLst/>
-                <a:latin typeface="Open Sans" panose="020B0606030504020204" pitchFamily="34" charset="0"/>
-                <a:ea typeface="Open Sans" panose="020B0606030504020204" pitchFamily="34" charset="0"/>
-                <a:cs typeface="Open Sans" panose="020B0606030504020204" pitchFamily="34" charset="0"/>
-              </a:rPr>
-              <a:t>Scaling parameters (min, max) were fitted only on training folds to prevent data leakage.</a:t>
-            </a:r>
-          </a:p>
-          <a:p>
-            <a:r>
-              <a:rPr lang="en-US" sz="1500" b="1" dirty="0">
-                <a:effectLst/>
-                <a:latin typeface="Open Sans" panose="020B0606030504020204" pitchFamily="34" charset="0"/>
-                <a:ea typeface="Open Sans" panose="020B0606030504020204" pitchFamily="34" charset="0"/>
-                <a:cs typeface="Open Sans" panose="020B0606030504020204" pitchFamily="34" charset="0"/>
-              </a:rPr>
-              <a:t>Feature Fusion</a:t>
-            </a:r>
-            <a:r>
-              <a:rPr lang="en-US" sz="1500" dirty="0">
-                <a:effectLst/>
-                <a:latin typeface="Open Sans" panose="020B0606030504020204" pitchFamily="34" charset="0"/>
-                <a:ea typeface="Open Sans" panose="020B0606030504020204" pitchFamily="34" charset="0"/>
-                <a:cs typeface="Open Sans" panose="020B0606030504020204" pitchFamily="34" charset="0"/>
-              </a:rPr>
-              <a:t>: Horizontal concatenation of the 5D stylistic vector and the sparse TF-IDF matrix to create the final feature set.</a:t>
-            </a:r>
+            <a:pPr marL="457200" lvl="0" indent="-342900" algn="l" rtl="0">
+              <a:lnSpc>
+                <a:spcPct val="150000"/>
+              </a:lnSpc>
+              <a:spcBef>
+                <a:spcPts val="0"/>
+              </a:spcBef>
+              <a:spcAft>
+                <a:spcPts val="0"/>
+              </a:spcAft>
+              <a:buSzPts val="1800"/>
+              <a:buFont typeface="Times New Roman"/>
+              <a:buChar char="●"/>
+            </a:pPr>
+            <a:r>
+              <a:rPr lang="it-IT" b="1" dirty="0">
+                <a:latin typeface="Open Sans"/>
+                <a:ea typeface="Open Sans"/>
+                <a:cs typeface="Open Sans"/>
+                <a:sym typeface="Open Sans"/>
+              </a:rPr>
+              <a:t>Technique</a:t>
+            </a:r>
+            <a:r>
+              <a:rPr lang="it-IT" dirty="0">
+                <a:latin typeface="Open Sans"/>
+                <a:ea typeface="Open Sans"/>
+                <a:cs typeface="Open Sans"/>
+                <a:sym typeface="Open Sans"/>
+              </a:rPr>
+              <a:t>: Grid Search with Stratified Cross-Validation.</a:t>
+            </a:r>
+          </a:p>
+          <a:p>
+            <a:pPr marL="457200" lvl="0" indent="-342900" algn="l" rtl="0">
+              <a:lnSpc>
+                <a:spcPct val="150000"/>
+              </a:lnSpc>
+              <a:spcBef>
+                <a:spcPts val="0"/>
+              </a:spcBef>
+              <a:spcAft>
+                <a:spcPts val="0"/>
+              </a:spcAft>
+              <a:buSzPts val="1800"/>
+              <a:buFont typeface="Times New Roman"/>
+              <a:buChar char="●"/>
+            </a:pPr>
+            <a:r>
+              <a:rPr lang="it-IT" b="1" dirty="0">
+                <a:latin typeface="Open Sans"/>
+                <a:ea typeface="Open Sans"/>
+                <a:cs typeface="Open Sans"/>
+                <a:sym typeface="Open Sans"/>
+              </a:rPr>
+              <a:t>Target Metric</a:t>
+            </a:r>
+            <a:r>
+              <a:rPr lang="it-IT" dirty="0">
+                <a:latin typeface="Open Sans"/>
+                <a:ea typeface="Open Sans"/>
+                <a:cs typeface="Open Sans"/>
+                <a:sym typeface="Open Sans"/>
+              </a:rPr>
+              <a:t>: Maximizing F1-Score.</a:t>
+            </a:r>
+          </a:p>
+          <a:p>
+            <a:pPr marL="457200" lvl="0" indent="-342900" algn="l" rtl="0">
+              <a:lnSpc>
+                <a:spcPct val="150000"/>
+              </a:lnSpc>
+              <a:spcBef>
+                <a:spcPts val="0"/>
+              </a:spcBef>
+              <a:spcAft>
+                <a:spcPts val="0"/>
+              </a:spcAft>
+              <a:buSzPts val="1800"/>
+              <a:buFont typeface="Times New Roman"/>
+              <a:buChar char="●"/>
+            </a:pPr>
+            <a:r>
+              <a:rPr lang="it-IT" b="1" dirty="0">
+                <a:latin typeface="Open Sans"/>
+                <a:ea typeface="Open Sans"/>
+                <a:cs typeface="Open Sans"/>
+                <a:sym typeface="Open Sans"/>
+              </a:rPr>
+              <a:t>Tuned Parameters</a:t>
+            </a:r>
+            <a:r>
+              <a:rPr lang="it-IT" dirty="0">
+                <a:latin typeface="Open Sans"/>
+                <a:ea typeface="Open Sans"/>
+                <a:cs typeface="Open Sans"/>
+                <a:sym typeface="Open Sans"/>
+              </a:rPr>
+              <a:t>: learning_rate, num_leaves, max_depth, n_estimators.</a:t>
+            </a:r>
+          </a:p>
+          <a:p>
+            <a:pPr marL="457200" lvl="0" indent="-342900" algn="l" rtl="0">
+              <a:lnSpc>
+                <a:spcPct val="150000"/>
+              </a:lnSpc>
+              <a:spcBef>
+                <a:spcPts val="0"/>
+              </a:spcBef>
+              <a:spcAft>
+                <a:spcPts val="0"/>
+              </a:spcAft>
+              <a:buSzPts val="1800"/>
+              <a:buFont typeface="Times New Roman"/>
+              <a:buChar char="●"/>
+            </a:pPr>
+            <a:r>
+              <a:rPr lang="it-IT" b="1" dirty="0">
+                <a:latin typeface="Open Sans"/>
+                <a:ea typeface="Open Sans"/>
+                <a:cs typeface="Open Sans"/>
+                <a:sym typeface="Open Sans"/>
+              </a:rPr>
+              <a:t>Final Result</a:t>
+            </a:r>
+            <a:r>
+              <a:rPr lang="it-IT" dirty="0">
+                <a:latin typeface="Open Sans"/>
+                <a:ea typeface="Open Sans"/>
+                <a:cs typeface="Open Sans"/>
+                <a:sym typeface="Open Sans"/>
+              </a:rPr>
+              <a:t>: F1-Score increased to 97.9% (Accuracy: 97.9%).</a:t>
+            </a:r>
+          </a:p>
+          <a:p>
+            <a:pPr marL="457200" lvl="0" indent="-342900" algn="l" rtl="0">
+              <a:lnSpc>
+                <a:spcPct val="150000"/>
+              </a:lnSpc>
+              <a:spcBef>
+                <a:spcPts val="0"/>
+              </a:spcBef>
+              <a:spcAft>
+                <a:spcPts val="0"/>
+              </a:spcAft>
+              <a:buSzPts val="1800"/>
+              <a:buFont typeface="Times New Roman"/>
+              <a:buChar char="●"/>
+            </a:pPr>
+            <a:r>
+              <a:rPr lang="it-IT" b="1" dirty="0">
+                <a:latin typeface="Open Sans"/>
+                <a:ea typeface="Open Sans"/>
+                <a:cs typeface="Open Sans"/>
+                <a:sym typeface="Open Sans"/>
+              </a:rPr>
+              <a:t>Key Benefit</a:t>
+            </a:r>
+            <a:r>
+              <a:rPr lang="it-IT" dirty="0">
+                <a:latin typeface="Open Sans"/>
+                <a:ea typeface="Open Sans"/>
+                <a:cs typeface="Open Sans"/>
+                <a:sym typeface="Open Sans"/>
+              </a:rPr>
+              <a:t>: Better generalization and lower risk of overfitting.</a:t>
+            </a:r>
+            <a:endParaRPr dirty="0">
+              <a:latin typeface="Open Sans"/>
+              <a:ea typeface="Open Sans"/>
+              <a:cs typeface="Open Sans"/>
+              <a:sym typeface="Open Sans"/>
+            </a:endParaRPr>
           </a:p>
         </p:txBody>
       </p:sp>
@@ -13711,7 +12414,7 @@
                 <a:cs typeface="Times New Roman"/>
                 <a:sym typeface="Times New Roman"/>
               </a:rPr>
-              <a:t>17/27</a:t>
+              <a:t>22/27</a:t>
             </a:r>
             <a:endParaRPr dirty="0">
               <a:latin typeface="Times New Roman"/>
@@ -13748,304 +12451,10 @@
           </a:ln>
         </p:spPr>
       </p:cxnSp>
-      <p:sp>
-        <p:nvSpPr>
-          <p:cNvPr id="2" name="Google Shape;66;p14">
-            <a:extLst>
-              <a:ext uri="{FF2B5EF4-FFF2-40B4-BE49-F238E27FC236}">
-                <a16:creationId xmlns:a16="http://schemas.microsoft.com/office/drawing/2014/main" id="{554C9706-350E-2CDE-547D-26DCC41C2A04}"/>
-              </a:ext>
-            </a:extLst>
-          </p:cNvPr>
-          <p:cNvSpPr txBox="1">
-            <a:spLocks/>
-          </p:cNvSpPr>
-          <p:nvPr/>
-        </p:nvSpPr>
-        <p:spPr>
-          <a:xfrm>
-            <a:off x="311700" y="1011985"/>
-            <a:ext cx="8520600" cy="572700"/>
-          </a:xfrm>
-          <a:prstGeom prst="rect">
-            <a:avLst/>
-          </a:prstGeom>
-          <a:noFill/>
-          <a:ln>
-            <a:noFill/>
-          </a:ln>
-        </p:spPr>
-        <p:txBody>
-          <a:bodyPr spcFirstLastPara="1" wrap="square" lIns="91425" tIns="91425" rIns="91425" bIns="91425" anchor="t" anchorCtr="0">
-            <a:noAutofit/>
-          </a:bodyPr>
-          <a:lstStyle>
-            <a:defPPr marR="0" lvl="0" algn="l" rtl="0">
-              <a:lnSpc>
-                <a:spcPct val="100000"/>
-              </a:lnSpc>
-              <a:spcBef>
-                <a:spcPts val="0"/>
-              </a:spcBef>
-              <a:spcAft>
-                <a:spcPts val="0"/>
-              </a:spcAft>
-            </a:defPPr>
-            <a:lvl1pPr marR="0" lvl="0" algn="l" rtl="0">
-              <a:lnSpc>
-                <a:spcPct val="100000"/>
-              </a:lnSpc>
-              <a:spcBef>
-                <a:spcPts val="0"/>
-              </a:spcBef>
-              <a:spcAft>
-                <a:spcPts val="0"/>
-              </a:spcAft>
-              <a:buClr>
-                <a:schemeClr val="dk1"/>
-              </a:buClr>
-              <a:buSzPts val="2800"/>
-              <a:buFont typeface="Arial"/>
-              <a:buNone/>
-              <a:defRPr sz="2800" b="0" i="0" u="none" strike="noStrike" cap="none">
-                <a:solidFill>
-                  <a:schemeClr val="dk1"/>
-                </a:solidFill>
-                <a:latin typeface="Arial"/>
-                <a:ea typeface="Arial"/>
-                <a:cs typeface="Arial"/>
-                <a:sym typeface="Arial"/>
-              </a:defRPr>
-            </a:lvl1pPr>
-            <a:lvl2pPr marR="0" lvl="1" algn="l" rtl="0">
-              <a:lnSpc>
-                <a:spcPct val="100000"/>
-              </a:lnSpc>
-              <a:spcBef>
-                <a:spcPts val="0"/>
-              </a:spcBef>
-              <a:spcAft>
-                <a:spcPts val="0"/>
-              </a:spcAft>
-              <a:buClr>
-                <a:schemeClr val="dk1"/>
-              </a:buClr>
-              <a:buSzPts val="2800"/>
-              <a:buFont typeface="Arial"/>
-              <a:buNone/>
-              <a:defRPr sz="2800" b="0" i="0" u="none" strike="noStrike" cap="none">
-                <a:solidFill>
-                  <a:schemeClr val="dk1"/>
-                </a:solidFill>
-                <a:latin typeface="Arial"/>
-                <a:ea typeface="Arial"/>
-                <a:cs typeface="Arial"/>
-                <a:sym typeface="Arial"/>
-              </a:defRPr>
-            </a:lvl2pPr>
-            <a:lvl3pPr marR="0" lvl="2" algn="l" rtl="0">
-              <a:lnSpc>
-                <a:spcPct val="100000"/>
-              </a:lnSpc>
-              <a:spcBef>
-                <a:spcPts val="0"/>
-              </a:spcBef>
-              <a:spcAft>
-                <a:spcPts val="0"/>
-              </a:spcAft>
-              <a:buClr>
-                <a:schemeClr val="dk1"/>
-              </a:buClr>
-              <a:buSzPts val="2800"/>
-              <a:buFont typeface="Arial"/>
-              <a:buNone/>
-              <a:defRPr sz="2800" b="0" i="0" u="none" strike="noStrike" cap="none">
-                <a:solidFill>
-                  <a:schemeClr val="dk1"/>
-                </a:solidFill>
-                <a:latin typeface="Arial"/>
-                <a:ea typeface="Arial"/>
-                <a:cs typeface="Arial"/>
-                <a:sym typeface="Arial"/>
-              </a:defRPr>
-            </a:lvl3pPr>
-            <a:lvl4pPr marR="0" lvl="3" algn="l" rtl="0">
-              <a:lnSpc>
-                <a:spcPct val="100000"/>
-              </a:lnSpc>
-              <a:spcBef>
-                <a:spcPts val="0"/>
-              </a:spcBef>
-              <a:spcAft>
-                <a:spcPts val="0"/>
-              </a:spcAft>
-              <a:buClr>
-                <a:schemeClr val="dk1"/>
-              </a:buClr>
-              <a:buSzPts val="2800"/>
-              <a:buFont typeface="Arial"/>
-              <a:buNone/>
-              <a:defRPr sz="2800" b="0" i="0" u="none" strike="noStrike" cap="none">
-                <a:solidFill>
-                  <a:schemeClr val="dk1"/>
-                </a:solidFill>
-                <a:latin typeface="Arial"/>
-                <a:ea typeface="Arial"/>
-                <a:cs typeface="Arial"/>
-                <a:sym typeface="Arial"/>
-              </a:defRPr>
-            </a:lvl4pPr>
-            <a:lvl5pPr marR="0" lvl="4" algn="l" rtl="0">
-              <a:lnSpc>
-                <a:spcPct val="100000"/>
-              </a:lnSpc>
-              <a:spcBef>
-                <a:spcPts val="0"/>
-              </a:spcBef>
-              <a:spcAft>
-                <a:spcPts val="0"/>
-              </a:spcAft>
-              <a:buClr>
-                <a:schemeClr val="dk1"/>
-              </a:buClr>
-              <a:buSzPts val="2800"/>
-              <a:buFont typeface="Arial"/>
-              <a:buNone/>
-              <a:defRPr sz="2800" b="0" i="0" u="none" strike="noStrike" cap="none">
-                <a:solidFill>
-                  <a:schemeClr val="dk1"/>
-                </a:solidFill>
-                <a:latin typeface="Arial"/>
-                <a:ea typeface="Arial"/>
-                <a:cs typeface="Arial"/>
-                <a:sym typeface="Arial"/>
-              </a:defRPr>
-            </a:lvl5pPr>
-            <a:lvl6pPr marR="0" lvl="5" algn="l" rtl="0">
-              <a:lnSpc>
-                <a:spcPct val="100000"/>
-              </a:lnSpc>
-              <a:spcBef>
-                <a:spcPts val="0"/>
-              </a:spcBef>
-              <a:spcAft>
-                <a:spcPts val="0"/>
-              </a:spcAft>
-              <a:buClr>
-                <a:schemeClr val="dk1"/>
-              </a:buClr>
-              <a:buSzPts val="2800"/>
-              <a:buFont typeface="Arial"/>
-              <a:buNone/>
-              <a:defRPr sz="2800" b="0" i="0" u="none" strike="noStrike" cap="none">
-                <a:solidFill>
-                  <a:schemeClr val="dk1"/>
-                </a:solidFill>
-                <a:latin typeface="Arial"/>
-                <a:ea typeface="Arial"/>
-                <a:cs typeface="Arial"/>
-                <a:sym typeface="Arial"/>
-              </a:defRPr>
-            </a:lvl6pPr>
-            <a:lvl7pPr marR="0" lvl="6" algn="l" rtl="0">
-              <a:lnSpc>
-                <a:spcPct val="100000"/>
-              </a:lnSpc>
-              <a:spcBef>
-                <a:spcPts val="0"/>
-              </a:spcBef>
-              <a:spcAft>
-                <a:spcPts val="0"/>
-              </a:spcAft>
-              <a:buClr>
-                <a:schemeClr val="dk1"/>
-              </a:buClr>
-              <a:buSzPts val="2800"/>
-              <a:buFont typeface="Arial"/>
-              <a:buNone/>
-              <a:defRPr sz="2800" b="0" i="0" u="none" strike="noStrike" cap="none">
-                <a:solidFill>
-                  <a:schemeClr val="dk1"/>
-                </a:solidFill>
-                <a:latin typeface="Arial"/>
-                <a:ea typeface="Arial"/>
-                <a:cs typeface="Arial"/>
-                <a:sym typeface="Arial"/>
-              </a:defRPr>
-            </a:lvl7pPr>
-            <a:lvl8pPr marR="0" lvl="7" algn="l" rtl="0">
-              <a:lnSpc>
-                <a:spcPct val="100000"/>
-              </a:lnSpc>
-              <a:spcBef>
-                <a:spcPts val="0"/>
-              </a:spcBef>
-              <a:spcAft>
-                <a:spcPts val="0"/>
-              </a:spcAft>
-              <a:buClr>
-                <a:schemeClr val="dk1"/>
-              </a:buClr>
-              <a:buSzPts val="2800"/>
-              <a:buFont typeface="Arial"/>
-              <a:buNone/>
-              <a:defRPr sz="2800" b="0" i="0" u="none" strike="noStrike" cap="none">
-                <a:solidFill>
-                  <a:schemeClr val="dk1"/>
-                </a:solidFill>
-                <a:latin typeface="Arial"/>
-                <a:ea typeface="Arial"/>
-                <a:cs typeface="Arial"/>
-                <a:sym typeface="Arial"/>
-              </a:defRPr>
-            </a:lvl8pPr>
-            <a:lvl9pPr marR="0" lvl="8" algn="l" rtl="0">
-              <a:lnSpc>
-                <a:spcPct val="100000"/>
-              </a:lnSpc>
-              <a:spcBef>
-                <a:spcPts val="0"/>
-              </a:spcBef>
-              <a:spcAft>
-                <a:spcPts val="0"/>
-              </a:spcAft>
-              <a:buClr>
-                <a:schemeClr val="dk1"/>
-              </a:buClr>
-              <a:buSzPts val="2800"/>
-              <a:buFont typeface="Arial"/>
-              <a:buNone/>
-              <a:defRPr sz="2800" b="0" i="0" u="none" strike="noStrike" cap="none">
-                <a:solidFill>
-                  <a:schemeClr val="dk1"/>
-                </a:solidFill>
-                <a:latin typeface="Arial"/>
-                <a:ea typeface="Arial"/>
-                <a:cs typeface="Arial"/>
-                <a:sym typeface="Arial"/>
-              </a:defRPr>
-            </a:lvl9pPr>
-          </a:lstStyle>
-          <a:p>
-            <a:pPr algn="ctr">
-              <a:buSzPts val="990"/>
-            </a:pPr>
-            <a:r>
-              <a:rPr lang="it-IT" sz="2000" b="1" dirty="0">
-                <a:latin typeface="Roboto Serif"/>
-                <a:ea typeface="Roboto Serif"/>
-                <a:cs typeface="Roboto Serif"/>
-                <a:sym typeface="Roboto Serif"/>
-              </a:rPr>
-              <a:t>Feature Integration &amp; Scaling</a:t>
-            </a:r>
-          </a:p>
-        </p:txBody>
-      </p:sp>
     </p:spTree>
     <p:extLst>
       <p:ext uri="{BB962C8B-B14F-4D97-AF65-F5344CB8AC3E}">
-        <p14:creationId xmlns:p14="http://schemas.microsoft.com/office/powerpoint/2010/main" val="2885266651"/>
+        <p14:creationId xmlns:p14="http://schemas.microsoft.com/office/powerpoint/2010/main" val="2276970252"/>
       </p:ext>
     </p:extLst>
   </p:cSld>
@@ -14114,7 +12523,7 @@
                 <a:cs typeface="Roboto Serif"/>
                 <a:sym typeface="Roboto Serif"/>
               </a:rPr>
-              <a:t>Data preprocessing</a:t>
+              <a:t>LightGBM optimization</a:t>
             </a:r>
             <a:endParaRPr sz="3720" b="1" dirty="0">
               <a:latin typeface="Roboto Serif"/>
@@ -14166,7 +12575,7 @@
                 <a:cs typeface="Times New Roman"/>
                 <a:sym typeface="Times New Roman"/>
               </a:rPr>
-              <a:t>18/27</a:t>
+              <a:t>23/27</a:t>
             </a:r>
             <a:endParaRPr dirty="0">
               <a:latin typeface="Times New Roman"/>
@@ -14203,306 +12612,12 @@
           </a:ln>
         </p:spPr>
       </p:cxnSp>
-      <p:sp>
-        <p:nvSpPr>
-          <p:cNvPr id="2" name="Google Shape;66;p14">
+      <p:pic>
+        <p:nvPicPr>
+          <p:cNvPr id="7" name="Picture 6" descr="A blue squares with white text&#10;&#10;AI-generated content may be incorrect.">
             <a:extLst>
               <a:ext uri="{FF2B5EF4-FFF2-40B4-BE49-F238E27FC236}">
-                <a16:creationId xmlns:a16="http://schemas.microsoft.com/office/drawing/2014/main" id="{554C9706-350E-2CDE-547D-26DCC41C2A04}"/>
-              </a:ext>
-            </a:extLst>
-          </p:cNvPr>
-          <p:cNvSpPr txBox="1">
-            <a:spLocks/>
-          </p:cNvSpPr>
-          <p:nvPr/>
-        </p:nvSpPr>
-        <p:spPr>
-          <a:xfrm>
-            <a:off x="311700" y="1011985"/>
-            <a:ext cx="8520600" cy="572700"/>
-          </a:xfrm>
-          <a:prstGeom prst="rect">
-            <a:avLst/>
-          </a:prstGeom>
-          <a:noFill/>
-          <a:ln>
-            <a:noFill/>
-          </a:ln>
-        </p:spPr>
-        <p:txBody>
-          <a:bodyPr spcFirstLastPara="1" wrap="square" lIns="91425" tIns="91425" rIns="91425" bIns="91425" anchor="t" anchorCtr="0">
-            <a:noAutofit/>
-          </a:bodyPr>
-          <a:lstStyle>
-            <a:defPPr marR="0" lvl="0" algn="l" rtl="0">
-              <a:lnSpc>
-                <a:spcPct val="100000"/>
-              </a:lnSpc>
-              <a:spcBef>
-                <a:spcPts val="0"/>
-              </a:spcBef>
-              <a:spcAft>
-                <a:spcPts val="0"/>
-              </a:spcAft>
-            </a:defPPr>
-            <a:lvl1pPr marR="0" lvl="0" algn="l" rtl="0">
-              <a:lnSpc>
-                <a:spcPct val="100000"/>
-              </a:lnSpc>
-              <a:spcBef>
-                <a:spcPts val="0"/>
-              </a:spcBef>
-              <a:spcAft>
-                <a:spcPts val="0"/>
-              </a:spcAft>
-              <a:buClr>
-                <a:schemeClr val="dk1"/>
-              </a:buClr>
-              <a:buSzPts val="2800"/>
-              <a:buFont typeface="Arial"/>
-              <a:buNone/>
-              <a:defRPr sz="2800" b="0" i="0" u="none" strike="noStrike" cap="none">
-                <a:solidFill>
-                  <a:schemeClr val="dk1"/>
-                </a:solidFill>
-                <a:latin typeface="Arial"/>
-                <a:ea typeface="Arial"/>
-                <a:cs typeface="Arial"/>
-                <a:sym typeface="Arial"/>
-              </a:defRPr>
-            </a:lvl1pPr>
-            <a:lvl2pPr marR="0" lvl="1" algn="l" rtl="0">
-              <a:lnSpc>
-                <a:spcPct val="100000"/>
-              </a:lnSpc>
-              <a:spcBef>
-                <a:spcPts val="0"/>
-              </a:spcBef>
-              <a:spcAft>
-                <a:spcPts val="0"/>
-              </a:spcAft>
-              <a:buClr>
-                <a:schemeClr val="dk1"/>
-              </a:buClr>
-              <a:buSzPts val="2800"/>
-              <a:buFont typeface="Arial"/>
-              <a:buNone/>
-              <a:defRPr sz="2800" b="0" i="0" u="none" strike="noStrike" cap="none">
-                <a:solidFill>
-                  <a:schemeClr val="dk1"/>
-                </a:solidFill>
-                <a:latin typeface="Arial"/>
-                <a:ea typeface="Arial"/>
-                <a:cs typeface="Arial"/>
-                <a:sym typeface="Arial"/>
-              </a:defRPr>
-            </a:lvl2pPr>
-            <a:lvl3pPr marR="0" lvl="2" algn="l" rtl="0">
-              <a:lnSpc>
-                <a:spcPct val="100000"/>
-              </a:lnSpc>
-              <a:spcBef>
-                <a:spcPts val="0"/>
-              </a:spcBef>
-              <a:spcAft>
-                <a:spcPts val="0"/>
-              </a:spcAft>
-              <a:buClr>
-                <a:schemeClr val="dk1"/>
-              </a:buClr>
-              <a:buSzPts val="2800"/>
-              <a:buFont typeface="Arial"/>
-              <a:buNone/>
-              <a:defRPr sz="2800" b="0" i="0" u="none" strike="noStrike" cap="none">
-                <a:solidFill>
-                  <a:schemeClr val="dk1"/>
-                </a:solidFill>
-                <a:latin typeface="Arial"/>
-                <a:ea typeface="Arial"/>
-                <a:cs typeface="Arial"/>
-                <a:sym typeface="Arial"/>
-              </a:defRPr>
-            </a:lvl3pPr>
-            <a:lvl4pPr marR="0" lvl="3" algn="l" rtl="0">
-              <a:lnSpc>
-                <a:spcPct val="100000"/>
-              </a:lnSpc>
-              <a:spcBef>
-                <a:spcPts val="0"/>
-              </a:spcBef>
-              <a:spcAft>
-                <a:spcPts val="0"/>
-              </a:spcAft>
-              <a:buClr>
-                <a:schemeClr val="dk1"/>
-              </a:buClr>
-              <a:buSzPts val="2800"/>
-              <a:buFont typeface="Arial"/>
-              <a:buNone/>
-              <a:defRPr sz="2800" b="0" i="0" u="none" strike="noStrike" cap="none">
-                <a:solidFill>
-                  <a:schemeClr val="dk1"/>
-                </a:solidFill>
-                <a:latin typeface="Arial"/>
-                <a:ea typeface="Arial"/>
-                <a:cs typeface="Arial"/>
-                <a:sym typeface="Arial"/>
-              </a:defRPr>
-            </a:lvl4pPr>
-            <a:lvl5pPr marR="0" lvl="4" algn="l" rtl="0">
-              <a:lnSpc>
-                <a:spcPct val="100000"/>
-              </a:lnSpc>
-              <a:spcBef>
-                <a:spcPts val="0"/>
-              </a:spcBef>
-              <a:spcAft>
-                <a:spcPts val="0"/>
-              </a:spcAft>
-              <a:buClr>
-                <a:schemeClr val="dk1"/>
-              </a:buClr>
-              <a:buSzPts val="2800"/>
-              <a:buFont typeface="Arial"/>
-              <a:buNone/>
-              <a:defRPr sz="2800" b="0" i="0" u="none" strike="noStrike" cap="none">
-                <a:solidFill>
-                  <a:schemeClr val="dk1"/>
-                </a:solidFill>
-                <a:latin typeface="Arial"/>
-                <a:ea typeface="Arial"/>
-                <a:cs typeface="Arial"/>
-                <a:sym typeface="Arial"/>
-              </a:defRPr>
-            </a:lvl5pPr>
-            <a:lvl6pPr marR="0" lvl="5" algn="l" rtl="0">
-              <a:lnSpc>
-                <a:spcPct val="100000"/>
-              </a:lnSpc>
-              <a:spcBef>
-                <a:spcPts val="0"/>
-              </a:spcBef>
-              <a:spcAft>
-                <a:spcPts val="0"/>
-              </a:spcAft>
-              <a:buClr>
-                <a:schemeClr val="dk1"/>
-              </a:buClr>
-              <a:buSzPts val="2800"/>
-              <a:buFont typeface="Arial"/>
-              <a:buNone/>
-              <a:defRPr sz="2800" b="0" i="0" u="none" strike="noStrike" cap="none">
-                <a:solidFill>
-                  <a:schemeClr val="dk1"/>
-                </a:solidFill>
-                <a:latin typeface="Arial"/>
-                <a:ea typeface="Arial"/>
-                <a:cs typeface="Arial"/>
-                <a:sym typeface="Arial"/>
-              </a:defRPr>
-            </a:lvl6pPr>
-            <a:lvl7pPr marR="0" lvl="6" algn="l" rtl="0">
-              <a:lnSpc>
-                <a:spcPct val="100000"/>
-              </a:lnSpc>
-              <a:spcBef>
-                <a:spcPts val="0"/>
-              </a:spcBef>
-              <a:spcAft>
-                <a:spcPts val="0"/>
-              </a:spcAft>
-              <a:buClr>
-                <a:schemeClr val="dk1"/>
-              </a:buClr>
-              <a:buSzPts val="2800"/>
-              <a:buFont typeface="Arial"/>
-              <a:buNone/>
-              <a:defRPr sz="2800" b="0" i="0" u="none" strike="noStrike" cap="none">
-                <a:solidFill>
-                  <a:schemeClr val="dk1"/>
-                </a:solidFill>
-                <a:latin typeface="Arial"/>
-                <a:ea typeface="Arial"/>
-                <a:cs typeface="Arial"/>
-                <a:sym typeface="Arial"/>
-              </a:defRPr>
-            </a:lvl7pPr>
-            <a:lvl8pPr marR="0" lvl="7" algn="l" rtl="0">
-              <a:lnSpc>
-                <a:spcPct val="100000"/>
-              </a:lnSpc>
-              <a:spcBef>
-                <a:spcPts val="0"/>
-              </a:spcBef>
-              <a:spcAft>
-                <a:spcPts val="0"/>
-              </a:spcAft>
-              <a:buClr>
-                <a:schemeClr val="dk1"/>
-              </a:buClr>
-              <a:buSzPts val="2800"/>
-              <a:buFont typeface="Arial"/>
-              <a:buNone/>
-              <a:defRPr sz="2800" b="0" i="0" u="none" strike="noStrike" cap="none">
-                <a:solidFill>
-                  <a:schemeClr val="dk1"/>
-                </a:solidFill>
-                <a:latin typeface="Arial"/>
-                <a:ea typeface="Arial"/>
-                <a:cs typeface="Arial"/>
-                <a:sym typeface="Arial"/>
-              </a:defRPr>
-            </a:lvl8pPr>
-            <a:lvl9pPr marR="0" lvl="8" algn="l" rtl="0">
-              <a:lnSpc>
-                <a:spcPct val="100000"/>
-              </a:lnSpc>
-              <a:spcBef>
-                <a:spcPts val="0"/>
-              </a:spcBef>
-              <a:spcAft>
-                <a:spcPts val="0"/>
-              </a:spcAft>
-              <a:buClr>
-                <a:schemeClr val="dk1"/>
-              </a:buClr>
-              <a:buSzPts val="2800"/>
-              <a:buFont typeface="Arial"/>
-              <a:buNone/>
-              <a:defRPr sz="2800" b="0" i="0" u="none" strike="noStrike" cap="none">
-                <a:solidFill>
-                  <a:schemeClr val="dk1"/>
-                </a:solidFill>
-                <a:latin typeface="Arial"/>
-                <a:ea typeface="Arial"/>
-                <a:cs typeface="Arial"/>
-                <a:sym typeface="Arial"/>
-              </a:defRPr>
-            </a:lvl9pPr>
-          </a:lstStyle>
-          <a:p>
-            <a:pPr algn="ctr">
-              <a:buSzPts val="990"/>
-            </a:pPr>
-            <a:r>
-              <a:rPr lang="it-IT" sz="2000" b="1" dirty="0">
-                <a:latin typeface="Roboto Serif"/>
-                <a:ea typeface="Roboto Serif"/>
-                <a:cs typeface="Roboto Serif"/>
-                <a:sym typeface="Roboto Serif"/>
-              </a:rPr>
-              <a:t>Vectorization &amp; Feature Integration &amp; Scaling</a:t>
-            </a:r>
-          </a:p>
-        </p:txBody>
-      </p:sp>
-      <p:pic>
-        <p:nvPicPr>
-          <p:cNvPr id="4" name="Picture 3">
-            <a:extLst>
-              <a:ext uri="{FF2B5EF4-FFF2-40B4-BE49-F238E27FC236}">
-                <a16:creationId xmlns:a16="http://schemas.microsoft.com/office/drawing/2014/main" id="{F0F761A8-F742-E92D-37B8-9DCB6FC9B333}"/>
+                <a16:creationId xmlns:a16="http://schemas.microsoft.com/office/drawing/2014/main" id="{BB39854A-617E-51AF-CBC2-5D1150F229E8}"/>
               </a:ext>
             </a:extLst>
           </p:cNvPr>
@@ -14519,18 +12634,85 @@
         </p:blipFill>
         <p:spPr>
           <a:xfrm>
-            <a:off x="1355430" y="1705914"/>
-            <a:ext cx="6433140" cy="3071224"/>
+            <a:off x="4572000" y="1505473"/>
+            <a:ext cx="3612324" cy="2740624"/>
           </a:xfrm>
           <a:prstGeom prst="rect">
             <a:avLst/>
           </a:prstGeom>
         </p:spPr>
       </p:pic>
+      <p:pic>
+        <p:nvPicPr>
+          <p:cNvPr id="6" name="Picture 5" descr="A blue squares with white text&#10;&#10;AI-generated content may be incorrect.">
+            <a:extLst>
+              <a:ext uri="{FF2B5EF4-FFF2-40B4-BE49-F238E27FC236}">
+                <a16:creationId xmlns:a16="http://schemas.microsoft.com/office/drawing/2014/main" id="{9582D80C-799F-D454-0A4B-0E9793E1588B}"/>
+              </a:ext>
+            </a:extLst>
+          </p:cNvPr>
+          <p:cNvPicPr>
+            <a:picLocks noChangeAspect="1"/>
+          </p:cNvPicPr>
+          <p:nvPr/>
+        </p:nvPicPr>
+        <p:blipFill>
+          <a:blip r:embed="rId4"/>
+          <a:stretch>
+            <a:fillRect/>
+          </a:stretch>
+        </p:blipFill>
+        <p:spPr>
+          <a:xfrm>
+            <a:off x="276600" y="1505473"/>
+            <a:ext cx="3612325" cy="2740625"/>
+          </a:xfrm>
+          <a:prstGeom prst="rect">
+            <a:avLst/>
+          </a:prstGeom>
+        </p:spPr>
+      </p:pic>
+      <p:cxnSp>
+        <p:nvCxnSpPr>
+          <p:cNvPr id="10" name="Straight Connector 9">
+            <a:extLst>
+              <a:ext uri="{FF2B5EF4-FFF2-40B4-BE49-F238E27FC236}">
+                <a16:creationId xmlns:a16="http://schemas.microsoft.com/office/drawing/2014/main" id="{735A507F-C676-F51D-35EA-593B7B0F3122}"/>
+              </a:ext>
+            </a:extLst>
+          </p:cNvPr>
+          <p:cNvCxnSpPr/>
+          <p:nvPr/>
+        </p:nvCxnSpPr>
+        <p:spPr>
+          <a:xfrm>
+            <a:off x="4340352" y="1377696"/>
+            <a:ext cx="0" cy="3163824"/>
+          </a:xfrm>
+          <a:prstGeom prst="line">
+            <a:avLst/>
+          </a:prstGeom>
+          <a:ln w="12700"/>
+        </p:spPr>
+        <p:style>
+          <a:lnRef idx="1">
+            <a:schemeClr val="dk1"/>
+          </a:lnRef>
+          <a:fillRef idx="0">
+            <a:schemeClr val="dk1"/>
+          </a:fillRef>
+          <a:effectRef idx="0">
+            <a:schemeClr val="dk1"/>
+          </a:effectRef>
+          <a:fontRef idx="minor">
+            <a:schemeClr val="tx1"/>
+          </a:fontRef>
+        </p:style>
+      </p:cxnSp>
     </p:spTree>
     <p:extLst>
       <p:ext uri="{BB962C8B-B14F-4D97-AF65-F5344CB8AC3E}">
-        <p14:creationId xmlns:p14="http://schemas.microsoft.com/office/powerpoint/2010/main" val="3115207091"/>
+        <p14:creationId xmlns:p14="http://schemas.microsoft.com/office/powerpoint/2010/main" val="3973191263"/>
       </p:ext>
     </p:extLst>
   </p:cSld>
@@ -14881,1338 +13063,6 @@
 </file>
 
 <file path=ppt/slides/slide20.xml><?xml version="1.0" encoding="utf-8"?>
-<p:sld xmlns:a="http://schemas.openxmlformats.org/drawingml/2006/main" xmlns:r="http://schemas.openxmlformats.org/officeDocument/2006/relationships" xmlns:p="http://schemas.openxmlformats.org/presentationml/2006/main">
-  <p:cSld>
-    <p:spTree>
-      <p:nvGrpSpPr>
-        <p:cNvPr id="1" name="Shape 65"/>
-        <p:cNvGrpSpPr/>
-        <p:nvPr/>
-      </p:nvGrpSpPr>
-      <p:grpSpPr>
-        <a:xfrm>
-          <a:off x="0" y="0"/>
-          <a:ext cx="0" cy="0"/>
-          <a:chOff x="0" y="0"/>
-          <a:chExt cx="0" cy="0"/>
-        </a:xfrm>
-      </p:grpSpPr>
-      <p:sp>
-        <p:nvSpPr>
-          <p:cNvPr id="66" name="Google Shape;66;p14"/>
-          <p:cNvSpPr txBox="1">
-            <a:spLocks noGrp="1"/>
-          </p:cNvSpPr>
-          <p:nvPr>
-            <p:ph type="title"/>
-          </p:nvPr>
-        </p:nvSpPr>
-        <p:spPr>
-          <a:xfrm>
-            <a:off x="311700" y="64025"/>
-            <a:ext cx="8520600" cy="572700"/>
-          </a:xfrm>
-          <a:prstGeom prst="rect">
-            <a:avLst/>
-          </a:prstGeom>
-        </p:spPr>
-        <p:txBody>
-          <a:bodyPr spcFirstLastPara="1" wrap="square" lIns="91425" tIns="91425" rIns="91425" bIns="91425" anchor="t" anchorCtr="0">
-            <a:noAutofit/>
-          </a:bodyPr>
-          <a:lstStyle/>
-          <a:p>
-            <a:pPr marL="0" lvl="0" indent="0" algn="l" rtl="0">
-              <a:spcBef>
-                <a:spcPts val="0"/>
-              </a:spcBef>
-              <a:spcAft>
-                <a:spcPts val="0"/>
-              </a:spcAft>
-              <a:buSzPts val="990"/>
-              <a:buNone/>
-            </a:pPr>
-            <a:r>
-              <a:rPr lang="it-IT" sz="3720" b="1" dirty="0">
-                <a:latin typeface="Roboto Serif"/>
-                <a:ea typeface="Roboto Serif"/>
-                <a:cs typeface="Roboto Serif"/>
-                <a:sym typeface="Roboto Serif"/>
-              </a:rPr>
-              <a:t>Models evaluation</a:t>
-            </a:r>
-            <a:endParaRPr sz="3720" b="1" dirty="0">
-              <a:latin typeface="Roboto Serif"/>
-              <a:ea typeface="Roboto Serif"/>
-              <a:cs typeface="Roboto Serif"/>
-              <a:sym typeface="Roboto Serif"/>
-            </a:endParaRPr>
-          </a:p>
-        </p:txBody>
-      </p:sp>
-      <p:sp>
-        <p:nvSpPr>
-          <p:cNvPr id="67" name="Google Shape;67;p14"/>
-          <p:cNvSpPr txBox="1">
-            <a:spLocks noGrp="1"/>
-          </p:cNvSpPr>
-          <p:nvPr>
-            <p:ph type="body" idx="1"/>
-          </p:nvPr>
-        </p:nvSpPr>
-        <p:spPr>
-          <a:xfrm>
-            <a:off x="346750" y="1138425"/>
-            <a:ext cx="8520600" cy="1989000"/>
-          </a:xfrm>
-          <a:prstGeom prst="rect">
-            <a:avLst/>
-          </a:prstGeom>
-        </p:spPr>
-        <p:txBody>
-          <a:bodyPr spcFirstLastPara="1" wrap="square" lIns="91425" tIns="91425" rIns="91425" bIns="91425" anchor="t" anchorCtr="0">
-            <a:normAutofit fontScale="85000" lnSpcReduction="10000"/>
-          </a:bodyPr>
-          <a:lstStyle/>
-          <a:p>
-            <a:pPr marL="457200" lvl="0" indent="-342900" algn="l" rtl="0">
-              <a:lnSpc>
-                <a:spcPct val="150000"/>
-              </a:lnSpc>
-              <a:spcBef>
-                <a:spcPts val="0"/>
-              </a:spcBef>
-              <a:spcAft>
-                <a:spcPts val="0"/>
-              </a:spcAft>
-              <a:buSzPts val="1800"/>
-              <a:buFont typeface="Times New Roman"/>
-              <a:buChar char="●"/>
-            </a:pPr>
-            <a:r>
-              <a:rPr lang="it-IT" b="1" dirty="0">
-                <a:latin typeface="Open Sans"/>
-                <a:ea typeface="Open Sans"/>
-                <a:cs typeface="Open Sans"/>
-                <a:sym typeface="Open Sans"/>
-              </a:rPr>
-              <a:t>Validation Strategy</a:t>
-            </a:r>
-            <a:r>
-              <a:rPr lang="it-IT" dirty="0">
-                <a:latin typeface="Open Sans"/>
-                <a:ea typeface="Open Sans"/>
-                <a:cs typeface="Open Sans"/>
-                <a:sym typeface="Open Sans"/>
-              </a:rPr>
-              <a:t>: Stratified 10-Fold Cross-Validation.</a:t>
-            </a:r>
-          </a:p>
-          <a:p>
-            <a:pPr marL="457200" lvl="0" indent="-342900" algn="l" rtl="0">
-              <a:lnSpc>
-                <a:spcPct val="150000"/>
-              </a:lnSpc>
-              <a:spcBef>
-                <a:spcPts val="0"/>
-              </a:spcBef>
-              <a:spcAft>
-                <a:spcPts val="0"/>
-              </a:spcAft>
-              <a:buSzPts val="1800"/>
-              <a:buFont typeface="Times New Roman"/>
-              <a:buChar char="●"/>
-            </a:pPr>
-            <a:r>
-              <a:rPr lang="it-IT" b="1" dirty="0">
-                <a:latin typeface="Open Sans"/>
-                <a:ea typeface="Open Sans"/>
-                <a:cs typeface="Open Sans"/>
-                <a:sym typeface="Open Sans"/>
-              </a:rPr>
-              <a:t>Algorithms Tested</a:t>
-            </a:r>
-            <a:r>
-              <a:rPr lang="it-IT" dirty="0">
-                <a:latin typeface="Open Sans"/>
-                <a:ea typeface="Open Sans"/>
-                <a:cs typeface="Open Sans"/>
-                <a:sym typeface="Open Sans"/>
-              </a:rPr>
-              <a:t>: Logistic Regression, SVM, Random Forest, AdaBoost, LightGBM.</a:t>
-            </a:r>
-          </a:p>
-          <a:p>
-            <a:pPr marL="457200" lvl="0" indent="-342900" algn="l" rtl="0">
-              <a:lnSpc>
-                <a:spcPct val="150000"/>
-              </a:lnSpc>
-              <a:spcBef>
-                <a:spcPts val="0"/>
-              </a:spcBef>
-              <a:spcAft>
-                <a:spcPts val="0"/>
-              </a:spcAft>
-              <a:buSzPts val="1800"/>
-              <a:buFont typeface="Times New Roman"/>
-              <a:buChar char="●"/>
-            </a:pPr>
-            <a:r>
-              <a:rPr lang="it-IT" b="1" dirty="0">
-                <a:latin typeface="Open Sans"/>
-                <a:ea typeface="Open Sans"/>
-                <a:cs typeface="Open Sans"/>
-                <a:sym typeface="Open Sans"/>
-              </a:rPr>
-              <a:t>Winner</a:t>
-            </a:r>
-            <a:r>
-              <a:rPr lang="it-IT" dirty="0">
-                <a:latin typeface="Open Sans"/>
-                <a:ea typeface="Open Sans"/>
-                <a:cs typeface="Open Sans"/>
-                <a:sym typeface="Open Sans"/>
-              </a:rPr>
-              <a:t>: LightGBM (F1-Score: 0.971, Accuracy: 0.970).</a:t>
-            </a:r>
-          </a:p>
-          <a:p>
-            <a:pPr marL="457200" lvl="0" indent="-342900" algn="l" rtl="0">
-              <a:lnSpc>
-                <a:spcPct val="150000"/>
-              </a:lnSpc>
-              <a:spcBef>
-                <a:spcPts val="0"/>
-              </a:spcBef>
-              <a:spcAft>
-                <a:spcPts val="0"/>
-              </a:spcAft>
-              <a:buSzPts val="1800"/>
-              <a:buFont typeface="Times New Roman"/>
-              <a:buChar char="●"/>
-            </a:pPr>
-            <a:r>
-              <a:rPr lang="it-IT" b="1" dirty="0">
-                <a:latin typeface="Open Sans"/>
-                <a:ea typeface="Open Sans"/>
-                <a:cs typeface="Open Sans"/>
-                <a:sym typeface="Open Sans"/>
-              </a:rPr>
-              <a:t>Why LightGBM</a:t>
-            </a:r>
-            <a:r>
-              <a:rPr lang="it-IT" dirty="0">
-                <a:latin typeface="Open Sans"/>
-                <a:ea typeface="Open Sans"/>
-                <a:cs typeface="Open Sans"/>
-                <a:sym typeface="Open Sans"/>
-              </a:rPr>
-              <a:t>? Best balance between speed, precision, and handling of our high-dimensional features (TF-IDF).</a:t>
-            </a:r>
-            <a:endParaRPr dirty="0">
-              <a:latin typeface="Open Sans"/>
-              <a:ea typeface="Open Sans"/>
-              <a:cs typeface="Open Sans"/>
-              <a:sym typeface="Open Sans"/>
-            </a:endParaRPr>
-          </a:p>
-        </p:txBody>
-      </p:sp>
-      <p:sp>
-        <p:nvSpPr>
-          <p:cNvPr id="68" name="Google Shape;68;p14"/>
-          <p:cNvSpPr txBox="1">
-            <a:spLocks noGrp="1"/>
-          </p:cNvSpPr>
-          <p:nvPr>
-            <p:ph type="sldNum" idx="12"/>
-          </p:nvPr>
-        </p:nvSpPr>
-        <p:spPr>
-          <a:xfrm>
-            <a:off x="8472458" y="4663217"/>
-            <a:ext cx="548700" cy="393600"/>
-          </a:xfrm>
-          <a:prstGeom prst="rect">
-            <a:avLst/>
-          </a:prstGeom>
-        </p:spPr>
-        <p:txBody>
-          <a:bodyPr spcFirstLastPara="1" wrap="square" lIns="91425" tIns="91425" rIns="91425" bIns="91425" anchor="ctr" anchorCtr="0">
-            <a:normAutofit/>
-          </a:bodyPr>
-          <a:lstStyle/>
-          <a:p>
-            <a:pPr marL="0" lvl="0" indent="0" algn="r" rtl="0">
-              <a:spcBef>
-                <a:spcPts val="0"/>
-              </a:spcBef>
-              <a:spcAft>
-                <a:spcPts val="0"/>
-              </a:spcAft>
-              <a:buNone/>
-            </a:pPr>
-            <a:r>
-              <a:rPr lang="it" dirty="0">
-                <a:latin typeface="Times New Roman"/>
-                <a:ea typeface="Times New Roman"/>
-                <a:cs typeface="Times New Roman"/>
-                <a:sym typeface="Times New Roman"/>
-              </a:rPr>
-              <a:t>19/27</a:t>
-            </a:r>
-            <a:endParaRPr dirty="0">
-              <a:latin typeface="Times New Roman"/>
-              <a:ea typeface="Times New Roman"/>
-              <a:cs typeface="Times New Roman"/>
-              <a:sym typeface="Times New Roman"/>
-            </a:endParaRPr>
-          </a:p>
-        </p:txBody>
-      </p:sp>
-      <p:cxnSp>
-        <p:nvCxnSpPr>
-          <p:cNvPr id="69" name="Google Shape;69;p14"/>
-          <p:cNvCxnSpPr/>
-          <p:nvPr/>
-        </p:nvCxnSpPr>
-        <p:spPr>
-          <a:xfrm>
-            <a:off x="276600" y="789125"/>
-            <a:ext cx="4295400" cy="0"/>
-          </a:xfrm>
-          <a:prstGeom prst="straightConnector1">
-            <a:avLst/>
-          </a:prstGeom>
-          <a:noFill/>
-          <a:ln w="9525" cap="flat" cmpd="sng">
-            <a:solidFill>
-              <a:schemeClr val="dk2"/>
-            </a:solidFill>
-            <a:prstDash val="solid"/>
-            <a:round/>
-            <a:headEnd type="none" w="med" len="med"/>
-            <a:tailEnd type="none" w="med" len="med"/>
-          </a:ln>
-        </p:spPr>
-      </p:cxnSp>
-    </p:spTree>
-    <p:extLst>
-      <p:ext uri="{BB962C8B-B14F-4D97-AF65-F5344CB8AC3E}">
-        <p14:creationId xmlns:p14="http://schemas.microsoft.com/office/powerpoint/2010/main" val="42202743"/>
-      </p:ext>
-    </p:extLst>
-  </p:cSld>
-  <p:clrMapOvr>
-    <a:masterClrMapping/>
-  </p:clrMapOvr>
-</p:sld>
-</file>
-
-<file path=ppt/slides/slide21.xml><?xml version="1.0" encoding="utf-8"?>
-<p:sld xmlns:a="http://schemas.openxmlformats.org/drawingml/2006/main" xmlns:r="http://schemas.openxmlformats.org/officeDocument/2006/relationships" xmlns:p="http://schemas.openxmlformats.org/presentationml/2006/main">
-  <p:cSld>
-    <p:spTree>
-      <p:nvGrpSpPr>
-        <p:cNvPr id="1" name="Shape 65"/>
-        <p:cNvGrpSpPr/>
-        <p:nvPr/>
-      </p:nvGrpSpPr>
-      <p:grpSpPr>
-        <a:xfrm>
-          <a:off x="0" y="0"/>
-          <a:ext cx="0" cy="0"/>
-          <a:chOff x="0" y="0"/>
-          <a:chExt cx="0" cy="0"/>
-        </a:xfrm>
-      </p:grpSpPr>
-      <p:sp>
-        <p:nvSpPr>
-          <p:cNvPr id="66" name="Google Shape;66;p14"/>
-          <p:cNvSpPr txBox="1">
-            <a:spLocks noGrp="1"/>
-          </p:cNvSpPr>
-          <p:nvPr>
-            <p:ph type="title"/>
-          </p:nvPr>
-        </p:nvSpPr>
-        <p:spPr>
-          <a:xfrm>
-            <a:off x="311700" y="64025"/>
-            <a:ext cx="8520600" cy="572700"/>
-          </a:xfrm>
-          <a:prstGeom prst="rect">
-            <a:avLst/>
-          </a:prstGeom>
-        </p:spPr>
-        <p:txBody>
-          <a:bodyPr spcFirstLastPara="1" wrap="square" lIns="91425" tIns="91425" rIns="91425" bIns="91425" anchor="t" anchorCtr="0">
-            <a:noAutofit/>
-          </a:bodyPr>
-          <a:lstStyle/>
-          <a:p>
-            <a:pPr marL="0" lvl="0" indent="0" algn="l" rtl="0">
-              <a:spcBef>
-                <a:spcPts val="0"/>
-              </a:spcBef>
-              <a:spcAft>
-                <a:spcPts val="0"/>
-              </a:spcAft>
-              <a:buSzPts val="990"/>
-              <a:buNone/>
-            </a:pPr>
-            <a:r>
-              <a:rPr lang="it-IT" sz="3720" b="1" dirty="0">
-                <a:latin typeface="Roboto Serif"/>
-                <a:ea typeface="Roboto Serif"/>
-                <a:cs typeface="Roboto Serif"/>
-                <a:sym typeface="Roboto Serif"/>
-              </a:rPr>
-              <a:t>Models evaluation</a:t>
-            </a:r>
-            <a:endParaRPr sz="3720" b="1" dirty="0">
-              <a:latin typeface="Roboto Serif"/>
-              <a:ea typeface="Roboto Serif"/>
-              <a:cs typeface="Roboto Serif"/>
-              <a:sym typeface="Roboto Serif"/>
-            </a:endParaRPr>
-          </a:p>
-        </p:txBody>
-      </p:sp>
-      <p:sp>
-        <p:nvSpPr>
-          <p:cNvPr id="68" name="Google Shape;68;p14"/>
-          <p:cNvSpPr txBox="1">
-            <a:spLocks noGrp="1"/>
-          </p:cNvSpPr>
-          <p:nvPr>
-            <p:ph type="sldNum" idx="12"/>
-          </p:nvPr>
-        </p:nvSpPr>
-        <p:spPr>
-          <a:xfrm>
-            <a:off x="8472458" y="4663217"/>
-            <a:ext cx="548700" cy="393600"/>
-          </a:xfrm>
-          <a:prstGeom prst="rect">
-            <a:avLst/>
-          </a:prstGeom>
-        </p:spPr>
-        <p:txBody>
-          <a:bodyPr spcFirstLastPara="1" wrap="square" lIns="91425" tIns="91425" rIns="91425" bIns="91425" anchor="ctr" anchorCtr="0">
-            <a:normAutofit/>
-          </a:bodyPr>
-          <a:lstStyle/>
-          <a:p>
-            <a:pPr marL="0" lvl="0" indent="0" algn="r" rtl="0">
-              <a:spcBef>
-                <a:spcPts val="0"/>
-              </a:spcBef>
-              <a:spcAft>
-                <a:spcPts val="0"/>
-              </a:spcAft>
-              <a:buNone/>
-            </a:pPr>
-            <a:r>
-              <a:rPr lang="it" dirty="0">
-                <a:latin typeface="Times New Roman"/>
-                <a:ea typeface="Times New Roman"/>
-                <a:cs typeface="Times New Roman"/>
-                <a:sym typeface="Times New Roman"/>
-              </a:rPr>
-              <a:t>21/27</a:t>
-            </a:r>
-            <a:endParaRPr dirty="0">
-              <a:latin typeface="Times New Roman"/>
-              <a:ea typeface="Times New Roman"/>
-              <a:cs typeface="Times New Roman"/>
-              <a:sym typeface="Times New Roman"/>
-            </a:endParaRPr>
-          </a:p>
-        </p:txBody>
-      </p:sp>
-      <p:cxnSp>
-        <p:nvCxnSpPr>
-          <p:cNvPr id="69" name="Google Shape;69;p14"/>
-          <p:cNvCxnSpPr/>
-          <p:nvPr/>
-        </p:nvCxnSpPr>
-        <p:spPr>
-          <a:xfrm>
-            <a:off x="276600" y="789125"/>
-            <a:ext cx="4295400" cy="0"/>
-          </a:xfrm>
-          <a:prstGeom prst="straightConnector1">
-            <a:avLst/>
-          </a:prstGeom>
-          <a:noFill/>
-          <a:ln w="9525" cap="flat" cmpd="sng">
-            <a:solidFill>
-              <a:schemeClr val="dk2"/>
-            </a:solidFill>
-            <a:prstDash val="solid"/>
-            <a:round/>
-            <a:headEnd type="none" w="med" len="med"/>
-            <a:tailEnd type="none" w="med" len="med"/>
-          </a:ln>
-        </p:spPr>
-      </p:cxnSp>
-      <p:pic>
-        <p:nvPicPr>
-          <p:cNvPr id="3" name="Immagine 2" descr="Immagine che contiene schermata, testo, quadrato, Rettangolo&#10;&#10;Il contenuto generato dall&amp;#39;IA potrebbe non essere corretto.">
-            <a:extLst>
-              <a:ext uri="{FF2B5EF4-FFF2-40B4-BE49-F238E27FC236}">
-                <a16:creationId xmlns:a16="http://schemas.microsoft.com/office/drawing/2014/main" id="{821CDB63-EF4B-74FF-6497-5AC7CD3528E4}"/>
-              </a:ext>
-            </a:extLst>
-          </p:cNvPr>
-          <p:cNvPicPr>
-            <a:picLocks noChangeAspect="1"/>
-          </p:cNvPicPr>
-          <p:nvPr/>
-        </p:nvPicPr>
-        <p:blipFill>
-          <a:blip r:embed="rId3"/>
-          <a:stretch>
-            <a:fillRect/>
-          </a:stretch>
-        </p:blipFill>
-        <p:spPr>
-          <a:xfrm>
-            <a:off x="1436970" y="829849"/>
-            <a:ext cx="6176115" cy="4243192"/>
-          </a:xfrm>
-          <a:prstGeom prst="rect">
-            <a:avLst/>
-          </a:prstGeom>
-        </p:spPr>
-      </p:pic>
-    </p:spTree>
-    <p:extLst>
-      <p:ext uri="{BB962C8B-B14F-4D97-AF65-F5344CB8AC3E}">
-        <p14:creationId xmlns:p14="http://schemas.microsoft.com/office/powerpoint/2010/main" val="1279555456"/>
-      </p:ext>
-    </p:extLst>
-  </p:cSld>
-  <p:clrMapOvr>
-    <a:masterClrMapping/>
-  </p:clrMapOvr>
-</p:sld>
-</file>
-
-<file path=ppt/slides/slide22.xml><?xml version="1.0" encoding="utf-8"?>
-<p:sld xmlns:a="http://schemas.openxmlformats.org/drawingml/2006/main" xmlns:r="http://schemas.openxmlformats.org/officeDocument/2006/relationships" xmlns:p="http://schemas.openxmlformats.org/presentationml/2006/main">
-  <p:cSld>
-    <p:spTree>
-      <p:nvGrpSpPr>
-        <p:cNvPr id="1" name="Shape 65"/>
-        <p:cNvGrpSpPr/>
-        <p:nvPr/>
-      </p:nvGrpSpPr>
-      <p:grpSpPr>
-        <a:xfrm>
-          <a:off x="0" y="0"/>
-          <a:ext cx="0" cy="0"/>
-          <a:chOff x="0" y="0"/>
-          <a:chExt cx="0" cy="0"/>
-        </a:xfrm>
-      </p:grpSpPr>
-      <p:sp>
-        <p:nvSpPr>
-          <p:cNvPr id="66" name="Google Shape;66;p14"/>
-          <p:cNvSpPr txBox="1">
-            <a:spLocks noGrp="1"/>
-          </p:cNvSpPr>
-          <p:nvPr>
-            <p:ph type="title"/>
-          </p:nvPr>
-        </p:nvSpPr>
-        <p:spPr>
-          <a:xfrm>
-            <a:off x="311700" y="64025"/>
-            <a:ext cx="8520600" cy="572700"/>
-          </a:xfrm>
-          <a:prstGeom prst="rect">
-            <a:avLst/>
-          </a:prstGeom>
-        </p:spPr>
-        <p:txBody>
-          <a:bodyPr spcFirstLastPara="1" wrap="square" lIns="91425" tIns="91425" rIns="91425" bIns="91425" anchor="t" anchorCtr="0">
-            <a:noAutofit/>
-          </a:bodyPr>
-          <a:lstStyle/>
-          <a:p>
-            <a:pPr marL="0" lvl="0" indent="0" algn="l" rtl="0">
-              <a:spcBef>
-                <a:spcPts val="0"/>
-              </a:spcBef>
-              <a:spcAft>
-                <a:spcPts val="0"/>
-              </a:spcAft>
-              <a:buSzPts val="990"/>
-              <a:buNone/>
-            </a:pPr>
-            <a:r>
-              <a:rPr lang="it-IT" sz="3720" b="1" dirty="0">
-                <a:latin typeface="Roboto Serif"/>
-                <a:ea typeface="Roboto Serif"/>
-                <a:cs typeface="Roboto Serif"/>
-                <a:sym typeface="Roboto Serif"/>
-              </a:rPr>
-              <a:t>Models evaluation</a:t>
-            </a:r>
-            <a:endParaRPr sz="3720" b="1" dirty="0">
-              <a:latin typeface="Roboto Serif"/>
-              <a:ea typeface="Roboto Serif"/>
-              <a:cs typeface="Roboto Serif"/>
-              <a:sym typeface="Roboto Serif"/>
-            </a:endParaRPr>
-          </a:p>
-        </p:txBody>
-      </p:sp>
-      <p:sp>
-        <p:nvSpPr>
-          <p:cNvPr id="68" name="Google Shape;68;p14"/>
-          <p:cNvSpPr txBox="1">
-            <a:spLocks noGrp="1"/>
-          </p:cNvSpPr>
-          <p:nvPr>
-            <p:ph type="sldNum" idx="12"/>
-          </p:nvPr>
-        </p:nvSpPr>
-        <p:spPr>
-          <a:xfrm>
-            <a:off x="8472458" y="4663217"/>
-            <a:ext cx="548700" cy="393600"/>
-          </a:xfrm>
-          <a:prstGeom prst="rect">
-            <a:avLst/>
-          </a:prstGeom>
-        </p:spPr>
-        <p:txBody>
-          <a:bodyPr spcFirstLastPara="1" wrap="square" lIns="91425" tIns="91425" rIns="91425" bIns="91425" anchor="ctr" anchorCtr="0">
-            <a:normAutofit/>
-          </a:bodyPr>
-          <a:lstStyle/>
-          <a:p>
-            <a:pPr marL="0" lvl="0" indent="0" algn="r" rtl="0">
-              <a:spcBef>
-                <a:spcPts val="0"/>
-              </a:spcBef>
-              <a:spcAft>
-                <a:spcPts val="0"/>
-              </a:spcAft>
-              <a:buNone/>
-            </a:pPr>
-            <a:r>
-              <a:rPr lang="it" dirty="0">
-                <a:latin typeface="Times New Roman"/>
-                <a:ea typeface="Times New Roman"/>
-                <a:cs typeface="Times New Roman"/>
-                <a:sym typeface="Times New Roman"/>
-              </a:rPr>
-              <a:t>20/27</a:t>
-            </a:r>
-            <a:endParaRPr dirty="0">
-              <a:latin typeface="Times New Roman"/>
-              <a:ea typeface="Times New Roman"/>
-              <a:cs typeface="Times New Roman"/>
-              <a:sym typeface="Times New Roman"/>
-            </a:endParaRPr>
-          </a:p>
-        </p:txBody>
-      </p:sp>
-      <p:cxnSp>
-        <p:nvCxnSpPr>
-          <p:cNvPr id="69" name="Google Shape;69;p14"/>
-          <p:cNvCxnSpPr/>
-          <p:nvPr/>
-        </p:nvCxnSpPr>
-        <p:spPr>
-          <a:xfrm>
-            <a:off x="276600" y="789125"/>
-            <a:ext cx="4295400" cy="0"/>
-          </a:xfrm>
-          <a:prstGeom prst="straightConnector1">
-            <a:avLst/>
-          </a:prstGeom>
-          <a:noFill/>
-          <a:ln w="9525" cap="flat" cmpd="sng">
-            <a:solidFill>
-              <a:schemeClr val="dk2"/>
-            </a:solidFill>
-            <a:prstDash val="solid"/>
-            <a:round/>
-            <a:headEnd type="none" w="med" len="med"/>
-            <a:tailEnd type="none" w="med" len="med"/>
-          </a:ln>
-        </p:spPr>
-      </p:cxnSp>
-      <p:pic>
-        <p:nvPicPr>
-          <p:cNvPr id="3" name="Picture 2" descr="A table with numbers and text&#10;&#10;AI-generated content may be incorrect.">
-            <a:extLst>
-              <a:ext uri="{FF2B5EF4-FFF2-40B4-BE49-F238E27FC236}">
-                <a16:creationId xmlns:a16="http://schemas.microsoft.com/office/drawing/2014/main" id="{B9786BB9-5803-876E-DDEB-90AF2C083B3F}"/>
-              </a:ext>
-            </a:extLst>
-          </p:cNvPr>
-          <p:cNvPicPr>
-            <a:picLocks noChangeAspect="1"/>
-          </p:cNvPicPr>
-          <p:nvPr/>
-        </p:nvPicPr>
-        <p:blipFill>
-          <a:blip r:embed="rId3"/>
-          <a:stretch>
-            <a:fillRect/>
-          </a:stretch>
-        </p:blipFill>
-        <p:spPr>
-          <a:xfrm>
-            <a:off x="874934" y="1456985"/>
-            <a:ext cx="7394132" cy="2229529"/>
-          </a:xfrm>
-          <a:prstGeom prst="rect">
-            <a:avLst/>
-          </a:prstGeom>
-        </p:spPr>
-      </p:pic>
-    </p:spTree>
-    <p:extLst>
-      <p:ext uri="{BB962C8B-B14F-4D97-AF65-F5344CB8AC3E}">
-        <p14:creationId xmlns:p14="http://schemas.microsoft.com/office/powerpoint/2010/main" val="1439281819"/>
-      </p:ext>
-    </p:extLst>
-  </p:cSld>
-  <p:clrMapOvr>
-    <a:masterClrMapping/>
-  </p:clrMapOvr>
-</p:sld>
-</file>
-
-<file path=ppt/slides/slide23.xml><?xml version="1.0" encoding="utf-8"?>
-<p:sld xmlns:a="http://schemas.openxmlformats.org/drawingml/2006/main" xmlns:r="http://schemas.openxmlformats.org/officeDocument/2006/relationships" xmlns:p="http://schemas.openxmlformats.org/presentationml/2006/main">
-  <p:cSld>
-    <p:spTree>
-      <p:nvGrpSpPr>
-        <p:cNvPr id="1" name="Shape 65"/>
-        <p:cNvGrpSpPr/>
-        <p:nvPr/>
-      </p:nvGrpSpPr>
-      <p:grpSpPr>
-        <a:xfrm>
-          <a:off x="0" y="0"/>
-          <a:ext cx="0" cy="0"/>
-          <a:chOff x="0" y="0"/>
-          <a:chExt cx="0" cy="0"/>
-        </a:xfrm>
-      </p:grpSpPr>
-      <p:sp>
-        <p:nvSpPr>
-          <p:cNvPr id="66" name="Google Shape;66;p14"/>
-          <p:cNvSpPr txBox="1">
-            <a:spLocks noGrp="1"/>
-          </p:cNvSpPr>
-          <p:nvPr>
-            <p:ph type="title"/>
-          </p:nvPr>
-        </p:nvSpPr>
-        <p:spPr>
-          <a:xfrm>
-            <a:off x="311700" y="64025"/>
-            <a:ext cx="8520600" cy="572700"/>
-          </a:xfrm>
-          <a:prstGeom prst="rect">
-            <a:avLst/>
-          </a:prstGeom>
-        </p:spPr>
-        <p:txBody>
-          <a:bodyPr spcFirstLastPara="1" wrap="square" lIns="91425" tIns="91425" rIns="91425" bIns="91425" anchor="t" anchorCtr="0">
-            <a:noAutofit/>
-          </a:bodyPr>
-          <a:lstStyle/>
-          <a:p>
-            <a:pPr marL="0" lvl="0" indent="0" algn="l" rtl="0">
-              <a:spcBef>
-                <a:spcPts val="0"/>
-              </a:spcBef>
-              <a:spcAft>
-                <a:spcPts val="0"/>
-              </a:spcAft>
-              <a:buSzPts val="990"/>
-              <a:buNone/>
-            </a:pPr>
-            <a:r>
-              <a:rPr lang="it-IT" sz="3720" b="1" dirty="0">
-                <a:latin typeface="Roboto Serif"/>
-                <a:ea typeface="Roboto Serif"/>
-                <a:cs typeface="Roboto Serif"/>
-                <a:sym typeface="Roboto Serif"/>
-              </a:rPr>
-              <a:t>LightGBM optimization</a:t>
-            </a:r>
-            <a:endParaRPr sz="3720" b="1" dirty="0">
-              <a:latin typeface="Roboto Serif"/>
-              <a:ea typeface="Roboto Serif"/>
-              <a:cs typeface="Roboto Serif"/>
-              <a:sym typeface="Roboto Serif"/>
-            </a:endParaRPr>
-          </a:p>
-        </p:txBody>
-      </p:sp>
-      <p:sp>
-        <p:nvSpPr>
-          <p:cNvPr id="67" name="Google Shape;67;p14"/>
-          <p:cNvSpPr txBox="1">
-            <a:spLocks noGrp="1"/>
-          </p:cNvSpPr>
-          <p:nvPr>
-            <p:ph type="body" idx="1"/>
-          </p:nvPr>
-        </p:nvSpPr>
-        <p:spPr>
-          <a:xfrm>
-            <a:off x="346750" y="1138425"/>
-            <a:ext cx="8520600" cy="1989000"/>
-          </a:xfrm>
-          <a:prstGeom prst="rect">
-            <a:avLst/>
-          </a:prstGeom>
-        </p:spPr>
-        <p:txBody>
-          <a:bodyPr spcFirstLastPara="1" wrap="square" lIns="91425" tIns="91425" rIns="91425" bIns="91425" anchor="t" anchorCtr="0">
-            <a:normAutofit fontScale="92500" lnSpcReduction="20000"/>
-          </a:bodyPr>
-          <a:lstStyle/>
-          <a:p>
-            <a:pPr marL="457200" lvl="0" indent="-342900" algn="l" rtl="0">
-              <a:lnSpc>
-                <a:spcPct val="150000"/>
-              </a:lnSpc>
-              <a:spcBef>
-                <a:spcPts val="0"/>
-              </a:spcBef>
-              <a:spcAft>
-                <a:spcPts val="0"/>
-              </a:spcAft>
-              <a:buSzPts val="1800"/>
-              <a:buFont typeface="Times New Roman"/>
-              <a:buChar char="●"/>
-            </a:pPr>
-            <a:r>
-              <a:rPr lang="it-IT" b="1" dirty="0">
-                <a:latin typeface="Open Sans"/>
-                <a:ea typeface="Open Sans"/>
-                <a:cs typeface="Open Sans"/>
-                <a:sym typeface="Open Sans"/>
-              </a:rPr>
-              <a:t>Technique</a:t>
-            </a:r>
-            <a:r>
-              <a:rPr lang="it-IT" dirty="0">
-                <a:latin typeface="Open Sans"/>
-                <a:ea typeface="Open Sans"/>
-                <a:cs typeface="Open Sans"/>
-                <a:sym typeface="Open Sans"/>
-              </a:rPr>
-              <a:t>: Grid Search with Stratified Cross-Validation.</a:t>
-            </a:r>
-          </a:p>
-          <a:p>
-            <a:pPr marL="457200" lvl="0" indent="-342900" algn="l" rtl="0">
-              <a:lnSpc>
-                <a:spcPct val="150000"/>
-              </a:lnSpc>
-              <a:spcBef>
-                <a:spcPts val="0"/>
-              </a:spcBef>
-              <a:spcAft>
-                <a:spcPts val="0"/>
-              </a:spcAft>
-              <a:buSzPts val="1800"/>
-              <a:buFont typeface="Times New Roman"/>
-              <a:buChar char="●"/>
-            </a:pPr>
-            <a:r>
-              <a:rPr lang="it-IT" b="1" dirty="0">
-                <a:latin typeface="Open Sans"/>
-                <a:ea typeface="Open Sans"/>
-                <a:cs typeface="Open Sans"/>
-                <a:sym typeface="Open Sans"/>
-              </a:rPr>
-              <a:t>Target Metric</a:t>
-            </a:r>
-            <a:r>
-              <a:rPr lang="it-IT" dirty="0">
-                <a:latin typeface="Open Sans"/>
-                <a:ea typeface="Open Sans"/>
-                <a:cs typeface="Open Sans"/>
-                <a:sym typeface="Open Sans"/>
-              </a:rPr>
-              <a:t>: Maximizing F1-Score.</a:t>
-            </a:r>
-          </a:p>
-          <a:p>
-            <a:pPr marL="457200" lvl="0" indent="-342900" algn="l" rtl="0">
-              <a:lnSpc>
-                <a:spcPct val="150000"/>
-              </a:lnSpc>
-              <a:spcBef>
-                <a:spcPts val="0"/>
-              </a:spcBef>
-              <a:spcAft>
-                <a:spcPts val="0"/>
-              </a:spcAft>
-              <a:buSzPts val="1800"/>
-              <a:buFont typeface="Times New Roman"/>
-              <a:buChar char="●"/>
-            </a:pPr>
-            <a:r>
-              <a:rPr lang="it-IT" b="1" dirty="0">
-                <a:latin typeface="Open Sans"/>
-                <a:ea typeface="Open Sans"/>
-                <a:cs typeface="Open Sans"/>
-                <a:sym typeface="Open Sans"/>
-              </a:rPr>
-              <a:t>Tuned Parameters</a:t>
-            </a:r>
-            <a:r>
-              <a:rPr lang="it-IT" dirty="0">
-                <a:latin typeface="Open Sans"/>
-                <a:ea typeface="Open Sans"/>
-                <a:cs typeface="Open Sans"/>
-                <a:sym typeface="Open Sans"/>
-              </a:rPr>
-              <a:t>: learning_rate, num_leaves, max_depth, n_estimators.</a:t>
-            </a:r>
-          </a:p>
-          <a:p>
-            <a:pPr marL="457200" lvl="0" indent="-342900" algn="l" rtl="0">
-              <a:lnSpc>
-                <a:spcPct val="150000"/>
-              </a:lnSpc>
-              <a:spcBef>
-                <a:spcPts val="0"/>
-              </a:spcBef>
-              <a:spcAft>
-                <a:spcPts val="0"/>
-              </a:spcAft>
-              <a:buSzPts val="1800"/>
-              <a:buFont typeface="Times New Roman"/>
-              <a:buChar char="●"/>
-            </a:pPr>
-            <a:r>
-              <a:rPr lang="it-IT" b="1" dirty="0">
-                <a:latin typeface="Open Sans"/>
-                <a:ea typeface="Open Sans"/>
-                <a:cs typeface="Open Sans"/>
-                <a:sym typeface="Open Sans"/>
-              </a:rPr>
-              <a:t>Final Result</a:t>
-            </a:r>
-            <a:r>
-              <a:rPr lang="it-IT" dirty="0">
-                <a:latin typeface="Open Sans"/>
-                <a:ea typeface="Open Sans"/>
-                <a:cs typeface="Open Sans"/>
-                <a:sym typeface="Open Sans"/>
-              </a:rPr>
-              <a:t>: F1-Score increased to 97.9% (Accuracy: 97.9%).</a:t>
-            </a:r>
-          </a:p>
-          <a:p>
-            <a:pPr marL="457200" lvl="0" indent="-342900" algn="l" rtl="0">
-              <a:lnSpc>
-                <a:spcPct val="150000"/>
-              </a:lnSpc>
-              <a:spcBef>
-                <a:spcPts val="0"/>
-              </a:spcBef>
-              <a:spcAft>
-                <a:spcPts val="0"/>
-              </a:spcAft>
-              <a:buSzPts val="1800"/>
-              <a:buFont typeface="Times New Roman"/>
-              <a:buChar char="●"/>
-            </a:pPr>
-            <a:r>
-              <a:rPr lang="it-IT" b="1" dirty="0">
-                <a:latin typeface="Open Sans"/>
-                <a:ea typeface="Open Sans"/>
-                <a:cs typeface="Open Sans"/>
-                <a:sym typeface="Open Sans"/>
-              </a:rPr>
-              <a:t>Key Benefit</a:t>
-            </a:r>
-            <a:r>
-              <a:rPr lang="it-IT" dirty="0">
-                <a:latin typeface="Open Sans"/>
-                <a:ea typeface="Open Sans"/>
-                <a:cs typeface="Open Sans"/>
-                <a:sym typeface="Open Sans"/>
-              </a:rPr>
-              <a:t>: Better generalization and lower risk of overfitting.</a:t>
-            </a:r>
-            <a:endParaRPr dirty="0">
-              <a:latin typeface="Open Sans"/>
-              <a:ea typeface="Open Sans"/>
-              <a:cs typeface="Open Sans"/>
-              <a:sym typeface="Open Sans"/>
-            </a:endParaRPr>
-          </a:p>
-        </p:txBody>
-      </p:sp>
-      <p:sp>
-        <p:nvSpPr>
-          <p:cNvPr id="68" name="Google Shape;68;p14"/>
-          <p:cNvSpPr txBox="1">
-            <a:spLocks noGrp="1"/>
-          </p:cNvSpPr>
-          <p:nvPr>
-            <p:ph type="sldNum" idx="12"/>
-          </p:nvPr>
-        </p:nvSpPr>
-        <p:spPr>
-          <a:xfrm>
-            <a:off x="8472458" y="4663217"/>
-            <a:ext cx="548700" cy="393600"/>
-          </a:xfrm>
-          <a:prstGeom prst="rect">
-            <a:avLst/>
-          </a:prstGeom>
-        </p:spPr>
-        <p:txBody>
-          <a:bodyPr spcFirstLastPara="1" wrap="square" lIns="91425" tIns="91425" rIns="91425" bIns="91425" anchor="ctr" anchorCtr="0">
-            <a:normAutofit/>
-          </a:bodyPr>
-          <a:lstStyle/>
-          <a:p>
-            <a:pPr marL="0" lvl="0" indent="0" algn="r" rtl="0">
-              <a:spcBef>
-                <a:spcPts val="0"/>
-              </a:spcBef>
-              <a:spcAft>
-                <a:spcPts val="0"/>
-              </a:spcAft>
-              <a:buNone/>
-            </a:pPr>
-            <a:r>
-              <a:rPr lang="it" dirty="0">
-                <a:latin typeface="Times New Roman"/>
-                <a:ea typeface="Times New Roman"/>
-                <a:cs typeface="Times New Roman"/>
-                <a:sym typeface="Times New Roman"/>
-              </a:rPr>
-              <a:t>22/27</a:t>
-            </a:r>
-            <a:endParaRPr dirty="0">
-              <a:latin typeface="Times New Roman"/>
-              <a:ea typeface="Times New Roman"/>
-              <a:cs typeface="Times New Roman"/>
-              <a:sym typeface="Times New Roman"/>
-            </a:endParaRPr>
-          </a:p>
-        </p:txBody>
-      </p:sp>
-      <p:cxnSp>
-        <p:nvCxnSpPr>
-          <p:cNvPr id="69" name="Google Shape;69;p14"/>
-          <p:cNvCxnSpPr/>
-          <p:nvPr/>
-        </p:nvCxnSpPr>
-        <p:spPr>
-          <a:xfrm>
-            <a:off x="276600" y="789125"/>
-            <a:ext cx="4295400" cy="0"/>
-          </a:xfrm>
-          <a:prstGeom prst="straightConnector1">
-            <a:avLst/>
-          </a:prstGeom>
-          <a:noFill/>
-          <a:ln w="9525" cap="flat" cmpd="sng">
-            <a:solidFill>
-              <a:schemeClr val="dk2"/>
-            </a:solidFill>
-            <a:prstDash val="solid"/>
-            <a:round/>
-            <a:headEnd type="none" w="med" len="med"/>
-            <a:tailEnd type="none" w="med" len="med"/>
-          </a:ln>
-        </p:spPr>
-      </p:cxnSp>
-    </p:spTree>
-    <p:extLst>
-      <p:ext uri="{BB962C8B-B14F-4D97-AF65-F5344CB8AC3E}">
-        <p14:creationId xmlns:p14="http://schemas.microsoft.com/office/powerpoint/2010/main" val="2276970252"/>
-      </p:ext>
-    </p:extLst>
-  </p:cSld>
-  <p:clrMapOvr>
-    <a:masterClrMapping/>
-  </p:clrMapOvr>
-</p:sld>
-</file>
-
-<file path=ppt/slides/slide24.xml><?xml version="1.0" encoding="utf-8"?>
-<p:sld xmlns:a="http://schemas.openxmlformats.org/drawingml/2006/main" xmlns:r="http://schemas.openxmlformats.org/officeDocument/2006/relationships" xmlns:p="http://schemas.openxmlformats.org/presentationml/2006/main">
-  <p:cSld>
-    <p:spTree>
-      <p:nvGrpSpPr>
-        <p:cNvPr id="1" name="Shape 65"/>
-        <p:cNvGrpSpPr/>
-        <p:nvPr/>
-      </p:nvGrpSpPr>
-      <p:grpSpPr>
-        <a:xfrm>
-          <a:off x="0" y="0"/>
-          <a:ext cx="0" cy="0"/>
-          <a:chOff x="0" y="0"/>
-          <a:chExt cx="0" cy="0"/>
-        </a:xfrm>
-      </p:grpSpPr>
-      <p:sp>
-        <p:nvSpPr>
-          <p:cNvPr id="66" name="Google Shape;66;p14"/>
-          <p:cNvSpPr txBox="1">
-            <a:spLocks noGrp="1"/>
-          </p:cNvSpPr>
-          <p:nvPr>
-            <p:ph type="title"/>
-          </p:nvPr>
-        </p:nvSpPr>
-        <p:spPr>
-          <a:xfrm>
-            <a:off x="311700" y="64025"/>
-            <a:ext cx="8520600" cy="572700"/>
-          </a:xfrm>
-          <a:prstGeom prst="rect">
-            <a:avLst/>
-          </a:prstGeom>
-        </p:spPr>
-        <p:txBody>
-          <a:bodyPr spcFirstLastPara="1" wrap="square" lIns="91425" tIns="91425" rIns="91425" bIns="91425" anchor="t" anchorCtr="0">
-            <a:noAutofit/>
-          </a:bodyPr>
-          <a:lstStyle/>
-          <a:p>
-            <a:pPr marL="0" lvl="0" indent="0" algn="l" rtl="0">
-              <a:spcBef>
-                <a:spcPts val="0"/>
-              </a:spcBef>
-              <a:spcAft>
-                <a:spcPts val="0"/>
-              </a:spcAft>
-              <a:buSzPts val="990"/>
-              <a:buNone/>
-            </a:pPr>
-            <a:r>
-              <a:rPr lang="it-IT" sz="3720" b="1" dirty="0">
-                <a:latin typeface="Roboto Serif"/>
-                <a:ea typeface="Roboto Serif"/>
-                <a:cs typeface="Roboto Serif"/>
-                <a:sym typeface="Roboto Serif"/>
-              </a:rPr>
-              <a:t>LightGBM optimization</a:t>
-            </a:r>
-            <a:endParaRPr sz="3720" b="1" dirty="0">
-              <a:latin typeface="Roboto Serif"/>
-              <a:ea typeface="Roboto Serif"/>
-              <a:cs typeface="Roboto Serif"/>
-              <a:sym typeface="Roboto Serif"/>
-            </a:endParaRPr>
-          </a:p>
-        </p:txBody>
-      </p:sp>
-      <p:sp>
-        <p:nvSpPr>
-          <p:cNvPr id="68" name="Google Shape;68;p14"/>
-          <p:cNvSpPr txBox="1">
-            <a:spLocks noGrp="1"/>
-          </p:cNvSpPr>
-          <p:nvPr>
-            <p:ph type="sldNum" idx="12"/>
-          </p:nvPr>
-        </p:nvSpPr>
-        <p:spPr>
-          <a:xfrm>
-            <a:off x="8472458" y="4663217"/>
-            <a:ext cx="548700" cy="393600"/>
-          </a:xfrm>
-          <a:prstGeom prst="rect">
-            <a:avLst/>
-          </a:prstGeom>
-        </p:spPr>
-        <p:txBody>
-          <a:bodyPr spcFirstLastPara="1" wrap="square" lIns="91425" tIns="91425" rIns="91425" bIns="91425" anchor="ctr" anchorCtr="0">
-            <a:normAutofit/>
-          </a:bodyPr>
-          <a:lstStyle/>
-          <a:p>
-            <a:pPr marL="0" lvl="0" indent="0" algn="r" rtl="0">
-              <a:spcBef>
-                <a:spcPts val="0"/>
-              </a:spcBef>
-              <a:spcAft>
-                <a:spcPts val="0"/>
-              </a:spcAft>
-              <a:buNone/>
-            </a:pPr>
-            <a:r>
-              <a:rPr lang="it" dirty="0">
-                <a:latin typeface="Times New Roman"/>
-                <a:ea typeface="Times New Roman"/>
-                <a:cs typeface="Times New Roman"/>
-                <a:sym typeface="Times New Roman"/>
-              </a:rPr>
-              <a:t>23/27</a:t>
-            </a:r>
-            <a:endParaRPr dirty="0">
-              <a:latin typeface="Times New Roman"/>
-              <a:ea typeface="Times New Roman"/>
-              <a:cs typeface="Times New Roman"/>
-              <a:sym typeface="Times New Roman"/>
-            </a:endParaRPr>
-          </a:p>
-        </p:txBody>
-      </p:sp>
-      <p:cxnSp>
-        <p:nvCxnSpPr>
-          <p:cNvPr id="69" name="Google Shape;69;p14"/>
-          <p:cNvCxnSpPr/>
-          <p:nvPr/>
-        </p:nvCxnSpPr>
-        <p:spPr>
-          <a:xfrm>
-            <a:off x="276600" y="789125"/>
-            <a:ext cx="4295400" cy="0"/>
-          </a:xfrm>
-          <a:prstGeom prst="straightConnector1">
-            <a:avLst/>
-          </a:prstGeom>
-          <a:noFill/>
-          <a:ln w="9525" cap="flat" cmpd="sng">
-            <a:solidFill>
-              <a:schemeClr val="dk2"/>
-            </a:solidFill>
-            <a:prstDash val="solid"/>
-            <a:round/>
-            <a:headEnd type="none" w="med" len="med"/>
-            <a:tailEnd type="none" w="med" len="med"/>
-          </a:ln>
-        </p:spPr>
-      </p:cxnSp>
-      <p:pic>
-        <p:nvPicPr>
-          <p:cNvPr id="7" name="Picture 6" descr="A blue squares with white text&#10;&#10;AI-generated content may be incorrect.">
-            <a:extLst>
-              <a:ext uri="{FF2B5EF4-FFF2-40B4-BE49-F238E27FC236}">
-                <a16:creationId xmlns:a16="http://schemas.microsoft.com/office/drawing/2014/main" id="{BB39854A-617E-51AF-CBC2-5D1150F229E8}"/>
-              </a:ext>
-            </a:extLst>
-          </p:cNvPr>
-          <p:cNvPicPr>
-            <a:picLocks noChangeAspect="1"/>
-          </p:cNvPicPr>
-          <p:nvPr/>
-        </p:nvPicPr>
-        <p:blipFill>
-          <a:blip r:embed="rId3"/>
-          <a:stretch>
-            <a:fillRect/>
-          </a:stretch>
-        </p:blipFill>
-        <p:spPr>
-          <a:xfrm>
-            <a:off x="4572000" y="1505473"/>
-            <a:ext cx="3612324" cy="2740624"/>
-          </a:xfrm>
-          <a:prstGeom prst="rect">
-            <a:avLst/>
-          </a:prstGeom>
-        </p:spPr>
-      </p:pic>
-      <p:pic>
-        <p:nvPicPr>
-          <p:cNvPr id="6" name="Picture 5" descr="A blue squares with white text&#10;&#10;AI-generated content may be incorrect.">
-            <a:extLst>
-              <a:ext uri="{FF2B5EF4-FFF2-40B4-BE49-F238E27FC236}">
-                <a16:creationId xmlns:a16="http://schemas.microsoft.com/office/drawing/2014/main" id="{9582D80C-799F-D454-0A4B-0E9793E1588B}"/>
-              </a:ext>
-            </a:extLst>
-          </p:cNvPr>
-          <p:cNvPicPr>
-            <a:picLocks noChangeAspect="1"/>
-          </p:cNvPicPr>
-          <p:nvPr/>
-        </p:nvPicPr>
-        <p:blipFill>
-          <a:blip r:embed="rId4"/>
-          <a:stretch>
-            <a:fillRect/>
-          </a:stretch>
-        </p:blipFill>
-        <p:spPr>
-          <a:xfrm>
-            <a:off x="276600" y="1505473"/>
-            <a:ext cx="3612325" cy="2740625"/>
-          </a:xfrm>
-          <a:prstGeom prst="rect">
-            <a:avLst/>
-          </a:prstGeom>
-        </p:spPr>
-      </p:pic>
-      <p:cxnSp>
-        <p:nvCxnSpPr>
-          <p:cNvPr id="10" name="Straight Connector 9">
-            <a:extLst>
-              <a:ext uri="{FF2B5EF4-FFF2-40B4-BE49-F238E27FC236}">
-                <a16:creationId xmlns:a16="http://schemas.microsoft.com/office/drawing/2014/main" id="{735A507F-C676-F51D-35EA-593B7B0F3122}"/>
-              </a:ext>
-            </a:extLst>
-          </p:cNvPr>
-          <p:cNvCxnSpPr/>
-          <p:nvPr/>
-        </p:nvCxnSpPr>
-        <p:spPr>
-          <a:xfrm>
-            <a:off x="4340352" y="1377696"/>
-            <a:ext cx="0" cy="3163824"/>
-          </a:xfrm>
-          <a:prstGeom prst="line">
-            <a:avLst/>
-          </a:prstGeom>
-          <a:ln w="12700"/>
-        </p:spPr>
-        <p:style>
-          <a:lnRef idx="1">
-            <a:schemeClr val="dk1"/>
-          </a:lnRef>
-          <a:fillRef idx="0">
-            <a:schemeClr val="dk1"/>
-          </a:fillRef>
-          <a:effectRef idx="0">
-            <a:schemeClr val="dk1"/>
-          </a:effectRef>
-          <a:fontRef idx="minor">
-            <a:schemeClr val="tx1"/>
-          </a:fontRef>
-        </p:style>
-      </p:cxnSp>
-    </p:spTree>
-    <p:extLst>
-      <p:ext uri="{BB962C8B-B14F-4D97-AF65-F5344CB8AC3E}">
-        <p14:creationId xmlns:p14="http://schemas.microsoft.com/office/powerpoint/2010/main" val="3973191263"/>
-      </p:ext>
-    </p:extLst>
-  </p:cSld>
-  <p:clrMapOvr>
-    <a:masterClrMapping/>
-  </p:clrMapOvr>
-</p:sld>
-</file>
-
-<file path=ppt/slides/slide25.xml><?xml version="1.0" encoding="utf-8"?>
 <p:sld xmlns:a="http://schemas.openxmlformats.org/drawingml/2006/main" xmlns:r="http://schemas.openxmlformats.org/officeDocument/2006/relationships" xmlns:p="http://schemas.openxmlformats.org/presentationml/2006/main">
   <p:cSld>
     <p:spTree>
@@ -16845,7 +13695,7 @@
 </p:sld>
 </file>
 
-<file path=ppt/slides/slide26.xml><?xml version="1.0" encoding="utf-8"?>
+<file path=ppt/slides/slide21.xml><?xml version="1.0" encoding="utf-8"?>
 <p:sld xmlns:a="http://schemas.openxmlformats.org/drawingml/2006/main" xmlns:r="http://schemas.openxmlformats.org/officeDocument/2006/relationships" xmlns:p="http://schemas.openxmlformats.org/presentationml/2006/main">
   <p:cSld>
     <p:spTree>
@@ -17210,7 +14060,7 @@
 </p:sld>
 </file>
 
-<file path=ppt/slides/slide27.xml><?xml version="1.0" encoding="utf-8"?>
+<file path=ppt/slides/slide22.xml><?xml version="1.0" encoding="utf-8"?>
 <p:sld xmlns:a="http://schemas.openxmlformats.org/drawingml/2006/main" xmlns:r="http://schemas.openxmlformats.org/officeDocument/2006/relationships" xmlns:p="http://schemas.openxmlformats.org/presentationml/2006/main">
   <p:cSld>
     <p:spTree>
@@ -17547,7 +14397,7 @@
 </p:sld>
 </file>
 
-<file path=ppt/slides/slide28.xml><?xml version="1.0" encoding="utf-8"?>
+<file path=ppt/slides/slide23.xml><?xml version="1.0" encoding="utf-8"?>
 <p:sld xmlns:a="http://schemas.openxmlformats.org/drawingml/2006/main" xmlns:r="http://schemas.openxmlformats.org/officeDocument/2006/relationships" xmlns:p="http://schemas.openxmlformats.org/presentationml/2006/main">
   <p:cSld>
     <p:spTree>
@@ -17884,7 +14734,7 @@
 </p:sld>
 </file>
 
-<file path=ppt/slides/slide29.xml><?xml version="1.0" encoding="utf-8"?>
+<file path=ppt/slides/slide24.xml><?xml version="1.0" encoding="utf-8"?>
 <p:sld xmlns:a="http://schemas.openxmlformats.org/drawingml/2006/main" xmlns:r="http://schemas.openxmlformats.org/officeDocument/2006/relationships" xmlns:p="http://schemas.openxmlformats.org/presentationml/2006/main">
   <p:cSld>
     <p:spTree>

--- a/fake_news_detector_presentation.pptx
+++ b/fake_news_detector_presentation.pptx
@@ -302,6 +302,8 @@
 <file path=ppt/revisionInfo.xml><?xml version="1.0" encoding="utf-8"?>
 <p1510:revInfo xmlns:a="http://schemas.openxmlformats.org/drawingml/2006/main" xmlns:r="http://schemas.openxmlformats.org/officeDocument/2006/relationships" xmlns:p1510="http://schemas.microsoft.com/office/powerpoint/2015/10/main">
   <p1510:revLst>
+    <p1510:client id="{25783A39-BEE9-1A34-394D-A125150977C1}" v="85" dt="2026-06-02T09:56:28.433"/>
+    <p1510:client id="{27C493F5-8A4C-C2A6-BAE6-CA427F4A6D3E}" v="6" dt="2026-06-02T08:49:44.265"/>
     <p1510:client id="{BEB7EDDE-4270-F340-3BC1-8A7A7F104CB4}" v="8" dt="2026-06-02T08:45:34.470"/>
   </p1510:revLst>
 </p1510:revInfo>
@@ -8178,13 +8180,22 @@
               <a:buNone/>
             </a:pPr>
             <a:r>
+              <a:rPr lang="it-IT" sz="3600" b="1" dirty="0" err="1">
+                <a:latin typeface="Roboto Serif"/>
+                <a:ea typeface="Roboto Serif"/>
+                <a:cs typeface="Roboto Serif"/>
+                <a:sym typeface="Roboto Serif"/>
+              </a:rPr>
+              <a:t>FakeNews</a:t>
+            </a:r>
+            <a:r>
               <a:rPr lang="it-IT" sz="3600" b="1" dirty="0">
                 <a:latin typeface="Roboto Serif"/>
                 <a:ea typeface="Roboto Serif"/>
                 <a:cs typeface="Roboto Serif"/>
                 <a:sym typeface="Roboto Serif"/>
               </a:rPr>
-              <a:t>Fake news detection</a:t>
+              <a:t> detector</a:t>
             </a:r>
             <a:br>
               <a:rPr lang="it-IT" sz="3600" b="1" dirty="0">
@@ -8195,7 +8206,7 @@
               </a:rPr>
             </a:br>
             <a:r>
-              <a:rPr lang="it-IT" sz="1800" b="1">
+              <a:rPr lang="it-IT" sz="1800" b="1" dirty="0">
                 <a:latin typeface="Roboto Serif"/>
                 <a:ea typeface="Roboto Serif"/>
                 <a:cs typeface="Roboto Serif"/>
@@ -8212,7 +8223,7 @@
               </a:rPr>
             </a:br>
             <a:r>
-              <a:rPr lang="it-IT" sz="1800" b="1">
+              <a:rPr lang="it-IT" sz="1800" b="1" dirty="0">
                 <a:latin typeface="Roboto Serif"/>
                 <a:ea typeface="Roboto Serif"/>
                 <a:cs typeface="Roboto Serif"/>
@@ -8220,7 +8231,7 @@
               </a:rPr>
               <a:t>A.Y. 2025-2026</a:t>
             </a:r>
-            <a:endParaRPr sz="3600" b="1">
+            <a:endParaRPr sz="3600" b="1" dirty="0">
               <a:latin typeface="Roboto Serif"/>
               <a:ea typeface="Roboto Serif"/>
               <a:cs typeface="Roboto Serif"/>
@@ -11481,11 +11492,49 @@
         </p:spPr>
         <p:txBody>
           <a:bodyPr spcFirstLastPara="1" wrap="square" lIns="91425" tIns="91425" rIns="91425" bIns="91425" anchor="t" anchorCtr="0">
-            <a:normAutofit fontScale="85000" lnSpcReduction="10000"/>
+            <a:normAutofit fontScale="85000" lnSpcReduction="20000"/>
           </a:bodyPr>
           <a:lstStyle/>
           <a:p>
-            <a:pPr marL="457200" lvl="0" indent="-342900" algn="l" rtl="0">
+            <a:pPr>
+              <a:lnSpc>
+                <a:spcPct val="150000"/>
+              </a:lnSpc>
+              <a:buFont typeface="Times New Roman"/>
+              <a:buChar char="●"/>
+            </a:pPr>
+            <a:r>
+              <a:rPr lang="it-IT" b="1" dirty="0">
+                <a:latin typeface="Open Sans"/>
+                <a:ea typeface="Open Sans"/>
+                <a:cs typeface="Open Sans"/>
+              </a:rPr>
+              <a:t>Dataset Split: </a:t>
+            </a:r>
+            <a:r>
+              <a:rPr lang="it-IT">
+                <a:latin typeface="Open Sans"/>
+                <a:ea typeface="Open Sans"/>
+                <a:cs typeface="Open Sans"/>
+              </a:rPr>
+              <a:t>80% Training set and 20% Test set.</a:t>
+            </a:r>
+            <a:r>
+              <a:rPr lang="it-IT" dirty="0">
+                <a:latin typeface="Open Sans"/>
+                <a:ea typeface="Open Sans"/>
+                <a:cs typeface="Open Sans"/>
+              </a:rPr>
+              <a:t> </a:t>
+            </a:r>
+            <a:endParaRPr lang="it-IT" b="1" dirty="0">
+              <a:latin typeface="Open Sans"/>
+              <a:ea typeface="Open Sans"/>
+              <a:cs typeface="Open Sans"/>
+            </a:endParaRPr>
+          </a:p>
+          <a:p>
+            <a:pPr marL="457200" lvl="0" indent="-342900" algn="l">
               <a:lnSpc>
                 <a:spcPct val="150000"/>
               </a:lnSpc>
@@ -11499,6 +11548,15 @@
               <a:buFont typeface="Times New Roman"/>
               <a:buChar char="●"/>
             </a:pPr>
+            <a:r>
+              <a:rPr lang="it-IT" b="1" dirty="0" err="1">
+                <a:latin typeface="Open Sans"/>
+                <a:ea typeface="Open Sans"/>
+                <a:cs typeface="Open Sans"/>
+                <a:sym typeface="Open Sans"/>
+              </a:rPr>
+              <a:t>Validation</a:t>
+            </a:r>
             <a:r>
               <a:rPr lang="it-IT" b="1" dirty="0">
                 <a:latin typeface="Open Sans"/>
@@ -11506,7 +11564,7 @@
                 <a:cs typeface="Open Sans"/>
                 <a:sym typeface="Open Sans"/>
               </a:rPr>
-              <a:t>Validation Strategy</a:t>
+              <a:t> Strategy</a:t>
             </a:r>
             <a:r>
               <a:rPr lang="it-IT" dirty="0">
@@ -11515,8 +11573,45 @@
                 <a:cs typeface="Open Sans"/>
                 <a:sym typeface="Open Sans"/>
               </a:rPr>
-              <a:t>: Stratified 10-Fold Cross-Validation.</a:t>
-            </a:r>
+              <a:t>: </a:t>
+            </a:r>
+            <a:r>
+              <a:rPr lang="it-IT" dirty="0" err="1">
+                <a:latin typeface="Open Sans"/>
+                <a:ea typeface="Open Sans"/>
+                <a:cs typeface="Open Sans"/>
+                <a:sym typeface="Open Sans"/>
+              </a:rPr>
+              <a:t>Stratified</a:t>
+            </a:r>
+            <a:r>
+              <a:rPr lang="it-IT" dirty="0">
+                <a:latin typeface="Open Sans"/>
+                <a:ea typeface="Open Sans"/>
+                <a:cs typeface="Open Sans"/>
+                <a:sym typeface="Open Sans"/>
+              </a:rPr>
+              <a:t> 10-Fold Cross-</a:t>
+            </a:r>
+            <a:r>
+              <a:rPr lang="it-IT" dirty="0" err="1">
+                <a:latin typeface="Open Sans"/>
+                <a:ea typeface="Open Sans"/>
+                <a:cs typeface="Open Sans"/>
+                <a:sym typeface="Open Sans"/>
+              </a:rPr>
+              <a:t>Validation</a:t>
+            </a:r>
+            <a:r>
+              <a:rPr lang="it-IT" dirty="0">
+                <a:latin typeface="Open Sans"/>
+                <a:ea typeface="Open Sans"/>
+                <a:cs typeface="Open Sans"/>
+                <a:sym typeface="Open Sans"/>
+              </a:rPr>
+              <a:t>.</a:t>
+            </a:r>
+            <a:endParaRPr lang="it-IT"/>
           </a:p>
           <a:p>
             <a:pPr marL="457200" lvl="0" indent="-342900" algn="l" rtl="0">
@@ -11533,6 +11628,15 @@
               <a:buFont typeface="Times New Roman"/>
               <a:buChar char="●"/>
             </a:pPr>
+            <a:r>
+              <a:rPr lang="it-IT" b="1" dirty="0" err="1">
+                <a:latin typeface="Open Sans"/>
+                <a:ea typeface="Open Sans"/>
+                <a:cs typeface="Open Sans"/>
+                <a:sym typeface="Open Sans"/>
+              </a:rPr>
+              <a:t>Algorithms</a:t>
+            </a:r>
             <a:r>
               <a:rPr lang="it-IT" b="1" dirty="0">
                 <a:latin typeface="Open Sans"/>
@@ -11540,7 +11644,16 @@
                 <a:cs typeface="Open Sans"/>
                 <a:sym typeface="Open Sans"/>
               </a:rPr>
-              <a:t>Algorithms Tested</a:t>
+              <a:t> </a:t>
+            </a:r>
+            <a:r>
+              <a:rPr lang="it-IT" b="1" dirty="0" err="1">
+                <a:latin typeface="Open Sans"/>
+                <a:ea typeface="Open Sans"/>
+                <a:cs typeface="Open Sans"/>
+                <a:sym typeface="Open Sans"/>
+              </a:rPr>
+              <a:t>Tested</a:t>
             </a:r>
             <a:r>
               <a:rPr lang="it-IT" dirty="0">
@@ -11549,7 +11662,79 @@
                 <a:cs typeface="Open Sans"/>
                 <a:sym typeface="Open Sans"/>
               </a:rPr>
-              <a:t>: Logistic Regression, SVM, Random Forest, AdaBoost, LightGBM.</a:t>
+              <a:t>: </a:t>
+            </a:r>
+            <a:r>
+              <a:rPr lang="it-IT" dirty="0" err="1">
+                <a:latin typeface="Open Sans"/>
+                <a:ea typeface="Open Sans"/>
+                <a:cs typeface="Open Sans"/>
+                <a:sym typeface="Open Sans"/>
+              </a:rPr>
+              <a:t>Logistic</a:t>
+            </a:r>
+            <a:r>
+              <a:rPr lang="it-IT" dirty="0">
+                <a:latin typeface="Open Sans"/>
+                <a:ea typeface="Open Sans"/>
+                <a:cs typeface="Open Sans"/>
+                <a:sym typeface="Open Sans"/>
+              </a:rPr>
+              <a:t> </a:t>
+            </a:r>
+            <a:r>
+              <a:rPr lang="it-IT" dirty="0" err="1">
+                <a:latin typeface="Open Sans"/>
+                <a:ea typeface="Open Sans"/>
+                <a:cs typeface="Open Sans"/>
+                <a:sym typeface="Open Sans"/>
+              </a:rPr>
+              <a:t>Regression</a:t>
+            </a:r>
+            <a:r>
+              <a:rPr lang="it-IT" dirty="0">
+                <a:latin typeface="Open Sans"/>
+                <a:ea typeface="Open Sans"/>
+                <a:cs typeface="Open Sans"/>
+                <a:sym typeface="Open Sans"/>
+              </a:rPr>
+              <a:t>, SVM, Random Forest, </a:t>
+            </a:r>
+            <a:r>
+              <a:rPr lang="it-IT" dirty="0" err="1">
+                <a:latin typeface="Open Sans"/>
+                <a:ea typeface="Open Sans"/>
+                <a:cs typeface="Open Sans"/>
+                <a:sym typeface="Open Sans"/>
+              </a:rPr>
+              <a:t>AdaBoost</a:t>
+            </a:r>
+            <a:r>
+              <a:rPr lang="it-IT" dirty="0">
+                <a:latin typeface="Open Sans"/>
+                <a:ea typeface="Open Sans"/>
+                <a:cs typeface="Open Sans"/>
+                <a:sym typeface="Open Sans"/>
+              </a:rPr>
+              <a:t>, </a:t>
+            </a:r>
+            <a:r>
+              <a:rPr lang="it-IT" dirty="0" err="1">
+                <a:latin typeface="Open Sans"/>
+                <a:ea typeface="Open Sans"/>
+                <a:cs typeface="Open Sans"/>
+                <a:sym typeface="Open Sans"/>
+              </a:rPr>
+              <a:t>LightGBM</a:t>
+            </a:r>
+            <a:r>
+              <a:rPr lang="it-IT" dirty="0">
+                <a:latin typeface="Open Sans"/>
+                <a:ea typeface="Open Sans"/>
+                <a:cs typeface="Open Sans"/>
+                <a:sym typeface="Open Sans"/>
+              </a:rPr>
+              <a:t>.</a:t>
             </a:r>
           </a:p>
           <a:p>
@@ -11583,7 +11768,43 @@
                 <a:cs typeface="Open Sans"/>
                 <a:sym typeface="Open Sans"/>
               </a:rPr>
-              <a:t>: LightGBM (F1-Score: 0.971, Accuracy: 0.970).</a:t>
+              <a:t>: </a:t>
+            </a:r>
+            <a:r>
+              <a:rPr lang="it-IT" dirty="0" err="1">
+                <a:latin typeface="Open Sans"/>
+                <a:ea typeface="Open Sans"/>
+                <a:cs typeface="Open Sans"/>
+                <a:sym typeface="Open Sans"/>
+              </a:rPr>
+              <a:t>LightGBM</a:t>
+            </a:r>
+            <a:r>
+              <a:rPr lang="it-IT" dirty="0">
+                <a:latin typeface="Open Sans"/>
+                <a:ea typeface="Open Sans"/>
+                <a:cs typeface="Open Sans"/>
+                <a:sym typeface="Open Sans"/>
+              </a:rPr>
+              <a:t> (F1-Score: 0.971, </a:t>
+            </a:r>
+            <a:r>
+              <a:rPr lang="it-IT" dirty="0" err="1">
+                <a:latin typeface="Open Sans"/>
+                <a:ea typeface="Open Sans"/>
+                <a:cs typeface="Open Sans"/>
+                <a:sym typeface="Open Sans"/>
+              </a:rPr>
+              <a:t>Accuracy</a:t>
+            </a:r>
+            <a:r>
+              <a:rPr lang="it-IT" dirty="0">
+                <a:latin typeface="Open Sans"/>
+                <a:ea typeface="Open Sans"/>
+                <a:cs typeface="Open Sans"/>
+                <a:sym typeface="Open Sans"/>
+              </a:rPr>
+              <a:t>: 0.970).</a:t>
             </a:r>
           </a:p>
           <a:p>
@@ -11608,7 +11829,16 @@
                 <a:cs typeface="Open Sans"/>
                 <a:sym typeface="Open Sans"/>
               </a:rPr>
-              <a:t>Why LightGBM</a:t>
+              <a:t>Why </a:t>
+            </a:r>
+            <a:r>
+              <a:rPr lang="it-IT" b="1" dirty="0" err="1">
+                <a:latin typeface="Open Sans"/>
+                <a:ea typeface="Open Sans"/>
+                <a:cs typeface="Open Sans"/>
+                <a:sym typeface="Open Sans"/>
+              </a:rPr>
+              <a:t>LightGBM</a:t>
             </a:r>
             <a:r>
               <a:rPr lang="it-IT" dirty="0">
@@ -11617,7 +11847,97 @@
                 <a:cs typeface="Open Sans"/>
                 <a:sym typeface="Open Sans"/>
               </a:rPr>
-              <a:t>? Best balance between speed, precision, and handling of our high-dimensional features (TF-IDF).</a:t>
+              <a:t>? Best balance </a:t>
+            </a:r>
+            <a:r>
+              <a:rPr lang="it-IT" dirty="0" err="1">
+                <a:latin typeface="Open Sans"/>
+                <a:ea typeface="Open Sans"/>
+                <a:cs typeface="Open Sans"/>
+                <a:sym typeface="Open Sans"/>
+              </a:rPr>
+              <a:t>between</a:t>
+            </a:r>
+            <a:r>
+              <a:rPr lang="it-IT" dirty="0">
+                <a:latin typeface="Open Sans"/>
+                <a:ea typeface="Open Sans"/>
+                <a:cs typeface="Open Sans"/>
+                <a:sym typeface="Open Sans"/>
+              </a:rPr>
+              <a:t> speed, </a:t>
+            </a:r>
+            <a:r>
+              <a:rPr lang="it-IT" dirty="0" err="1">
+                <a:latin typeface="Open Sans"/>
+                <a:ea typeface="Open Sans"/>
+                <a:cs typeface="Open Sans"/>
+                <a:sym typeface="Open Sans"/>
+              </a:rPr>
+              <a:t>precision</a:t>
+            </a:r>
+            <a:r>
+              <a:rPr lang="it-IT" dirty="0">
+                <a:latin typeface="Open Sans"/>
+                <a:ea typeface="Open Sans"/>
+                <a:cs typeface="Open Sans"/>
+                <a:sym typeface="Open Sans"/>
+              </a:rPr>
+              <a:t>, and </a:t>
+            </a:r>
+            <a:r>
+              <a:rPr lang="it-IT" dirty="0" err="1">
+                <a:latin typeface="Open Sans"/>
+                <a:ea typeface="Open Sans"/>
+                <a:cs typeface="Open Sans"/>
+                <a:sym typeface="Open Sans"/>
+              </a:rPr>
+              <a:t>handling</a:t>
+            </a:r>
+            <a:r>
+              <a:rPr lang="it-IT" dirty="0">
+                <a:latin typeface="Open Sans"/>
+                <a:ea typeface="Open Sans"/>
+                <a:cs typeface="Open Sans"/>
+                <a:sym typeface="Open Sans"/>
+              </a:rPr>
+              <a:t> of </a:t>
+            </a:r>
+            <a:r>
+              <a:rPr lang="it-IT" dirty="0" err="1">
+                <a:latin typeface="Open Sans"/>
+                <a:ea typeface="Open Sans"/>
+                <a:cs typeface="Open Sans"/>
+                <a:sym typeface="Open Sans"/>
+              </a:rPr>
+              <a:t>our</a:t>
+            </a:r>
+            <a:r>
+              <a:rPr lang="it-IT" dirty="0">
+                <a:latin typeface="Open Sans"/>
+                <a:ea typeface="Open Sans"/>
+                <a:cs typeface="Open Sans"/>
+                <a:sym typeface="Open Sans"/>
+              </a:rPr>
+              <a:t> high-</a:t>
+            </a:r>
+            <a:r>
+              <a:rPr lang="it-IT" dirty="0" err="1">
+                <a:latin typeface="Open Sans"/>
+                <a:ea typeface="Open Sans"/>
+                <a:cs typeface="Open Sans"/>
+                <a:sym typeface="Open Sans"/>
+              </a:rPr>
+              <a:t>dimensional</a:t>
+            </a:r>
+            <a:r>
+              <a:rPr lang="it-IT" dirty="0">
+                <a:latin typeface="Open Sans"/>
+                <a:ea typeface="Open Sans"/>
+                <a:cs typeface="Open Sans"/>
+                <a:sym typeface="Open Sans"/>
+              </a:rPr>
+              <a:t> features (TF-IDF).</a:t>
             </a:r>
             <a:endParaRPr dirty="0">
               <a:latin typeface="Open Sans"/>
@@ -12192,21 +12512,39 @@
         </p:spPr>
         <p:txBody>
           <a:bodyPr spcFirstLastPara="1" wrap="square" lIns="91425" tIns="91425" rIns="91425" bIns="91425" anchor="t" anchorCtr="0">
-            <a:normAutofit fontScale="92500" lnSpcReduction="20000"/>
+            <a:normAutofit fontScale="85000" lnSpcReduction="20000"/>
           </a:bodyPr>
           <a:lstStyle/>
           <a:p>
-            <a:pPr marL="457200" lvl="0" indent="-342900" algn="l" rtl="0">
+            <a:pPr>
               <a:lnSpc>
                 <a:spcPct val="150000"/>
               </a:lnSpc>
-              <a:spcBef>
-                <a:spcPts val="0"/>
-              </a:spcBef>
-              <a:spcAft>
-                <a:spcPts val="0"/>
-              </a:spcAft>
-              <a:buSzPts val="1800"/>
+              <a:buFont typeface="Times New Roman"/>
+              <a:buChar char="●"/>
+            </a:pPr>
+            <a:r>
+              <a:rPr lang="it-IT" b="1" dirty="0">
+                <a:latin typeface="Open Sans"/>
+                <a:ea typeface="Open Sans"/>
+                <a:cs typeface="Open Sans"/>
+              </a:rPr>
+              <a:t>Dataset Split: </a:t>
+            </a:r>
+            <a:r>
+              <a:rPr lang="it-IT">
+                <a:latin typeface="Open Sans"/>
+                <a:ea typeface="Open Sans"/>
+                <a:cs typeface="Open Sans"/>
+              </a:rPr>
+              <a:t>80% Training set and 20% Test set.</a:t>
+            </a:r>
+          </a:p>
+          <a:p>
+            <a:pPr>
+              <a:lnSpc>
+                <a:spcPct val="150000"/>
+              </a:lnSpc>
               <a:buFont typeface="Times New Roman"/>
               <a:buChar char="●"/>
             </a:pPr>
@@ -12226,8 +12564,63 @@
                 <a:cs typeface="Open Sans"/>
                 <a:sym typeface="Open Sans"/>
               </a:rPr>
-              <a:t>: Grid Search with Stratified Cross-Validation.</a:t>
-            </a:r>
+              <a:t>: </a:t>
+            </a:r>
+            <a:r>
+              <a:rPr lang="it-IT" dirty="0" err="1">
+                <a:latin typeface="Open Sans"/>
+                <a:ea typeface="Open Sans"/>
+                <a:cs typeface="Open Sans"/>
+                <a:sym typeface="Open Sans"/>
+              </a:rPr>
+              <a:t>Grid</a:t>
+            </a:r>
+            <a:r>
+              <a:rPr lang="it-IT" dirty="0">
+                <a:latin typeface="Open Sans"/>
+                <a:ea typeface="Open Sans"/>
+                <a:cs typeface="Open Sans"/>
+                <a:sym typeface="Open Sans"/>
+              </a:rPr>
+              <a:t> Search with </a:t>
+            </a:r>
+            <a:r>
+              <a:rPr lang="it-IT" dirty="0" err="1">
+                <a:latin typeface="Open Sans"/>
+                <a:ea typeface="Open Sans"/>
+                <a:cs typeface="Open Sans"/>
+                <a:sym typeface="Open Sans"/>
+              </a:rPr>
+              <a:t>Stratified</a:t>
+            </a:r>
+            <a:r>
+              <a:rPr lang="it-IT" dirty="0">
+                <a:latin typeface="Open Sans"/>
+                <a:ea typeface="Open Sans"/>
+                <a:cs typeface="Open Sans"/>
+                <a:sym typeface="Open Sans"/>
+              </a:rPr>
+              <a:t> 3-Fold Cross-</a:t>
+            </a:r>
+            <a:r>
+              <a:rPr lang="it-IT" dirty="0" err="1">
+                <a:latin typeface="Open Sans"/>
+                <a:ea typeface="Open Sans"/>
+                <a:cs typeface="Open Sans"/>
+                <a:sym typeface="Open Sans"/>
+              </a:rPr>
+              <a:t>Validation</a:t>
+            </a:r>
+            <a:r>
+              <a:rPr lang="it-IT" dirty="0">
+                <a:latin typeface="Open Sans"/>
+                <a:ea typeface="Open Sans"/>
+                <a:cs typeface="Open Sans"/>
+                <a:sym typeface="Open Sans"/>
+              </a:rPr>
+              <a:t>.</a:t>
+            </a:r>
+            <a:endParaRPr lang="it-IT"/>
           </a:p>
           <a:p>
             <a:pPr marL="457200" lvl="0" indent="-342900" algn="l" rtl="0">
@@ -12251,7 +12644,16 @@
                 <a:cs typeface="Open Sans"/>
                 <a:sym typeface="Open Sans"/>
               </a:rPr>
-              <a:t>Target Metric</a:t>
+              <a:t>Target </a:t>
+            </a:r>
+            <a:r>
+              <a:rPr lang="it-IT" b="1" dirty="0" err="1">
+                <a:latin typeface="Open Sans"/>
+                <a:ea typeface="Open Sans"/>
+                <a:cs typeface="Open Sans"/>
+                <a:sym typeface="Open Sans"/>
+              </a:rPr>
+              <a:t>Metric</a:t>
             </a:r>
             <a:r>
               <a:rPr lang="it-IT" dirty="0">
@@ -12260,7 +12662,25 @@
                 <a:cs typeface="Open Sans"/>
                 <a:sym typeface="Open Sans"/>
               </a:rPr>
-              <a:t>: Maximizing F1-Score.</a:t>
+              <a:t>: </a:t>
+            </a:r>
+            <a:r>
+              <a:rPr lang="it-IT" dirty="0" err="1">
+                <a:latin typeface="Open Sans"/>
+                <a:ea typeface="Open Sans"/>
+                <a:cs typeface="Open Sans"/>
+                <a:sym typeface="Open Sans"/>
+              </a:rPr>
+              <a:t>Maximizing</a:t>
+            </a:r>
+            <a:r>
+              <a:rPr lang="it-IT" dirty="0">
+                <a:latin typeface="Open Sans"/>
+                <a:ea typeface="Open Sans"/>
+                <a:cs typeface="Open Sans"/>
+                <a:sym typeface="Open Sans"/>
+              </a:rPr>
+              <a:t> F1-Score.</a:t>
             </a:r>
           </a:p>
           <a:p>
@@ -12278,6 +12698,15 @@
               <a:buFont typeface="Times New Roman"/>
               <a:buChar char="●"/>
             </a:pPr>
+            <a:r>
+              <a:rPr lang="it-IT" b="1" dirty="0" err="1">
+                <a:latin typeface="Open Sans"/>
+                <a:ea typeface="Open Sans"/>
+                <a:cs typeface="Open Sans"/>
+                <a:sym typeface="Open Sans"/>
+              </a:rPr>
+              <a:t>Tuned</a:t>
+            </a:r>
             <a:r>
               <a:rPr lang="it-IT" b="1" dirty="0">
                 <a:latin typeface="Open Sans"/>
@@ -12285,7 +12714,16 @@
                 <a:cs typeface="Open Sans"/>
                 <a:sym typeface="Open Sans"/>
               </a:rPr>
-              <a:t>Tuned Parameters</a:t>
+              <a:t> </a:t>
+            </a:r>
+            <a:r>
+              <a:rPr lang="it-IT" b="1" dirty="0" err="1">
+                <a:latin typeface="Open Sans"/>
+                <a:ea typeface="Open Sans"/>
+                <a:cs typeface="Open Sans"/>
+                <a:sym typeface="Open Sans"/>
+              </a:rPr>
+              <a:t>Parameters</a:t>
             </a:r>
             <a:r>
               <a:rPr lang="it-IT" dirty="0">
@@ -12294,7 +12732,79 @@
                 <a:cs typeface="Open Sans"/>
                 <a:sym typeface="Open Sans"/>
               </a:rPr>
-              <a:t>: learning_rate, num_leaves, max_depth, n_estimators.</a:t>
+              <a:t>: </a:t>
+            </a:r>
+            <a:r>
+              <a:rPr lang="it-IT" dirty="0" err="1">
+                <a:latin typeface="Open Sans"/>
+                <a:ea typeface="Open Sans"/>
+                <a:cs typeface="Open Sans"/>
+                <a:sym typeface="Open Sans"/>
+              </a:rPr>
+              <a:t>learning_rate</a:t>
+            </a:r>
+            <a:r>
+              <a:rPr lang="it-IT" dirty="0">
+                <a:latin typeface="Open Sans"/>
+                <a:ea typeface="Open Sans"/>
+                <a:cs typeface="Open Sans"/>
+                <a:sym typeface="Open Sans"/>
+              </a:rPr>
+              <a:t>, </a:t>
+            </a:r>
+            <a:r>
+              <a:rPr lang="it-IT" dirty="0" err="1">
+                <a:latin typeface="Open Sans"/>
+                <a:ea typeface="Open Sans"/>
+                <a:cs typeface="Open Sans"/>
+                <a:sym typeface="Open Sans"/>
+              </a:rPr>
+              <a:t>num_leaves</a:t>
+            </a:r>
+            <a:r>
+              <a:rPr lang="it-IT" dirty="0">
+                <a:latin typeface="Open Sans"/>
+                <a:ea typeface="Open Sans"/>
+                <a:cs typeface="Open Sans"/>
+                <a:sym typeface="Open Sans"/>
+              </a:rPr>
+              <a:t>, </a:t>
+            </a:r>
+            <a:r>
+              <a:rPr lang="it-IT" dirty="0" err="1">
+                <a:latin typeface="Open Sans"/>
+                <a:ea typeface="Open Sans"/>
+                <a:cs typeface="Open Sans"/>
+                <a:sym typeface="Open Sans"/>
+              </a:rPr>
+              <a:t>max_depth</a:t>
+            </a:r>
+            <a:r>
+              <a:rPr lang="it-IT" dirty="0">
+                <a:latin typeface="Open Sans"/>
+                <a:ea typeface="Open Sans"/>
+                <a:cs typeface="Open Sans"/>
+                <a:sym typeface="Open Sans"/>
+              </a:rPr>
+              <a:t>, </a:t>
+            </a:r>
+            <a:r>
+              <a:rPr lang="it-IT" dirty="0" err="1">
+                <a:latin typeface="Open Sans"/>
+                <a:ea typeface="Open Sans"/>
+                <a:cs typeface="Open Sans"/>
+                <a:sym typeface="Open Sans"/>
+              </a:rPr>
+              <a:t>n_estimators</a:t>
+            </a:r>
+            <a:r>
+              <a:rPr lang="it-IT" dirty="0">
+                <a:latin typeface="Open Sans"/>
+                <a:ea typeface="Open Sans"/>
+                <a:cs typeface="Open Sans"/>
+                <a:sym typeface="Open Sans"/>
+              </a:rPr>
+              <a:t>.</a:t>
             </a:r>
           </a:p>
           <a:p>
@@ -12312,6 +12822,15 @@
               <a:buFont typeface="Times New Roman"/>
               <a:buChar char="●"/>
             </a:pPr>
+            <a:r>
+              <a:rPr lang="it-IT" b="1" dirty="0" err="1">
+                <a:latin typeface="Open Sans"/>
+                <a:ea typeface="Open Sans"/>
+                <a:cs typeface="Open Sans"/>
+                <a:sym typeface="Open Sans"/>
+              </a:rPr>
+              <a:t>Final</a:t>
+            </a:r>
             <a:r>
               <a:rPr lang="it-IT" b="1" dirty="0">
                 <a:latin typeface="Open Sans"/>
@@ -12319,7 +12838,16 @@
                 <a:cs typeface="Open Sans"/>
                 <a:sym typeface="Open Sans"/>
               </a:rPr>
-              <a:t>Final Result</a:t>
+              <a:t> </a:t>
+            </a:r>
+            <a:r>
+              <a:rPr lang="it-IT" b="1" dirty="0" err="1">
+                <a:latin typeface="Open Sans"/>
+                <a:ea typeface="Open Sans"/>
+                <a:cs typeface="Open Sans"/>
+                <a:sym typeface="Open Sans"/>
+              </a:rPr>
+              <a:t>Result</a:t>
             </a:r>
             <a:r>
               <a:rPr lang="it-IT" dirty="0">
@@ -12328,7 +12856,43 @@
                 <a:cs typeface="Open Sans"/>
                 <a:sym typeface="Open Sans"/>
               </a:rPr>
-              <a:t>: F1-Score increased to 97.9% (Accuracy: 97.9%).</a:t>
+              <a:t>: F1-Score </a:t>
+            </a:r>
+            <a:r>
+              <a:rPr lang="it-IT" dirty="0" err="1">
+                <a:latin typeface="Open Sans"/>
+                <a:ea typeface="Open Sans"/>
+                <a:cs typeface="Open Sans"/>
+                <a:sym typeface="Open Sans"/>
+              </a:rPr>
+              <a:t>increased</a:t>
+            </a:r>
+            <a:r>
+              <a:rPr lang="it-IT" dirty="0">
+                <a:latin typeface="Open Sans"/>
+                <a:ea typeface="Open Sans"/>
+                <a:cs typeface="Open Sans"/>
+                <a:sym typeface="Open Sans"/>
+              </a:rPr>
+              <a:t> to 97.9% (</a:t>
+            </a:r>
+            <a:r>
+              <a:rPr lang="it-IT" dirty="0" err="1">
+                <a:latin typeface="Open Sans"/>
+                <a:ea typeface="Open Sans"/>
+                <a:cs typeface="Open Sans"/>
+                <a:sym typeface="Open Sans"/>
+              </a:rPr>
+              <a:t>Accuracy</a:t>
+            </a:r>
+            <a:r>
+              <a:rPr lang="it-IT" dirty="0">
+                <a:latin typeface="Open Sans"/>
+                <a:ea typeface="Open Sans"/>
+                <a:cs typeface="Open Sans"/>
+                <a:sym typeface="Open Sans"/>
+              </a:rPr>
+              <a:t>: 97.9%).</a:t>
             </a:r>
           </a:p>
           <a:p>
@@ -12362,7 +12926,61 @@
                 <a:cs typeface="Open Sans"/>
                 <a:sym typeface="Open Sans"/>
               </a:rPr>
-              <a:t>: Better generalization and lower risk of overfitting.</a:t>
+              <a:t>: Better </a:t>
+            </a:r>
+            <a:r>
+              <a:rPr lang="it-IT" dirty="0" err="1">
+                <a:latin typeface="Open Sans"/>
+                <a:ea typeface="Open Sans"/>
+                <a:cs typeface="Open Sans"/>
+                <a:sym typeface="Open Sans"/>
+              </a:rPr>
+              <a:t>generalization</a:t>
+            </a:r>
+            <a:r>
+              <a:rPr lang="it-IT" dirty="0">
+                <a:latin typeface="Open Sans"/>
+                <a:ea typeface="Open Sans"/>
+                <a:cs typeface="Open Sans"/>
+                <a:sym typeface="Open Sans"/>
+              </a:rPr>
+              <a:t> and </a:t>
+            </a:r>
+            <a:r>
+              <a:rPr lang="it-IT" dirty="0" err="1">
+                <a:latin typeface="Open Sans"/>
+                <a:ea typeface="Open Sans"/>
+                <a:cs typeface="Open Sans"/>
+                <a:sym typeface="Open Sans"/>
+              </a:rPr>
+              <a:t>lower</a:t>
+            </a:r>
+            <a:r>
+              <a:rPr lang="it-IT" dirty="0">
+                <a:latin typeface="Open Sans"/>
+                <a:ea typeface="Open Sans"/>
+                <a:cs typeface="Open Sans"/>
+                <a:sym typeface="Open Sans"/>
+              </a:rPr>
+              <a:t> risk of </a:t>
+            </a:r>
+            <a:r>
+              <a:rPr lang="it-IT" dirty="0" err="1">
+                <a:latin typeface="Open Sans"/>
+                <a:ea typeface="Open Sans"/>
+                <a:cs typeface="Open Sans"/>
+                <a:sym typeface="Open Sans"/>
+              </a:rPr>
+              <a:t>overfitting</a:t>
+            </a:r>
+            <a:r>
+              <a:rPr lang="it-IT" dirty="0">
+                <a:latin typeface="Open Sans"/>
+                <a:ea typeface="Open Sans"/>
+                <a:cs typeface="Open Sans"/>
+                <a:sym typeface="Open Sans"/>
+              </a:rPr>
+              <a:t>.</a:t>
             </a:r>
             <a:endParaRPr dirty="0">
               <a:latin typeface="Open Sans"/>
@@ -14863,38 +15481,45 @@
             </a:r>
           </a:p>
           <a:p>
-            <a:pPr marL="457200" lvl="0" indent="-342900" algn="l" rtl="0">
+            <a:pPr>
               <a:lnSpc>
                 <a:spcPct val="150000"/>
               </a:lnSpc>
-              <a:spcBef>
-                <a:spcPts val="0"/>
-              </a:spcBef>
-              <a:spcAft>
-                <a:spcPts val="0"/>
-              </a:spcAft>
-              <a:buSzPts val="1800"/>
               <a:buFont typeface="Times New Roman"/>
               <a:buChar char="●"/>
             </a:pPr>
             <a:r>
               <a:rPr lang="en-US" b="1" dirty="0">
-                <a:latin typeface="Open Sans" panose="020B0606030504020204" pitchFamily="34" charset="0"/>
-                <a:ea typeface="Open Sans" panose="020B0606030504020204" pitchFamily="34" charset="0"/>
-                <a:cs typeface="Open Sans" panose="020B0606030504020204" pitchFamily="34" charset="0"/>
+                <a:latin typeface="Open Sans"/>
+                <a:ea typeface="Open Sans"/>
+                <a:cs typeface="Open Sans"/>
                 <a:sym typeface="Open Sans"/>
               </a:rPr>
               <a:t>Transparency</a:t>
             </a:r>
             <a:r>
               <a:rPr lang="en-US" dirty="0">
-                <a:latin typeface="Open Sans" panose="020B0606030504020204" pitchFamily="34" charset="0"/>
-                <a:ea typeface="Open Sans" panose="020B0606030504020204" pitchFamily="34" charset="0"/>
-                <a:cs typeface="Open Sans" panose="020B0606030504020204" pitchFamily="34" charset="0"/>
+                <a:latin typeface="Open Sans"/>
+                <a:ea typeface="Open Sans"/>
+                <a:cs typeface="Open Sans"/>
                 <a:sym typeface="Open Sans"/>
               </a:rPr>
-              <a:t>: Successfully bridged the gap between complex ML and user trust (Explainable AI).</a:t>
-            </a:r>
+              <a:t>: Successfully bridged the gap between complex ML and user </a:t>
+            </a:r>
+            <a:r>
+              <a:rPr lang="en-US">
+                <a:latin typeface="Open Sans"/>
+                <a:ea typeface="Open Sans"/>
+                <a:cs typeface="Open Sans"/>
+                <a:sym typeface="Open Sans"/>
+              </a:rPr>
+              <a:t>trust (through LIME).</a:t>
+            </a:r>
+            <a:endParaRPr lang="en-US">
+              <a:latin typeface="Open Sans"/>
+              <a:ea typeface="Open Sans"/>
+              <a:cs typeface="Open Sans"/>
+            </a:endParaRPr>
           </a:p>
           <a:p>
             <a:pPr marL="457200" lvl="0" indent="-342900" algn="l" rtl="0">
@@ -14969,22 +15594,81 @@
             </a:pPr>
             <a:r>
               <a:rPr lang="it-IT" b="1" dirty="0">
-                <a:latin typeface="Open Sans" panose="020B0606030504020204" pitchFamily="34" charset="0"/>
-                <a:ea typeface="Open Sans" panose="020B0606030504020204" pitchFamily="34" charset="0"/>
-                <a:cs typeface="Open Sans" panose="020B0606030504020204" pitchFamily="34" charset="0"/>
+                <a:latin typeface="Open Sans"/>
+                <a:ea typeface="Open Sans"/>
+                <a:cs typeface="Open Sans"/>
                 <a:sym typeface="Open Sans"/>
               </a:rPr>
               <a:t>Advanced Deep Learning</a:t>
             </a:r>
             <a:r>
               <a:rPr lang="it-IT" dirty="0">
-                <a:latin typeface="Open Sans" panose="020B0606030504020204" pitchFamily="34" charset="0"/>
-                <a:ea typeface="Open Sans" panose="020B0606030504020204" pitchFamily="34" charset="0"/>
-                <a:cs typeface="Open Sans" panose="020B0606030504020204" pitchFamily="34" charset="0"/>
+                <a:latin typeface="Open Sans"/>
+                <a:ea typeface="Open Sans"/>
+                <a:cs typeface="Open Sans"/>
                 <a:sym typeface="Open Sans"/>
               </a:rPr>
-              <a:t>: Transition to Transformer-based models (e.g., BERT / RoBERTa).</a:t>
-            </a:r>
+              <a:t>: </a:t>
+            </a:r>
+            <a:r>
+              <a:rPr lang="it-IT" dirty="0" err="1">
+                <a:latin typeface="Open Sans"/>
+                <a:ea typeface="Open Sans"/>
+                <a:cs typeface="Open Sans"/>
+                <a:sym typeface="Open Sans"/>
+              </a:rPr>
+              <a:t>Transition</a:t>
+            </a:r>
+            <a:r>
+              <a:rPr lang="it-IT" dirty="0">
+                <a:latin typeface="Open Sans"/>
+                <a:ea typeface="Open Sans"/>
+                <a:cs typeface="Open Sans"/>
+                <a:sym typeface="Open Sans"/>
+              </a:rPr>
+              <a:t> to Transformer-</a:t>
+            </a:r>
+            <a:r>
+              <a:rPr lang="it-IT" dirty="0" err="1">
+                <a:latin typeface="Open Sans"/>
+                <a:ea typeface="Open Sans"/>
+                <a:cs typeface="Open Sans"/>
+                <a:sym typeface="Open Sans"/>
+              </a:rPr>
+              <a:t>based</a:t>
+            </a:r>
+            <a:r>
+              <a:rPr lang="it-IT" dirty="0">
+                <a:latin typeface="Open Sans"/>
+                <a:ea typeface="Open Sans"/>
+                <a:cs typeface="Open Sans"/>
+                <a:sym typeface="Open Sans"/>
+              </a:rPr>
+              <a:t> models (e.g., BERT / </a:t>
+            </a:r>
+            <a:r>
+              <a:rPr lang="it-IT" dirty="0" err="1">
+                <a:latin typeface="Open Sans"/>
+                <a:ea typeface="Open Sans"/>
+                <a:cs typeface="Open Sans"/>
+                <a:sym typeface="Open Sans"/>
+              </a:rPr>
+              <a:t>RoBERTa</a:t>
+            </a:r>
+            <a:r>
+              <a:rPr lang="it-IT" dirty="0">
+                <a:latin typeface="Open Sans"/>
+                <a:ea typeface="Open Sans"/>
+                <a:cs typeface="Open Sans"/>
+                <a:sym typeface="Open Sans"/>
+              </a:rPr>
+              <a:t>).</a:t>
+            </a:r>
+            <a:endParaRPr lang="it-IT" dirty="0">
+              <a:latin typeface="Open Sans"/>
+              <a:ea typeface="Open Sans"/>
+              <a:cs typeface="Open Sans"/>
+            </a:endParaRPr>
           </a:p>
           <a:p>
             <a:pPr marL="457200" lvl="0" indent="-342900" algn="l" rtl="0">
@@ -15003,22 +15687,90 @@
             </a:pPr>
             <a:r>
               <a:rPr lang="it-IT" b="1" dirty="0">
-                <a:latin typeface="Open Sans" panose="020B0606030504020204" pitchFamily="34" charset="0"/>
-                <a:ea typeface="Open Sans" panose="020B0606030504020204" pitchFamily="34" charset="0"/>
-                <a:cs typeface="Open Sans" panose="020B0606030504020204" pitchFamily="34" charset="0"/>
+                <a:latin typeface="Open Sans"/>
+                <a:ea typeface="Open Sans"/>
+                <a:cs typeface="Open Sans"/>
                 <a:sym typeface="Open Sans"/>
               </a:rPr>
-              <a:t>Bias Mitigation</a:t>
+              <a:t>Bias </a:t>
+            </a:r>
+            <a:r>
+              <a:rPr lang="it-IT" b="1" dirty="0" err="1">
+                <a:latin typeface="Open Sans"/>
+                <a:ea typeface="Open Sans"/>
+                <a:cs typeface="Open Sans"/>
+                <a:sym typeface="Open Sans"/>
+              </a:rPr>
+              <a:t>Mitigation</a:t>
             </a:r>
             <a:r>
               <a:rPr lang="it-IT" dirty="0">
-                <a:latin typeface="Open Sans" panose="020B0606030504020204" pitchFamily="34" charset="0"/>
-                <a:ea typeface="Open Sans" panose="020B0606030504020204" pitchFamily="34" charset="0"/>
-                <a:cs typeface="Open Sans" panose="020B0606030504020204" pitchFamily="34" charset="0"/>
+                <a:latin typeface="Open Sans"/>
+                <a:ea typeface="Open Sans"/>
+                <a:cs typeface="Open Sans"/>
                 <a:sym typeface="Open Sans"/>
               </a:rPr>
-              <a:t>: Expand dataset to reduce US-politics domain bias.</a:t>
-            </a:r>
+              <a:t>: </a:t>
+            </a:r>
+            <a:r>
+              <a:rPr lang="it-IT" dirty="0" err="1">
+                <a:latin typeface="Open Sans"/>
+                <a:ea typeface="Open Sans"/>
+                <a:cs typeface="Open Sans"/>
+                <a:sym typeface="Open Sans"/>
+              </a:rPr>
+              <a:t>Expand</a:t>
+            </a:r>
+            <a:r>
+              <a:rPr lang="it-IT" dirty="0">
+                <a:latin typeface="Open Sans"/>
+                <a:ea typeface="Open Sans"/>
+                <a:cs typeface="Open Sans"/>
+                <a:sym typeface="Open Sans"/>
+              </a:rPr>
+              <a:t> dataset to reduce US-</a:t>
+            </a:r>
+            <a:r>
+              <a:rPr lang="it-IT" dirty="0" err="1">
+                <a:latin typeface="Open Sans"/>
+                <a:ea typeface="Open Sans"/>
+                <a:cs typeface="Open Sans"/>
+                <a:sym typeface="Open Sans"/>
+              </a:rPr>
+              <a:t>politics</a:t>
+            </a:r>
+            <a:r>
+              <a:rPr lang="it-IT" dirty="0">
+                <a:latin typeface="Open Sans"/>
+                <a:ea typeface="Open Sans"/>
+                <a:cs typeface="Open Sans"/>
+                <a:sym typeface="Open Sans"/>
+              </a:rPr>
+              <a:t> domain </a:t>
+            </a:r>
+            <a:r>
+              <a:rPr lang="it-IT" dirty="0" err="1">
+                <a:latin typeface="Open Sans"/>
+                <a:ea typeface="Open Sans"/>
+                <a:cs typeface="Open Sans"/>
+                <a:sym typeface="Open Sans"/>
+              </a:rPr>
+              <a:t>bias</a:t>
+            </a:r>
+            <a:r>
+              <a:rPr lang="it-IT" dirty="0">
+                <a:latin typeface="Open Sans"/>
+                <a:ea typeface="Open Sans"/>
+                <a:cs typeface="Open Sans"/>
+                <a:sym typeface="Open Sans"/>
+              </a:rPr>
+              <a:t>.</a:t>
+            </a:r>
+            <a:endParaRPr lang="it-IT" dirty="0">
+              <a:latin typeface="Open Sans"/>
+              <a:ea typeface="Open Sans"/>
+              <a:cs typeface="Open Sans"/>
+            </a:endParaRPr>
           </a:p>
           <a:p>
             <a:pPr marL="457200" lvl="0" indent="-342900" algn="l" rtl="0">
@@ -15036,27 +15788,108 @@
               <a:buChar char="●"/>
             </a:pPr>
             <a:r>
+              <a:rPr lang="it-IT" b="1" dirty="0" err="1">
+                <a:latin typeface="Open Sans"/>
+                <a:ea typeface="Open Sans"/>
+                <a:cs typeface="Open Sans"/>
+                <a:sym typeface="Open Sans"/>
+              </a:rPr>
+              <a:t>Multilingual</a:t>
+            </a:r>
+            <a:r>
               <a:rPr lang="it-IT" b="1" dirty="0">
-                <a:latin typeface="Open Sans" panose="020B0606030504020204" pitchFamily="34" charset="0"/>
-                <a:ea typeface="Open Sans" panose="020B0606030504020204" pitchFamily="34" charset="0"/>
-                <a:cs typeface="Open Sans" panose="020B0606030504020204" pitchFamily="34" charset="0"/>
+                <a:latin typeface="Open Sans"/>
+                <a:ea typeface="Open Sans"/>
+                <a:cs typeface="Open Sans"/>
                 <a:sym typeface="Open Sans"/>
               </a:rPr>
-              <a:t>Multilingual Support</a:t>
+              <a:t> Support</a:t>
             </a:r>
             <a:r>
               <a:rPr lang="it-IT" dirty="0">
-                <a:latin typeface="Open Sans" panose="020B0606030504020204" pitchFamily="34" charset="0"/>
-                <a:ea typeface="Open Sans" panose="020B0606030504020204" pitchFamily="34" charset="0"/>
-                <a:cs typeface="Open Sans" panose="020B0606030504020204" pitchFamily="34" charset="0"/>
+                <a:latin typeface="Open Sans"/>
+                <a:ea typeface="Open Sans"/>
+                <a:cs typeface="Open Sans"/>
                 <a:sym typeface="Open Sans"/>
               </a:rPr>
-              <a:t>: Extend detection capabilities beyond the English language.</a:t>
+              <a:t>: </a:t>
+            </a:r>
+            <a:r>
+              <a:rPr lang="it-IT" dirty="0" err="1">
+                <a:latin typeface="Open Sans"/>
+                <a:ea typeface="Open Sans"/>
+                <a:cs typeface="Open Sans"/>
+                <a:sym typeface="Open Sans"/>
+              </a:rPr>
+              <a:t>Extend</a:t>
+            </a:r>
+            <a:r>
+              <a:rPr lang="it-IT" dirty="0">
+                <a:latin typeface="Open Sans"/>
+                <a:ea typeface="Open Sans"/>
+                <a:cs typeface="Open Sans"/>
+                <a:sym typeface="Open Sans"/>
+              </a:rPr>
+              <a:t> </a:t>
+            </a:r>
+            <a:r>
+              <a:rPr lang="it-IT" dirty="0" err="1">
+                <a:latin typeface="Open Sans"/>
+                <a:ea typeface="Open Sans"/>
+                <a:cs typeface="Open Sans"/>
+                <a:sym typeface="Open Sans"/>
+              </a:rPr>
+              <a:t>detection</a:t>
+            </a:r>
+            <a:r>
+              <a:rPr lang="it-IT" dirty="0">
+                <a:latin typeface="Open Sans"/>
+                <a:ea typeface="Open Sans"/>
+                <a:cs typeface="Open Sans"/>
+                <a:sym typeface="Open Sans"/>
+              </a:rPr>
+              <a:t> capabilities </a:t>
+            </a:r>
+            <a:r>
+              <a:rPr lang="it-IT" dirty="0" err="1">
+                <a:latin typeface="Open Sans"/>
+                <a:ea typeface="Open Sans"/>
+                <a:cs typeface="Open Sans"/>
+                <a:sym typeface="Open Sans"/>
+              </a:rPr>
+              <a:t>beyond</a:t>
+            </a:r>
+            <a:r>
+              <a:rPr lang="it-IT" dirty="0">
+                <a:latin typeface="Open Sans"/>
+                <a:ea typeface="Open Sans"/>
+                <a:cs typeface="Open Sans"/>
+                <a:sym typeface="Open Sans"/>
+              </a:rPr>
+              <a:t> the English </a:t>
+            </a:r>
+            <a:r>
+              <a:rPr lang="it-IT" dirty="0" err="1">
+                <a:latin typeface="Open Sans"/>
+                <a:ea typeface="Open Sans"/>
+                <a:cs typeface="Open Sans"/>
+                <a:sym typeface="Open Sans"/>
+              </a:rPr>
+              <a:t>language</a:t>
+            </a:r>
+            <a:r>
+              <a:rPr lang="it-IT" dirty="0">
+                <a:latin typeface="Open Sans"/>
+                <a:ea typeface="Open Sans"/>
+                <a:cs typeface="Open Sans"/>
+                <a:sym typeface="Open Sans"/>
+              </a:rPr>
+              <a:t>.</a:t>
             </a:r>
             <a:endParaRPr dirty="0">
-              <a:latin typeface="Open Sans" panose="020B0606030504020204" pitchFamily="34" charset="0"/>
-              <a:ea typeface="Open Sans" panose="020B0606030504020204" pitchFamily="34" charset="0"/>
-              <a:cs typeface="Open Sans" panose="020B0606030504020204" pitchFamily="34" charset="0"/>
+              <a:latin typeface="Open Sans"/>
+              <a:ea typeface="Open Sans"/>
+              <a:cs typeface="Open Sans"/>
               <a:sym typeface="Open Sans"/>
             </a:endParaRPr>
           </a:p>
